--- a/slides/lesson-02-ai-agents-vibe-coding-desktop-utilities-animated.pptx
+++ b/slides/lesson-02-ai-agents-vibe-coding-desktop-utilities-animated.pptx
@@ -8,11 +8,11 @@
     <p:notesMasterId r:id="rId44"/>
   </p:notesMasterIdLst>
   <p:sldIdLst>
-    <p:sldId id="336" r:id="rId2"/>
-    <p:sldId id="342" r:id="rId3"/>
-    <p:sldId id="338" r:id="rId4"/>
-    <p:sldId id="293" r:id="rId5"/>
-    <p:sldId id="341" r:id="rId6"/>
+    <p:sldId id="341" r:id="rId2"/>
+    <p:sldId id="336" r:id="rId3"/>
+    <p:sldId id="342" r:id="rId4"/>
+    <p:sldId id="338" r:id="rId5"/>
+    <p:sldId id="293" r:id="rId6"/>
     <p:sldId id="294" r:id="rId7"/>
     <p:sldId id="295" r:id="rId8"/>
     <p:sldId id="296" r:id="rId9"/>
@@ -3236,8 +3236,16 @@
 </file>
 
 <file path=ppt/slides/slide1.xml><?xml version="1.0" encoding="utf-8"?>
-<p:sld xmlns:a="http://schemas.openxmlformats.org/drawingml/2006/main" xmlns:r="http://schemas.openxmlformats.org/officeDocument/2006/relationships" xmlns:p="http://schemas.openxmlformats.org/presentationml/2006/main">
+<p:sld xmlns:a="http://schemas.openxmlformats.org/drawingml/2006/main" xmlns:r="http://schemas.openxmlformats.org/officeDocument/2006/relationships" xmlns:p="http://schemas.openxmlformats.org/presentationml/2006/main" showMasterSp="0">
   <p:cSld>
+    <p:bg>
+      <p:bgPr>
+        <a:solidFill>
+          <a:srgbClr val="FFFFFF"/>
+        </a:solidFill>
+        <a:effectLst/>
+      </p:bgPr>
+    </p:bg>
     <p:spTree>
       <p:nvGrpSpPr>
         <p:cNvPr id="1" name=""/>
@@ -3252,30 +3260,283 @@
           <a:chExt cx="0" cy="0"/>
         </a:xfrm>
       </p:grpSpPr>
+      <p:sp>
+        <p:nvSpPr>
+          <p:cNvPr id="2" name="矩形 1">
+            <a:extLst>
+              <a:ext uri="{FF2B5EF4-FFF2-40B4-BE49-F238E27FC236}">
+                <a16:creationId xmlns:a16="http://schemas.microsoft.com/office/drawing/2014/main" id="{C93F0DFF-B702-1B25-822B-E41FF3504258}"/>
+              </a:ext>
+            </a:extLst>
+          </p:cNvPr>
+          <p:cNvSpPr/>
+          <p:nvPr>
+            <p:custDataLst>
+              <p:tags r:id="rId2"/>
+            </p:custDataLst>
+          </p:nvPr>
+        </p:nvSpPr>
+        <p:spPr>
+          <a:xfrm>
+            <a:off x="444693" y="1742703"/>
+            <a:ext cx="2371696" cy="2371696"/>
+          </a:xfrm>
+          <a:prstGeom prst="rect">
+            <a:avLst/>
+          </a:prstGeom>
+          <a:blipFill>
+            <a:blip>
+              <a:extLst>
+                <a:ext uri="{96DAC541-7B7A-43D3-8B79-37D633B846F1}">
+                  <asvg:svgBlip xmlns:asvg="http://schemas.microsoft.com/office/drawing/2016/SVG/main" r:embed="rId5"/>
+                </a:ext>
+              </a:extLst>
+            </a:blip>
+            <a:stretch>
+              <a:fillRect/>
+            </a:stretch>
+          </a:blipFill>
+          <a:ln>
+            <a:solidFill>
+              <a:srgbClr val="FFFFFF"/>
+            </a:solidFill>
+          </a:ln>
+        </p:spPr>
+        <p:style>
+          <a:lnRef idx="2">
+            <a:schemeClr val="accent1">
+              <a:shade val="15000"/>
+            </a:schemeClr>
+          </a:lnRef>
+          <a:fillRef idx="1">
+            <a:schemeClr val="accent1"/>
+          </a:fillRef>
+          <a:effectRef idx="0">
+            <a:schemeClr val="accent1"/>
+          </a:effectRef>
+          <a:fontRef idx="minor">
+            <a:schemeClr val="lt1"/>
+          </a:fontRef>
+        </p:style>
+        <p:txBody>
+          <a:bodyPr rtlCol="0" anchor="ctr"/>
+          <a:lstStyle/>
+          <a:p>
+            <a:pPr algn="ctr"/>
+            <a:endParaRPr kumimoji="1" lang="zh-TW" altLang="en-US"/>
+          </a:p>
+        </p:txBody>
+      </p:sp>
+      <p:sp>
+        <p:nvSpPr>
+          <p:cNvPr id="3" name="矩形 2">
+            <a:extLst>
+              <a:ext uri="{FF2B5EF4-FFF2-40B4-BE49-F238E27FC236}">
+                <a16:creationId xmlns:a16="http://schemas.microsoft.com/office/drawing/2014/main" id="{4B1685F8-7177-DD73-86A6-CB67862770C7}"/>
+              </a:ext>
+            </a:extLst>
+          </p:cNvPr>
+          <p:cNvSpPr/>
+          <p:nvPr>
+            <p:custDataLst>
+              <p:tags r:id="rId3"/>
+            </p:custDataLst>
+          </p:nvPr>
+        </p:nvSpPr>
+        <p:spPr>
+          <a:xfrm>
+            <a:off x="3112851" y="1000897"/>
+            <a:ext cx="8486226" cy="3855308"/>
+          </a:xfrm>
+          <a:prstGeom prst="rect">
+            <a:avLst/>
+          </a:prstGeom>
+          <a:noFill/>
+          <a:ln w="19050">
+            <a:solidFill>
+              <a:srgbClr val="FFFFFF"/>
+            </a:solidFill>
+            <a:prstDash val="solid"/>
+          </a:ln>
+          <a:effectLst/>
+          <a:extLst>
+            <a:ext uri="{909E8E84-426E-40DD-AFC4-6F175D3DCCD1}">
+              <a14:hiddenFill xmlns:a14="http://schemas.microsoft.com/office/drawing/2010/main">
+                <a:solidFill>
+                  <a:schemeClr val="accent1"/>
+                </a:solidFill>
+              </a14:hiddenFill>
+            </a:ext>
+          </a:extLst>
+        </p:spPr>
+        <p:style>
+          <a:lnRef idx="2">
+            <a:schemeClr val="accent1">
+              <a:shade val="15000"/>
+            </a:schemeClr>
+          </a:lnRef>
+          <a:fillRef idx="1">
+            <a:schemeClr val="accent1"/>
+          </a:fillRef>
+          <a:effectRef idx="0">
+            <a:schemeClr val="accent1"/>
+          </a:effectRef>
+          <a:fontRef idx="minor">
+            <a:schemeClr val="lt1"/>
+          </a:fontRef>
+        </p:style>
+        <p:txBody>
+          <a:bodyPr rtlCol="0" anchor="ctr"/>
+          <a:lstStyle/>
+          <a:p>
+            <a:r>
+              <a:rPr kumimoji="1" lang="en" altLang="zh-TW" sz="4000" b="1">
+                <a:solidFill>
+                  <a:srgbClr val="000000"/>
+                </a:solidFill>
+              </a:rPr>
+              <a:t>Audience Q&amp;A</a:t>
+            </a:r>
+            <a:endParaRPr kumimoji="1" lang="zh-TW" altLang="en-US" sz="4000" b="1">
+              <a:solidFill>
+                <a:srgbClr val="000000"/>
+              </a:solidFill>
+            </a:endParaRPr>
+          </a:p>
+        </p:txBody>
+      </p:sp>
+      <p:sp>
+        <p:nvSpPr>
+          <p:cNvPr id="4" name="矩形 3">
+            <a:extLst>
+              <a:ext uri="{FF2B5EF4-FFF2-40B4-BE49-F238E27FC236}">
+                <a16:creationId xmlns:a16="http://schemas.microsoft.com/office/drawing/2014/main" id="{2CF0DB62-5741-D8A1-D505-3B2AB328F599}"/>
+              </a:ext>
+            </a:extLst>
+          </p:cNvPr>
+          <p:cNvSpPr/>
+          <p:nvPr/>
+        </p:nvSpPr>
+        <p:spPr>
+          <a:xfrm>
+            <a:off x="0" y="5820032"/>
+            <a:ext cx="12192001" cy="1037968"/>
+          </a:xfrm>
+          <a:prstGeom prst="rect">
+            <a:avLst/>
+          </a:prstGeom>
+          <a:solidFill>
+            <a:srgbClr val="198038"/>
+          </a:solidFill>
+          <a:ln w="19050">
+            <a:noFill/>
+            <a:prstDash val="solid"/>
+          </a:ln>
+          <a:effectLst/>
+          <a:extLst>
+            <a:ext uri="{91240B29-F687-4F45-9708-019B960494DF}">
+              <a14:hiddenLine xmlns:a14="http://schemas.microsoft.com/office/drawing/2010/main" w="19050">
+                <a:solidFill>
+                  <a:schemeClr val="accent1">
+                    <a:shade val="15000"/>
+                  </a:schemeClr>
+                </a:solidFill>
+                <a:prstDash val="solid"/>
+              </a14:hiddenLine>
+            </a:ext>
+          </a:extLst>
+        </p:spPr>
+        <p:style>
+          <a:lnRef idx="2">
+            <a:schemeClr val="accent1">
+              <a:shade val="15000"/>
+            </a:schemeClr>
+          </a:lnRef>
+          <a:fillRef idx="1">
+            <a:schemeClr val="accent1"/>
+          </a:fillRef>
+          <a:effectRef idx="0">
+            <a:schemeClr val="accent1"/>
+          </a:effectRef>
+          <a:fontRef idx="minor">
+            <a:schemeClr val="lt1"/>
+          </a:fontRef>
+        </p:style>
+        <p:txBody>
+          <a:bodyPr lIns="741155" tIns="259492" rIns="1852888" bIns="203886" rtlCol="0" anchor="ctr">
+            <a:normAutofit fontScale="92500"/>
+          </a:bodyPr>
+          <a:lstStyle/>
+          <a:p>
+            <a:r>
+              <a:rPr kumimoji="1" lang="en" altLang="zh-TW" sz="2600">
+                <a:solidFill>
+                  <a:srgbClr val="FFFFFF"/>
+                </a:solidFill>
+              </a:rPr>
+              <a:t>The </a:t>
+            </a:r>
+            <a:r>
+              <a:rPr kumimoji="1" lang="en" altLang="zh-TW" sz="2600">
+                <a:solidFill>
+                  <a:srgbClr val="FFFFFF"/>
+                </a:solidFill>
+                <a:hlinkClick r:id="rId6">
+                  <a:extLst>
+                    <a:ext uri="{A12FA001-AC4F-418D-AE19-62706E023703}">
+                      <ahyp:hlinkClr xmlns:ahyp="http://schemas.microsoft.com/office/drawing/2018/hyperlinkcolor" val="tx"/>
+                    </a:ext>
+                  </a:extLst>
+                </a:hlinkClick>
+              </a:rPr>
+              <a:t>Slido app</a:t>
+            </a:r>
+            <a:r>
+              <a:rPr kumimoji="1" lang="en" altLang="zh-TW" sz="2600">
+                <a:solidFill>
+                  <a:srgbClr val="FFFFFF"/>
+                </a:solidFill>
+              </a:rPr>
+              <a:t> must be installed on every computer you’re presenting from</a:t>
+            </a:r>
+            <a:endParaRPr kumimoji="1" lang="zh-TW" altLang="en-US" sz="2600">
+              <a:solidFill>
+                <a:srgbClr val="FFFFFF"/>
+              </a:solidFill>
+            </a:endParaRPr>
+          </a:p>
+        </p:txBody>
+      </p:sp>
       <p:pic>
         <p:nvPicPr>
-          <p:cNvPr id="2" name="圖片 1" descr="r/biology - WE DATA MINED ON A LARGE SCALE DATA-BASE. BE HONEST. I AM BEING HONEST. WHAT METHOD DID YOU USE?. WE USED THE NCBI SEARCH BAR THANK YOU">
-            <a:extLst>
-              <a:ext uri="{FF2B5EF4-FFF2-40B4-BE49-F238E27FC236}">
-                <a16:creationId xmlns:a16="http://schemas.microsoft.com/office/drawing/2014/main" id="{14447741-7C2F-10C6-3084-D98215079F5D}"/>
+          <p:cNvPr id="6" name="圖形 5">
+            <a:extLst>
+              <a:ext uri="{FF2B5EF4-FFF2-40B4-BE49-F238E27FC236}">
+                <a16:creationId xmlns:a16="http://schemas.microsoft.com/office/drawing/2014/main" id="{288E9B44-5AC6-2208-BF53-8A01DB8E5675}"/>
               </a:ext>
             </a:extLst>
           </p:cNvPr>
           <p:cNvPicPr>
-            <a:picLocks noChangeAspect="1"/>
+            <a:picLocks/>
           </p:cNvPicPr>
           <p:nvPr/>
         </p:nvPicPr>
         <p:blipFill>
-          <a:blip r:embed="rId2"/>
+          <a:blip>
+            <a:extLst>
+              <a:ext uri="{96DAC541-7B7A-43D3-8B79-37D633B846F1}">
+                <asvg:svgBlip xmlns:asvg="http://schemas.microsoft.com/office/drawing/2016/SVG/main" r:embed="rId7"/>
+              </a:ext>
+            </a:extLst>
+          </a:blip>
           <a:stretch>
             <a:fillRect/>
           </a:stretch>
         </p:blipFill>
         <p:spPr>
           <a:xfrm>
-            <a:off x="3649850" y="734538"/>
-            <a:ext cx="4788975" cy="5919174"/>
+            <a:off x="296462" y="6190785"/>
+            <a:ext cx="296462" cy="296462"/>
           </a:xfrm>
           <a:prstGeom prst="rect">
             <a:avLst/>
@@ -3284,43 +3545,145 @@
       </p:pic>
       <p:sp>
         <p:nvSpPr>
-          <p:cNvPr id="3" name="文字方塊 2">
-            <a:extLst>
-              <a:ext uri="{FF2B5EF4-FFF2-40B4-BE49-F238E27FC236}">
-                <a16:creationId xmlns:a16="http://schemas.microsoft.com/office/drawing/2014/main" id="{9CCE17D8-4ACD-A3B7-9025-2EA38C7C9572}"/>
-              </a:ext>
-            </a:extLst>
-          </p:cNvPr>
-          <p:cNvSpPr txBox="1"/>
-          <p:nvPr/>
-        </p:nvSpPr>
-        <p:spPr>
-          <a:xfrm>
-            <a:off x="495946" y="294467"/>
-            <a:ext cx="2954655" cy="461665"/>
+          <p:cNvPr id="7" name="不規則四邊形 6">
+            <a:extLst>
+              <a:ext uri="{FF2B5EF4-FFF2-40B4-BE49-F238E27FC236}">
+                <a16:creationId xmlns:a16="http://schemas.microsoft.com/office/drawing/2014/main" id="{B0F0C53E-7FE6-D0A8-9EC1-5181AAA3078F}"/>
+              </a:ext>
+            </a:extLst>
+          </p:cNvPr>
+          <p:cNvSpPr/>
+          <p:nvPr/>
+        </p:nvSpPr>
+        <p:spPr>
+          <a:xfrm rot="2700000">
+            <a:off x="9620371" y="514924"/>
+            <a:ext cx="3335198" cy="778213"/>
+          </a:xfrm>
+          <a:prstGeom prst="trapezoid">
+            <a:avLst>
+              <a:gd name="adj" fmla="val 100000"/>
+            </a:avLst>
+          </a:prstGeom>
+          <a:solidFill>
+            <a:srgbClr val="EDFAF2"/>
+          </a:solidFill>
+          <a:ln w="19050">
+            <a:noFill/>
+            <a:prstDash val="solid"/>
+          </a:ln>
+          <a:effectLst/>
+          <a:extLst>
+            <a:ext uri="{91240B29-F687-4F45-9708-019B960494DF}">
+              <a14:hiddenLine xmlns:a14="http://schemas.microsoft.com/office/drawing/2010/main" w="19050">
+                <a:solidFill>
+                  <a:schemeClr val="accent1">
+                    <a:shade val="15000"/>
+                  </a:schemeClr>
+                </a:solidFill>
+                <a:prstDash val="solid"/>
+              </a14:hiddenLine>
+            </a:ext>
+          </a:extLst>
+        </p:spPr>
+        <p:style>
+          <a:lnRef idx="2">
+            <a:schemeClr val="accent1">
+              <a:shade val="15000"/>
+            </a:schemeClr>
+          </a:lnRef>
+          <a:fillRef idx="1">
+            <a:schemeClr val="accent1"/>
+          </a:fillRef>
+          <a:effectRef idx="0">
+            <a:schemeClr val="accent1"/>
+          </a:effectRef>
+          <a:fontRef idx="minor">
+            <a:schemeClr val="lt1"/>
+          </a:fontRef>
+        </p:style>
+        <p:txBody>
+          <a:bodyPr tIns="0" bIns="0" rtlCol="0" anchor="t">
+            <a:normAutofit fontScale="70000" lnSpcReduction="20000"/>
+          </a:bodyPr>
+          <a:lstStyle/>
+          <a:p>
+            <a:pPr algn="ctr"/>
+            <a:r>
+              <a:rPr kumimoji="1" lang="en" altLang="zh-TW" sz="2600" b="1">
+                <a:solidFill>
+                  <a:srgbClr val="198038"/>
+                </a:solidFill>
+              </a:rPr>
+              <a:t>Do not edit
+</a:t>
+            </a:r>
+            <a:r>
+              <a:rPr kumimoji="1" lang="en" altLang="zh-TW" sz="2200">
+                <a:solidFill>
+                  <a:srgbClr val="198038"/>
+                </a:solidFill>
+                <a:hlinkClick r:id="rId8">
+                  <a:extLst>
+                    <a:ext uri="{A12FA001-AC4F-418D-AE19-62706E023703}">
+                      <ahyp:hlinkClr xmlns:ahyp="http://schemas.microsoft.com/office/drawing/2018/hyperlinkcolor" val="tx"/>
+                    </a:ext>
+                  </a:extLst>
+                </a:hlinkClick>
+              </a:rPr>
+              <a:t>How to change the design</a:t>
+            </a:r>
+            <a:endParaRPr kumimoji="1" lang="zh-TW" altLang="en-US" sz="2200">
+              <a:solidFill>
+                <a:srgbClr val="198038"/>
+              </a:solidFill>
+            </a:endParaRPr>
+          </a:p>
+        </p:txBody>
+      </p:sp>
+      <p:pic>
+        <p:nvPicPr>
+          <p:cNvPr id="9" name="圖形 8">
+            <a:extLst>
+              <a:ext uri="{FF2B5EF4-FFF2-40B4-BE49-F238E27FC236}">
+                <a16:creationId xmlns:a16="http://schemas.microsoft.com/office/drawing/2014/main" id="{7976CD8A-E8BC-14AD-089A-0CBB9AB0C9C6}"/>
+              </a:ext>
+            </a:extLst>
+          </p:cNvPr>
+          <p:cNvPicPr>
+            <a:picLocks/>
+          </p:cNvPicPr>
+          <p:nvPr/>
+        </p:nvPicPr>
+        <p:blipFill>
+          <a:blip>
+            <a:extLst>
+              <a:ext uri="{96DAC541-7B7A-43D3-8B79-37D633B846F1}">
+                <asvg:svgBlip xmlns:asvg="http://schemas.microsoft.com/office/drawing/2016/SVG/main" r:embed="rId9"/>
+              </a:ext>
+            </a:extLst>
+          </a:blip>
+          <a:stretch>
+            <a:fillRect/>
+          </a:stretch>
+        </p:blipFill>
+        <p:spPr>
+          <a:xfrm>
+            <a:off x="10746748" y="6153727"/>
+            <a:ext cx="1111733" cy="370578"/>
           </a:xfrm>
           <a:prstGeom prst="rect">
             <a:avLst/>
           </a:prstGeom>
-          <a:noFill/>
-        </p:spPr>
-        <p:txBody>
-          <a:bodyPr wrap="none" rtlCol="0">
-            <a:spAutoFit/>
-          </a:bodyPr>
-          <a:lstStyle/>
-          <a:p>
-            <a:r>
-              <a:rPr kumimoji="1" lang="zh-TW" altLang="en-US" sz="2400" dirty="0"/>
-              <a:t>好像是，但不應該是</a:t>
-            </a:r>
-          </a:p>
-        </p:txBody>
-      </p:sp>
+        </p:spPr>
+      </p:pic>
     </p:spTree>
+    <p:custDataLst>
+      <p:tags r:id="rId1"/>
+    </p:custDataLst>
     <p:extLst>
       <p:ext uri="{BB962C8B-B14F-4D97-AF65-F5344CB8AC3E}">
-        <p14:creationId xmlns:p14="http://schemas.microsoft.com/office/powerpoint/2010/main" val="321279854"/>
+        <p14:creationId xmlns:p14="http://schemas.microsoft.com/office/powerpoint/2010/main" val="1622157460"/>
       </p:ext>
     </p:extLst>
   </p:cSld>
@@ -14146,16 +14509,8 @@
 </file>
 
 <file path=ppt/slides/slide2.xml><?xml version="1.0" encoding="utf-8"?>
-<p:sld xmlns:a="http://schemas.openxmlformats.org/drawingml/2006/main" xmlns:r="http://schemas.openxmlformats.org/officeDocument/2006/relationships" xmlns:p="http://schemas.openxmlformats.org/presentationml/2006/main" showMasterSp="0">
+<p:sld xmlns:a="http://schemas.openxmlformats.org/drawingml/2006/main" xmlns:r="http://schemas.openxmlformats.org/officeDocument/2006/relationships" xmlns:p="http://schemas.openxmlformats.org/presentationml/2006/main">
   <p:cSld>
-    <p:bg>
-      <p:bgPr>
-        <a:solidFill>
-          <a:srgbClr val="FFFFFF"/>
-        </a:solidFill>
-        <a:effectLst/>
-      </p:bgPr>
-    </p:bg>
     <p:spTree>
       <p:nvGrpSpPr>
         <p:cNvPr id="1" name=""/>
@@ -14170,278 +14525,30 @@
           <a:chExt cx="0" cy="0"/>
         </a:xfrm>
       </p:grpSpPr>
-      <p:sp>
-        <p:nvSpPr>
-          <p:cNvPr id="2" name="矩形 1">
-            <a:extLst>
-              <a:ext uri="{FF2B5EF4-FFF2-40B4-BE49-F238E27FC236}">
-                <a16:creationId xmlns:a16="http://schemas.microsoft.com/office/drawing/2014/main" id="{9B8949BE-8EC9-15ED-CBC1-5D5416945D07}"/>
-              </a:ext>
-            </a:extLst>
-          </p:cNvPr>
-          <p:cNvSpPr/>
-          <p:nvPr>
-            <p:custDataLst>
-              <p:tags r:id="rId2"/>
-            </p:custDataLst>
-          </p:nvPr>
-        </p:nvSpPr>
-        <p:spPr>
-          <a:xfrm>
-            <a:off x="444693" y="1742703"/>
-            <a:ext cx="2371696" cy="2371696"/>
-          </a:xfrm>
-          <a:prstGeom prst="rect">
-            <a:avLst/>
-          </a:prstGeom>
-          <a:blipFill>
-            <a:blip>
-              <a:extLst>
-                <a:ext uri="{96DAC541-7B7A-43D3-8B79-37D633B846F1}">
-                  <asvg:svgBlip xmlns:asvg="http://schemas.microsoft.com/office/drawing/2016/SVG/main" r:embed="rId5"/>
-                </a:ext>
-              </a:extLst>
-            </a:blip>
-            <a:stretch>
-              <a:fillRect/>
-            </a:stretch>
-          </a:blipFill>
-          <a:ln>
-            <a:solidFill>
-              <a:srgbClr val="FFFFFF"/>
-            </a:solidFill>
-          </a:ln>
-        </p:spPr>
-        <p:style>
-          <a:lnRef idx="2">
-            <a:schemeClr val="accent1">
-              <a:shade val="15000"/>
-            </a:schemeClr>
-          </a:lnRef>
-          <a:fillRef idx="1">
-            <a:schemeClr val="accent1"/>
-          </a:fillRef>
-          <a:effectRef idx="0">
-            <a:schemeClr val="accent1"/>
-          </a:effectRef>
-          <a:fontRef idx="minor">
-            <a:schemeClr val="lt1"/>
-          </a:fontRef>
-        </p:style>
-        <p:txBody>
-          <a:bodyPr rtlCol="0" anchor="ctr"/>
-          <a:lstStyle/>
-          <a:p>
-            <a:pPr algn="ctr"/>
-            <a:endParaRPr kumimoji="1" lang="zh-TW" altLang="en-US"/>
-          </a:p>
-        </p:txBody>
-      </p:sp>
-      <p:sp>
-        <p:nvSpPr>
-          <p:cNvPr id="3" name="矩形 2">
-            <a:extLst>
-              <a:ext uri="{FF2B5EF4-FFF2-40B4-BE49-F238E27FC236}">
-                <a16:creationId xmlns:a16="http://schemas.microsoft.com/office/drawing/2014/main" id="{AC9C9FF1-AE46-B0B7-673C-52473309B3CB}"/>
-              </a:ext>
-            </a:extLst>
-          </p:cNvPr>
-          <p:cNvSpPr/>
-          <p:nvPr>
-            <p:custDataLst>
-              <p:tags r:id="rId3"/>
-            </p:custDataLst>
-          </p:nvPr>
-        </p:nvSpPr>
-        <p:spPr>
-          <a:xfrm>
-            <a:off x="3112851" y="1000897"/>
-            <a:ext cx="8486226" cy="3855308"/>
-          </a:xfrm>
-          <a:prstGeom prst="rect">
-            <a:avLst/>
-          </a:prstGeom>
-          <a:noFill/>
-          <a:ln w="19050">
-            <a:solidFill>
-              <a:srgbClr val="FFFFFF"/>
-            </a:solidFill>
-            <a:prstDash val="solid"/>
-          </a:ln>
-          <a:effectLst/>
-          <a:extLst>
-            <a:ext uri="{909E8E84-426E-40DD-AFC4-6F175D3DCCD1}">
-              <a14:hiddenFill xmlns:a14="http://schemas.microsoft.com/office/drawing/2010/main">
-                <a:solidFill>
-                  <a:schemeClr val="accent1"/>
-                </a:solidFill>
-              </a14:hiddenFill>
-            </a:ext>
-          </a:extLst>
-        </p:spPr>
-        <p:style>
-          <a:lnRef idx="2">
-            <a:schemeClr val="accent1">
-              <a:shade val="15000"/>
-            </a:schemeClr>
-          </a:lnRef>
-          <a:fillRef idx="1">
-            <a:schemeClr val="accent1"/>
-          </a:fillRef>
-          <a:effectRef idx="0">
-            <a:schemeClr val="accent1"/>
-          </a:effectRef>
-          <a:fontRef idx="minor">
-            <a:schemeClr val="lt1"/>
-          </a:fontRef>
-        </p:style>
-        <p:txBody>
-          <a:bodyPr rtlCol="0" anchor="ctr"/>
-          <a:lstStyle/>
-          <a:p>
-            <a:r>
-              <a:rPr kumimoji="1" lang="zh-TW" altLang="en-US" sz="4000" b="1">
-                <a:solidFill>
-                  <a:srgbClr val="000000"/>
-                </a:solidFill>
-              </a:rPr>
-              <a:t>使用過以下哪些工具？</a:t>
-            </a:r>
-          </a:p>
-        </p:txBody>
-      </p:sp>
-      <p:sp>
-        <p:nvSpPr>
-          <p:cNvPr id="4" name="矩形 3">
-            <a:extLst>
-              <a:ext uri="{FF2B5EF4-FFF2-40B4-BE49-F238E27FC236}">
-                <a16:creationId xmlns:a16="http://schemas.microsoft.com/office/drawing/2014/main" id="{9A61777A-F999-A0B1-3C43-0226470F09BB}"/>
-              </a:ext>
-            </a:extLst>
-          </p:cNvPr>
-          <p:cNvSpPr/>
-          <p:nvPr/>
-        </p:nvSpPr>
-        <p:spPr>
-          <a:xfrm>
-            <a:off x="0" y="5820032"/>
-            <a:ext cx="12192001" cy="1037968"/>
-          </a:xfrm>
-          <a:prstGeom prst="rect">
-            <a:avLst/>
-          </a:prstGeom>
-          <a:solidFill>
-            <a:srgbClr val="198038"/>
-          </a:solidFill>
-          <a:ln w="19050">
-            <a:noFill/>
-            <a:prstDash val="solid"/>
-          </a:ln>
-          <a:effectLst/>
-          <a:extLst>
-            <a:ext uri="{91240B29-F687-4F45-9708-019B960494DF}">
-              <a14:hiddenLine xmlns:a14="http://schemas.microsoft.com/office/drawing/2010/main" w="19050">
-                <a:solidFill>
-                  <a:schemeClr val="accent1">
-                    <a:shade val="15000"/>
-                  </a:schemeClr>
-                </a:solidFill>
-                <a:prstDash val="solid"/>
-              </a14:hiddenLine>
-            </a:ext>
-          </a:extLst>
-        </p:spPr>
-        <p:style>
-          <a:lnRef idx="2">
-            <a:schemeClr val="accent1">
-              <a:shade val="15000"/>
-            </a:schemeClr>
-          </a:lnRef>
-          <a:fillRef idx="1">
-            <a:schemeClr val="accent1"/>
-          </a:fillRef>
-          <a:effectRef idx="0">
-            <a:schemeClr val="accent1"/>
-          </a:effectRef>
-          <a:fontRef idx="minor">
-            <a:schemeClr val="lt1"/>
-          </a:fontRef>
-        </p:style>
-        <p:txBody>
-          <a:bodyPr lIns="741155" tIns="259492" rIns="1852888" bIns="203886" rtlCol="0" anchor="ctr">
-            <a:normAutofit fontScale="92500"/>
-          </a:bodyPr>
-          <a:lstStyle/>
-          <a:p>
-            <a:r>
-              <a:rPr kumimoji="1" lang="en" altLang="zh-TW" sz="2600">
-                <a:solidFill>
-                  <a:srgbClr val="FFFFFF"/>
-                </a:solidFill>
-              </a:rPr>
-              <a:t>The </a:t>
-            </a:r>
-            <a:r>
-              <a:rPr kumimoji="1" lang="en" altLang="zh-TW" sz="2600">
-                <a:solidFill>
-                  <a:srgbClr val="FFFFFF"/>
-                </a:solidFill>
-                <a:hlinkClick r:id="rId6">
-                  <a:extLst>
-                    <a:ext uri="{A12FA001-AC4F-418D-AE19-62706E023703}">
-                      <ahyp:hlinkClr xmlns:ahyp="http://schemas.microsoft.com/office/drawing/2018/hyperlinkcolor" val="tx"/>
-                    </a:ext>
-                  </a:extLst>
-                </a:hlinkClick>
-              </a:rPr>
-              <a:t>Slido app</a:t>
-            </a:r>
-            <a:r>
-              <a:rPr kumimoji="1" lang="en" altLang="zh-TW" sz="2600">
-                <a:solidFill>
-                  <a:srgbClr val="FFFFFF"/>
-                </a:solidFill>
-              </a:rPr>
-              <a:t> must be installed on every computer you’re presenting from</a:t>
-            </a:r>
-            <a:endParaRPr kumimoji="1" lang="zh-TW" altLang="en-US" sz="2600">
-              <a:solidFill>
-                <a:srgbClr val="FFFFFF"/>
-              </a:solidFill>
-            </a:endParaRPr>
-          </a:p>
-        </p:txBody>
-      </p:sp>
       <p:pic>
         <p:nvPicPr>
-          <p:cNvPr id="6" name="圖形 5">
-            <a:extLst>
-              <a:ext uri="{FF2B5EF4-FFF2-40B4-BE49-F238E27FC236}">
-                <a16:creationId xmlns:a16="http://schemas.microsoft.com/office/drawing/2014/main" id="{6A81F594-B78F-412E-E7D7-7B1004E0D09B}"/>
+          <p:cNvPr id="2" name="圖片 1" descr="r/biology - WE DATA MINED ON A LARGE SCALE DATA-BASE. BE HONEST. I AM BEING HONEST. WHAT METHOD DID YOU USE?. WE USED THE NCBI SEARCH BAR THANK YOU">
+            <a:extLst>
+              <a:ext uri="{FF2B5EF4-FFF2-40B4-BE49-F238E27FC236}">
+                <a16:creationId xmlns:a16="http://schemas.microsoft.com/office/drawing/2014/main" id="{14447741-7C2F-10C6-3084-D98215079F5D}"/>
               </a:ext>
             </a:extLst>
           </p:cNvPr>
           <p:cNvPicPr>
-            <a:picLocks/>
+            <a:picLocks noChangeAspect="1"/>
           </p:cNvPicPr>
           <p:nvPr/>
         </p:nvPicPr>
         <p:blipFill>
-          <a:blip>
-            <a:extLst>
-              <a:ext uri="{96DAC541-7B7A-43D3-8B79-37D633B846F1}">
-                <asvg:svgBlip xmlns:asvg="http://schemas.microsoft.com/office/drawing/2016/SVG/main" r:embed="rId7"/>
-              </a:ext>
-            </a:extLst>
-          </a:blip>
+          <a:blip r:embed="rId2"/>
           <a:stretch>
             <a:fillRect/>
           </a:stretch>
         </p:blipFill>
         <p:spPr>
           <a:xfrm>
-            <a:off x="296462" y="6190785"/>
-            <a:ext cx="296462" cy="296462"/>
+            <a:off x="3649850" y="734538"/>
+            <a:ext cx="4788975" cy="5919174"/>
           </a:xfrm>
           <a:prstGeom prst="rect">
             <a:avLst/>
@@ -14450,145 +14557,43 @@
       </p:pic>
       <p:sp>
         <p:nvSpPr>
-          <p:cNvPr id="7" name="不規則四邊形 6">
-            <a:extLst>
-              <a:ext uri="{FF2B5EF4-FFF2-40B4-BE49-F238E27FC236}">
-                <a16:creationId xmlns:a16="http://schemas.microsoft.com/office/drawing/2014/main" id="{448A72C7-D897-AE26-4134-776342BE5992}"/>
-              </a:ext>
-            </a:extLst>
-          </p:cNvPr>
-          <p:cNvSpPr/>
-          <p:nvPr/>
-        </p:nvSpPr>
-        <p:spPr>
-          <a:xfrm rot="2700000">
-            <a:off x="9620371" y="514924"/>
-            <a:ext cx="3335198" cy="778213"/>
-          </a:xfrm>
-          <a:prstGeom prst="trapezoid">
-            <a:avLst>
-              <a:gd name="adj" fmla="val 100000"/>
-            </a:avLst>
-          </a:prstGeom>
-          <a:solidFill>
-            <a:srgbClr val="EDFAF2"/>
-          </a:solidFill>
-          <a:ln w="19050">
-            <a:noFill/>
-            <a:prstDash val="solid"/>
-          </a:ln>
-          <a:effectLst/>
-          <a:extLst>
-            <a:ext uri="{91240B29-F687-4F45-9708-019B960494DF}">
-              <a14:hiddenLine xmlns:a14="http://schemas.microsoft.com/office/drawing/2010/main" w="19050">
-                <a:solidFill>
-                  <a:schemeClr val="accent1">
-                    <a:shade val="15000"/>
-                  </a:schemeClr>
-                </a:solidFill>
-                <a:prstDash val="solid"/>
-              </a14:hiddenLine>
-            </a:ext>
-          </a:extLst>
-        </p:spPr>
-        <p:style>
-          <a:lnRef idx="2">
-            <a:schemeClr val="accent1">
-              <a:shade val="15000"/>
-            </a:schemeClr>
-          </a:lnRef>
-          <a:fillRef idx="1">
-            <a:schemeClr val="accent1"/>
-          </a:fillRef>
-          <a:effectRef idx="0">
-            <a:schemeClr val="accent1"/>
-          </a:effectRef>
-          <a:fontRef idx="minor">
-            <a:schemeClr val="lt1"/>
-          </a:fontRef>
-        </p:style>
-        <p:txBody>
-          <a:bodyPr tIns="0" bIns="0" rtlCol="0" anchor="t">
-            <a:normAutofit fontScale="70000" lnSpcReduction="20000"/>
+          <p:cNvPr id="3" name="文字方塊 2">
+            <a:extLst>
+              <a:ext uri="{FF2B5EF4-FFF2-40B4-BE49-F238E27FC236}">
+                <a16:creationId xmlns:a16="http://schemas.microsoft.com/office/drawing/2014/main" id="{9CCE17D8-4ACD-A3B7-9025-2EA38C7C9572}"/>
+              </a:ext>
+            </a:extLst>
+          </p:cNvPr>
+          <p:cNvSpPr txBox="1"/>
+          <p:nvPr/>
+        </p:nvSpPr>
+        <p:spPr>
+          <a:xfrm>
+            <a:off x="495946" y="294467"/>
+            <a:ext cx="2954655" cy="461665"/>
+          </a:xfrm>
+          <a:prstGeom prst="rect">
+            <a:avLst/>
+          </a:prstGeom>
+          <a:noFill/>
+        </p:spPr>
+        <p:txBody>
+          <a:bodyPr wrap="none" rtlCol="0">
+            <a:spAutoFit/>
           </a:bodyPr>
           <a:lstStyle/>
           <a:p>
-            <a:pPr algn="ctr"/>
-            <a:r>
-              <a:rPr kumimoji="1" lang="en" altLang="zh-TW" sz="2600" b="1">
-                <a:solidFill>
-                  <a:srgbClr val="198038"/>
-                </a:solidFill>
-              </a:rPr>
-              <a:t>Do not edit
-</a:t>
-            </a:r>
-            <a:r>
-              <a:rPr kumimoji="1" lang="en" altLang="zh-TW" sz="2200">
-                <a:solidFill>
-                  <a:srgbClr val="198038"/>
-                </a:solidFill>
-                <a:hlinkClick r:id="rId8">
-                  <a:extLst>
-                    <a:ext uri="{A12FA001-AC4F-418D-AE19-62706E023703}">
-                      <ahyp:hlinkClr xmlns:ahyp="http://schemas.microsoft.com/office/drawing/2018/hyperlinkcolor" val="tx"/>
-                    </a:ext>
-                  </a:extLst>
-                </a:hlinkClick>
-              </a:rPr>
-              <a:t>How to change the design</a:t>
-            </a:r>
-            <a:endParaRPr kumimoji="1" lang="zh-TW" altLang="en-US" sz="2200">
-              <a:solidFill>
-                <a:srgbClr val="198038"/>
-              </a:solidFill>
-            </a:endParaRPr>
-          </a:p>
-        </p:txBody>
-      </p:sp>
-      <p:pic>
-        <p:nvPicPr>
-          <p:cNvPr id="9" name="圖形 8">
-            <a:extLst>
-              <a:ext uri="{FF2B5EF4-FFF2-40B4-BE49-F238E27FC236}">
-                <a16:creationId xmlns:a16="http://schemas.microsoft.com/office/drawing/2014/main" id="{C2BE9FCA-0644-F37B-C855-436AB4B326B7}"/>
-              </a:ext>
-            </a:extLst>
-          </p:cNvPr>
-          <p:cNvPicPr>
-            <a:picLocks/>
-          </p:cNvPicPr>
-          <p:nvPr/>
-        </p:nvPicPr>
-        <p:blipFill>
-          <a:blip>
-            <a:extLst>
-              <a:ext uri="{96DAC541-7B7A-43D3-8B79-37D633B846F1}">
-                <asvg:svgBlip xmlns:asvg="http://schemas.microsoft.com/office/drawing/2016/SVG/main" r:embed="rId9"/>
-              </a:ext>
-            </a:extLst>
-          </a:blip>
-          <a:stretch>
-            <a:fillRect/>
-          </a:stretch>
-        </p:blipFill>
-        <p:spPr>
-          <a:xfrm>
-            <a:off x="10746748" y="6153727"/>
-            <a:ext cx="1111733" cy="370578"/>
-          </a:xfrm>
-          <a:prstGeom prst="rect">
-            <a:avLst/>
-          </a:prstGeom>
-        </p:spPr>
-      </p:pic>
+            <a:r>
+              <a:rPr kumimoji="1" lang="zh-TW" altLang="en-US" sz="2400" dirty="0"/>
+              <a:t>好像是，但不應該是</a:t>
+            </a:r>
+          </a:p>
+        </p:txBody>
+      </p:sp>
     </p:spTree>
-    <p:custDataLst>
-      <p:tags r:id="rId1"/>
-    </p:custDataLst>
     <p:extLst>
       <p:ext uri="{BB962C8B-B14F-4D97-AF65-F5344CB8AC3E}">
-        <p14:creationId xmlns:p14="http://schemas.microsoft.com/office/powerpoint/2010/main" val="2544720441"/>
+        <p14:creationId xmlns:p14="http://schemas.microsoft.com/office/powerpoint/2010/main" val="321279854"/>
       </p:ext>
     </p:extLst>
   </p:cSld>
@@ -30055,8 +30060,16 @@
 </file>
 
 <file path=ppt/slides/slide3.xml><?xml version="1.0" encoding="utf-8"?>
-<p:sld xmlns:a="http://schemas.openxmlformats.org/drawingml/2006/main" xmlns:r="http://schemas.openxmlformats.org/officeDocument/2006/relationships" xmlns:p="http://schemas.openxmlformats.org/presentationml/2006/main">
+<p:sld xmlns:a="http://schemas.openxmlformats.org/drawingml/2006/main" xmlns:r="http://schemas.openxmlformats.org/officeDocument/2006/relationships" xmlns:p="http://schemas.openxmlformats.org/presentationml/2006/main" showMasterSp="0">
   <p:cSld>
+    <p:bg>
+      <p:bgPr>
+        <a:solidFill>
+          <a:srgbClr val="FFFFFF"/>
+        </a:solidFill>
+        <a:effectLst/>
+      </p:bgPr>
+    </p:bg>
     <p:spTree>
       <p:nvGrpSpPr>
         <p:cNvPr id="1" name=""/>
@@ -30071,30 +30084,278 @@
           <a:chExt cx="0" cy="0"/>
         </a:xfrm>
       </p:grpSpPr>
+      <p:sp>
+        <p:nvSpPr>
+          <p:cNvPr id="2" name="矩形 1">
+            <a:extLst>
+              <a:ext uri="{FF2B5EF4-FFF2-40B4-BE49-F238E27FC236}">
+                <a16:creationId xmlns:a16="http://schemas.microsoft.com/office/drawing/2014/main" id="{9B8949BE-8EC9-15ED-CBC1-5D5416945D07}"/>
+              </a:ext>
+            </a:extLst>
+          </p:cNvPr>
+          <p:cNvSpPr/>
+          <p:nvPr>
+            <p:custDataLst>
+              <p:tags r:id="rId2"/>
+            </p:custDataLst>
+          </p:nvPr>
+        </p:nvSpPr>
+        <p:spPr>
+          <a:xfrm>
+            <a:off x="444693" y="1742703"/>
+            <a:ext cx="2371696" cy="2371696"/>
+          </a:xfrm>
+          <a:prstGeom prst="rect">
+            <a:avLst/>
+          </a:prstGeom>
+          <a:blipFill>
+            <a:blip>
+              <a:extLst>
+                <a:ext uri="{96DAC541-7B7A-43D3-8B79-37D633B846F1}">
+                  <asvg:svgBlip xmlns:asvg="http://schemas.microsoft.com/office/drawing/2016/SVG/main" r:embed="rId5"/>
+                </a:ext>
+              </a:extLst>
+            </a:blip>
+            <a:stretch>
+              <a:fillRect/>
+            </a:stretch>
+          </a:blipFill>
+          <a:ln>
+            <a:solidFill>
+              <a:srgbClr val="FFFFFF"/>
+            </a:solidFill>
+          </a:ln>
+        </p:spPr>
+        <p:style>
+          <a:lnRef idx="2">
+            <a:schemeClr val="accent1">
+              <a:shade val="15000"/>
+            </a:schemeClr>
+          </a:lnRef>
+          <a:fillRef idx="1">
+            <a:schemeClr val="accent1"/>
+          </a:fillRef>
+          <a:effectRef idx="0">
+            <a:schemeClr val="accent1"/>
+          </a:effectRef>
+          <a:fontRef idx="minor">
+            <a:schemeClr val="lt1"/>
+          </a:fontRef>
+        </p:style>
+        <p:txBody>
+          <a:bodyPr rtlCol="0" anchor="ctr"/>
+          <a:lstStyle/>
+          <a:p>
+            <a:pPr algn="ctr"/>
+            <a:endParaRPr kumimoji="1" lang="zh-TW" altLang="en-US"/>
+          </a:p>
+        </p:txBody>
+      </p:sp>
+      <p:sp>
+        <p:nvSpPr>
+          <p:cNvPr id="3" name="矩形 2">
+            <a:extLst>
+              <a:ext uri="{FF2B5EF4-FFF2-40B4-BE49-F238E27FC236}">
+                <a16:creationId xmlns:a16="http://schemas.microsoft.com/office/drawing/2014/main" id="{AC9C9FF1-AE46-B0B7-673C-52473309B3CB}"/>
+              </a:ext>
+            </a:extLst>
+          </p:cNvPr>
+          <p:cNvSpPr/>
+          <p:nvPr>
+            <p:custDataLst>
+              <p:tags r:id="rId3"/>
+            </p:custDataLst>
+          </p:nvPr>
+        </p:nvSpPr>
+        <p:spPr>
+          <a:xfrm>
+            <a:off x="3112851" y="1000897"/>
+            <a:ext cx="8486226" cy="3855308"/>
+          </a:xfrm>
+          <a:prstGeom prst="rect">
+            <a:avLst/>
+          </a:prstGeom>
+          <a:noFill/>
+          <a:ln w="19050">
+            <a:solidFill>
+              <a:srgbClr val="FFFFFF"/>
+            </a:solidFill>
+            <a:prstDash val="solid"/>
+          </a:ln>
+          <a:effectLst/>
+          <a:extLst>
+            <a:ext uri="{909E8E84-426E-40DD-AFC4-6F175D3DCCD1}">
+              <a14:hiddenFill xmlns:a14="http://schemas.microsoft.com/office/drawing/2010/main">
+                <a:solidFill>
+                  <a:schemeClr val="accent1"/>
+                </a:solidFill>
+              </a14:hiddenFill>
+            </a:ext>
+          </a:extLst>
+        </p:spPr>
+        <p:style>
+          <a:lnRef idx="2">
+            <a:schemeClr val="accent1">
+              <a:shade val="15000"/>
+            </a:schemeClr>
+          </a:lnRef>
+          <a:fillRef idx="1">
+            <a:schemeClr val="accent1"/>
+          </a:fillRef>
+          <a:effectRef idx="0">
+            <a:schemeClr val="accent1"/>
+          </a:effectRef>
+          <a:fontRef idx="minor">
+            <a:schemeClr val="lt1"/>
+          </a:fontRef>
+        </p:style>
+        <p:txBody>
+          <a:bodyPr rtlCol="0" anchor="ctr"/>
+          <a:lstStyle/>
+          <a:p>
+            <a:r>
+              <a:rPr kumimoji="1" lang="zh-TW" altLang="en-US" sz="4000" b="1">
+                <a:solidFill>
+                  <a:srgbClr val="000000"/>
+                </a:solidFill>
+              </a:rPr>
+              <a:t>使用過以下哪些工具？</a:t>
+            </a:r>
+          </a:p>
+        </p:txBody>
+      </p:sp>
+      <p:sp>
+        <p:nvSpPr>
+          <p:cNvPr id="4" name="矩形 3">
+            <a:extLst>
+              <a:ext uri="{FF2B5EF4-FFF2-40B4-BE49-F238E27FC236}">
+                <a16:creationId xmlns:a16="http://schemas.microsoft.com/office/drawing/2014/main" id="{9A61777A-F999-A0B1-3C43-0226470F09BB}"/>
+              </a:ext>
+            </a:extLst>
+          </p:cNvPr>
+          <p:cNvSpPr/>
+          <p:nvPr/>
+        </p:nvSpPr>
+        <p:spPr>
+          <a:xfrm>
+            <a:off x="0" y="5820032"/>
+            <a:ext cx="12192001" cy="1037968"/>
+          </a:xfrm>
+          <a:prstGeom prst="rect">
+            <a:avLst/>
+          </a:prstGeom>
+          <a:solidFill>
+            <a:srgbClr val="198038"/>
+          </a:solidFill>
+          <a:ln w="19050">
+            <a:noFill/>
+            <a:prstDash val="solid"/>
+          </a:ln>
+          <a:effectLst/>
+          <a:extLst>
+            <a:ext uri="{91240B29-F687-4F45-9708-019B960494DF}">
+              <a14:hiddenLine xmlns:a14="http://schemas.microsoft.com/office/drawing/2010/main" w="19050">
+                <a:solidFill>
+                  <a:schemeClr val="accent1">
+                    <a:shade val="15000"/>
+                  </a:schemeClr>
+                </a:solidFill>
+                <a:prstDash val="solid"/>
+              </a14:hiddenLine>
+            </a:ext>
+          </a:extLst>
+        </p:spPr>
+        <p:style>
+          <a:lnRef idx="2">
+            <a:schemeClr val="accent1">
+              <a:shade val="15000"/>
+            </a:schemeClr>
+          </a:lnRef>
+          <a:fillRef idx="1">
+            <a:schemeClr val="accent1"/>
+          </a:fillRef>
+          <a:effectRef idx="0">
+            <a:schemeClr val="accent1"/>
+          </a:effectRef>
+          <a:fontRef idx="minor">
+            <a:schemeClr val="lt1"/>
+          </a:fontRef>
+        </p:style>
+        <p:txBody>
+          <a:bodyPr lIns="741155" tIns="259492" rIns="1852888" bIns="203886" rtlCol="0" anchor="ctr">
+            <a:normAutofit fontScale="92500"/>
+          </a:bodyPr>
+          <a:lstStyle/>
+          <a:p>
+            <a:r>
+              <a:rPr kumimoji="1" lang="en" altLang="zh-TW" sz="2600">
+                <a:solidFill>
+                  <a:srgbClr val="FFFFFF"/>
+                </a:solidFill>
+              </a:rPr>
+              <a:t>The </a:t>
+            </a:r>
+            <a:r>
+              <a:rPr kumimoji="1" lang="en" altLang="zh-TW" sz="2600">
+                <a:solidFill>
+                  <a:srgbClr val="FFFFFF"/>
+                </a:solidFill>
+                <a:hlinkClick r:id="rId6">
+                  <a:extLst>
+                    <a:ext uri="{A12FA001-AC4F-418D-AE19-62706E023703}">
+                      <ahyp:hlinkClr xmlns:ahyp="http://schemas.microsoft.com/office/drawing/2018/hyperlinkcolor" val="tx"/>
+                    </a:ext>
+                  </a:extLst>
+                </a:hlinkClick>
+              </a:rPr>
+              <a:t>Slido app</a:t>
+            </a:r>
+            <a:r>
+              <a:rPr kumimoji="1" lang="en" altLang="zh-TW" sz="2600">
+                <a:solidFill>
+                  <a:srgbClr val="FFFFFF"/>
+                </a:solidFill>
+              </a:rPr>
+              <a:t> must be installed on every computer you’re presenting from</a:t>
+            </a:r>
+            <a:endParaRPr kumimoji="1" lang="zh-TW" altLang="en-US" sz="2600">
+              <a:solidFill>
+                <a:srgbClr val="FFFFFF"/>
+              </a:solidFill>
+            </a:endParaRPr>
+          </a:p>
+        </p:txBody>
+      </p:sp>
       <p:pic>
         <p:nvPicPr>
-          <p:cNvPr id="2" name="圖片 1">
-            <a:extLst>
-              <a:ext uri="{FF2B5EF4-FFF2-40B4-BE49-F238E27FC236}">
-                <a16:creationId xmlns:a16="http://schemas.microsoft.com/office/drawing/2014/main" id="{091604EE-22E3-D579-9413-378F47802836}"/>
+          <p:cNvPr id="6" name="圖形 5">
+            <a:extLst>
+              <a:ext uri="{FF2B5EF4-FFF2-40B4-BE49-F238E27FC236}">
+                <a16:creationId xmlns:a16="http://schemas.microsoft.com/office/drawing/2014/main" id="{6A81F594-B78F-412E-E7D7-7B1004E0D09B}"/>
               </a:ext>
             </a:extLst>
           </p:cNvPr>
           <p:cNvPicPr>
-            <a:picLocks noChangeAspect="1"/>
+            <a:picLocks/>
           </p:cNvPicPr>
           <p:nvPr/>
         </p:nvPicPr>
         <p:blipFill>
-          <a:blip r:embed="rId2"/>
+          <a:blip>
+            <a:extLst>
+              <a:ext uri="{96DAC541-7B7A-43D3-8B79-37D633B846F1}">
+                <asvg:svgBlip xmlns:asvg="http://schemas.microsoft.com/office/drawing/2016/SVG/main" r:embed="rId7"/>
+              </a:ext>
+            </a:extLst>
+          </a:blip>
           <a:stretch>
             <a:fillRect/>
           </a:stretch>
         </p:blipFill>
         <p:spPr>
           <a:xfrm>
-            <a:off x="2150564" y="604954"/>
-            <a:ext cx="7890872" cy="5781159"/>
+            <a:off x="296462" y="6190785"/>
+            <a:ext cx="296462" cy="296462"/>
           </a:xfrm>
           <a:prstGeom prst="rect">
             <a:avLst/>
@@ -30103,68 +30364,145 @@
       </p:pic>
       <p:sp>
         <p:nvSpPr>
-          <p:cNvPr id="3" name="文字方塊 2">
-            <a:extLst>
-              <a:ext uri="{FF2B5EF4-FFF2-40B4-BE49-F238E27FC236}">
-                <a16:creationId xmlns:a16="http://schemas.microsoft.com/office/drawing/2014/main" id="{8CCED5D4-1CDA-50D3-426C-7BA11E0C8197}"/>
-              </a:ext>
-            </a:extLst>
-          </p:cNvPr>
-          <p:cNvSpPr txBox="1"/>
-          <p:nvPr/>
-        </p:nvSpPr>
-        <p:spPr>
-          <a:xfrm>
-            <a:off x="1981675" y="6460273"/>
-            <a:ext cx="8970789" cy="276999"/>
+          <p:cNvPr id="7" name="不規則四邊形 6">
+            <a:extLst>
+              <a:ext uri="{FF2B5EF4-FFF2-40B4-BE49-F238E27FC236}">
+                <a16:creationId xmlns:a16="http://schemas.microsoft.com/office/drawing/2014/main" id="{448A72C7-D897-AE26-4134-776342BE5992}"/>
+              </a:ext>
+            </a:extLst>
+          </p:cNvPr>
+          <p:cNvSpPr/>
+          <p:nvPr/>
+        </p:nvSpPr>
+        <p:spPr>
+          <a:xfrm rot="2700000">
+            <a:off x="9620371" y="514924"/>
+            <a:ext cx="3335198" cy="778213"/>
+          </a:xfrm>
+          <a:prstGeom prst="trapezoid">
+            <a:avLst>
+              <a:gd name="adj" fmla="val 100000"/>
+            </a:avLst>
+          </a:prstGeom>
+          <a:solidFill>
+            <a:srgbClr val="EDFAF2"/>
+          </a:solidFill>
+          <a:ln w="19050">
+            <a:noFill/>
+            <a:prstDash val="solid"/>
+          </a:ln>
+          <a:effectLst/>
+          <a:extLst>
+            <a:ext uri="{91240B29-F687-4F45-9708-019B960494DF}">
+              <a14:hiddenLine xmlns:a14="http://schemas.microsoft.com/office/drawing/2010/main" w="19050">
+                <a:solidFill>
+                  <a:schemeClr val="accent1">
+                    <a:shade val="15000"/>
+                  </a:schemeClr>
+                </a:solidFill>
+                <a:prstDash val="solid"/>
+              </a14:hiddenLine>
+            </a:ext>
+          </a:extLst>
+        </p:spPr>
+        <p:style>
+          <a:lnRef idx="2">
+            <a:schemeClr val="accent1">
+              <a:shade val="15000"/>
+            </a:schemeClr>
+          </a:lnRef>
+          <a:fillRef idx="1">
+            <a:schemeClr val="accent1"/>
+          </a:fillRef>
+          <a:effectRef idx="0">
+            <a:schemeClr val="accent1"/>
+          </a:effectRef>
+          <a:fontRef idx="minor">
+            <a:schemeClr val="lt1"/>
+          </a:fontRef>
+        </p:style>
+        <p:txBody>
+          <a:bodyPr tIns="0" bIns="0" rtlCol="0" anchor="t">
+            <a:normAutofit fontScale="70000" lnSpcReduction="20000"/>
+          </a:bodyPr>
+          <a:lstStyle/>
+          <a:p>
+            <a:pPr algn="ctr"/>
+            <a:r>
+              <a:rPr kumimoji="1" lang="en" altLang="zh-TW" sz="2600" b="1">
+                <a:solidFill>
+                  <a:srgbClr val="198038"/>
+                </a:solidFill>
+              </a:rPr>
+              <a:t>Do not edit
+</a:t>
+            </a:r>
+            <a:r>
+              <a:rPr kumimoji="1" lang="en" altLang="zh-TW" sz="2200">
+                <a:solidFill>
+                  <a:srgbClr val="198038"/>
+                </a:solidFill>
+                <a:hlinkClick r:id="rId8">
+                  <a:extLst>
+                    <a:ext uri="{A12FA001-AC4F-418D-AE19-62706E023703}">
+                      <ahyp:hlinkClr xmlns:ahyp="http://schemas.microsoft.com/office/drawing/2018/hyperlinkcolor" val="tx"/>
+                    </a:ext>
+                  </a:extLst>
+                </a:hlinkClick>
+              </a:rPr>
+              <a:t>How to change the design</a:t>
+            </a:r>
+            <a:endParaRPr kumimoji="1" lang="zh-TW" altLang="en-US" sz="2200">
+              <a:solidFill>
+                <a:srgbClr val="198038"/>
+              </a:solidFill>
+            </a:endParaRPr>
+          </a:p>
+        </p:txBody>
+      </p:sp>
+      <p:pic>
+        <p:nvPicPr>
+          <p:cNvPr id="9" name="圖形 8">
+            <a:extLst>
+              <a:ext uri="{FF2B5EF4-FFF2-40B4-BE49-F238E27FC236}">
+                <a16:creationId xmlns:a16="http://schemas.microsoft.com/office/drawing/2014/main" id="{C2BE9FCA-0644-F37B-C855-436AB4B326B7}"/>
+              </a:ext>
+            </a:extLst>
+          </p:cNvPr>
+          <p:cNvPicPr>
+            <a:picLocks/>
+          </p:cNvPicPr>
+          <p:nvPr/>
+        </p:nvPicPr>
+        <p:blipFill>
+          <a:blip>
+            <a:extLst>
+              <a:ext uri="{96DAC541-7B7A-43D3-8B79-37D633B846F1}">
+                <asvg:svgBlip xmlns:asvg="http://schemas.microsoft.com/office/drawing/2016/SVG/main" r:embed="rId9"/>
+              </a:ext>
+            </a:extLst>
+          </a:blip>
+          <a:stretch>
+            <a:fillRect/>
+          </a:stretch>
+        </p:blipFill>
+        <p:spPr>
+          <a:xfrm>
+            <a:off x="10746748" y="6153727"/>
+            <a:ext cx="1111733" cy="370578"/>
           </a:xfrm>
           <a:prstGeom prst="rect">
             <a:avLst/>
           </a:prstGeom>
-          <a:noFill/>
-        </p:spPr>
-        <p:txBody>
-          <a:bodyPr wrap="none" rtlCol="0">
-            <a:spAutoFit/>
-          </a:bodyPr>
-          <a:lstStyle/>
-          <a:p>
-            <a:r>
-              <a:rPr kumimoji="1" lang="en" altLang="zh-TW" sz="1200" dirty="0"/>
-              <a:t>https://data-</a:t>
-            </a:r>
-            <a:r>
-              <a:rPr kumimoji="1" lang="en" altLang="zh-TW" sz="1200" dirty="0" err="1"/>
-              <a:t>champions.renew</a:t>
-            </a:r>
-            <a:r>
-              <a:rPr kumimoji="1" lang="en" altLang="zh-TW" sz="1200" dirty="0"/>
-              <a:t>-</a:t>
-            </a:r>
-            <a:r>
-              <a:rPr kumimoji="1" lang="en" altLang="zh-TW" sz="1200" dirty="0" err="1"/>
-              <a:t>platforms.dk</a:t>
-            </a:r>
-            <a:r>
-              <a:rPr kumimoji="1" lang="en" altLang="zh-TW" sz="1200" dirty="0"/>
-              <a:t>/renew-data-champions/informational-guides/research-planning/</a:t>
-            </a:r>
-            <a:r>
-              <a:rPr kumimoji="1" lang="en" altLang="zh-TW" sz="1200" dirty="0" err="1"/>
-              <a:t>rdm</a:t>
-            </a:r>
-            <a:r>
-              <a:rPr kumimoji="1" lang="en" altLang="zh-TW" sz="1200" dirty="0"/>
-              <a:t>-guide/research-workflows</a:t>
-            </a:r>
-            <a:endParaRPr kumimoji="1" lang="zh-TW" altLang="en-US" sz="1200" dirty="0"/>
-          </a:p>
-        </p:txBody>
-      </p:sp>
+        </p:spPr>
+      </p:pic>
     </p:spTree>
+    <p:custDataLst>
+      <p:tags r:id="rId1"/>
+    </p:custDataLst>
     <p:extLst>
       <p:ext uri="{BB962C8B-B14F-4D97-AF65-F5344CB8AC3E}">
-        <p14:creationId xmlns:p14="http://schemas.microsoft.com/office/powerpoint/2010/main" val="2726028967"/>
+        <p14:creationId xmlns:p14="http://schemas.microsoft.com/office/powerpoint/2010/main" val="2544720441"/>
       </p:ext>
     </p:extLst>
   </p:cSld>
@@ -39704,1831 +40042,100 @@
           <a:chExt cx="0" cy="0"/>
         </a:xfrm>
       </p:grpSpPr>
-      <p:sp>
-        <p:nvSpPr>
-          <p:cNvPr id="23" name="eyebrow">
-            <a:extLst>
-              <a:ext uri="{FF2B5EF4-FFF2-40B4-BE49-F238E27FC236}">
-                <a16:creationId xmlns:a16="http://schemas.microsoft.com/office/drawing/2014/main" id="{3471D4FA-4B1A-4E45-8016-35EFF96DF965}"/>
-              </a:ext>
-            </a:extLst>
-          </p:cNvPr>
-          <p:cNvSpPr>
-            <a:spLocks noGrp="1"/>
-          </p:cNvSpPr>
-          <p:nvPr/>
-        </p:nvSpPr>
-        <p:spPr>
-          <a:xfrm>
-            <a:off x="723900" y="552450"/>
-            <a:ext cx="4953000" cy="285750"/>
+      <p:pic>
+        <p:nvPicPr>
+          <p:cNvPr id="2" name="圖片 1">
+            <a:extLst>
+              <a:ext uri="{FF2B5EF4-FFF2-40B4-BE49-F238E27FC236}">
+                <a16:creationId xmlns:a16="http://schemas.microsoft.com/office/drawing/2014/main" id="{091604EE-22E3-D579-9413-378F47802836}"/>
+              </a:ext>
+            </a:extLst>
+          </p:cNvPr>
+          <p:cNvPicPr>
+            <a:picLocks noChangeAspect="1"/>
+          </p:cNvPicPr>
+          <p:nvPr/>
+        </p:nvPicPr>
+        <p:blipFill>
+          <a:blip r:embed="rId2"/>
+          <a:stretch>
+            <a:fillRect/>
+          </a:stretch>
+        </p:blipFill>
+        <p:spPr>
+          <a:xfrm>
+            <a:off x="2150564" y="604954"/>
+            <a:ext cx="7890872" cy="5781159"/>
           </a:xfrm>
           <a:prstGeom prst="rect">
             <a:avLst/>
           </a:prstGeom>
+        </p:spPr>
+      </p:pic>
+      <p:sp>
+        <p:nvSpPr>
+          <p:cNvPr id="3" name="文字方塊 2">
+            <a:extLst>
+              <a:ext uri="{FF2B5EF4-FFF2-40B4-BE49-F238E27FC236}">
+                <a16:creationId xmlns:a16="http://schemas.microsoft.com/office/drawing/2014/main" id="{8CCED5D4-1CDA-50D3-426C-7BA11E0C8197}"/>
+              </a:ext>
+            </a:extLst>
+          </p:cNvPr>
+          <p:cNvSpPr txBox="1"/>
+          <p:nvPr/>
+        </p:nvSpPr>
+        <p:spPr>
+          <a:xfrm>
+            <a:off x="1981675" y="6460273"/>
+            <a:ext cx="8970789" cy="276999"/>
+          </a:xfrm>
+          <a:prstGeom prst="rect">
+            <a:avLst/>
+          </a:prstGeom>
           <a:noFill/>
-          <a:ln w="0">
-            <a:noFill/>
-            <a:prstDash val="solid"/>
-          </a:ln>
-        </p:spPr>
-        <p:txBody>
-          <a:bodyPr lIns="0" tIns="0" rIns="0" bIns="0" anchor="t"/>
-          <a:lstStyle/>
-          <a:p>
-            <a:pPr algn="l">
-              <a:lnSpc>
-                <a:spcPct val="108000"/>
-              </a:lnSpc>
-              <a:buNone/>
-              <a:defRPr sz="1125" b="1">
-                <a:solidFill>
-                  <a:srgbClr val="3446A8"/>
-                </a:solidFill>
-                <a:latin typeface="Aptos"/>
-                <a:ea typeface="Aptos"/>
-                <a:cs typeface="Aptos"/>
-              </a:defRPr>
-            </a:pPr>
-            <a:r>
-              <a:rPr sz="1125" b="1">
-                <a:solidFill>
-                  <a:srgbClr val="3446A8"/>
-                </a:solidFill>
-                <a:latin typeface="Aptos"/>
-                <a:ea typeface="Aptos"/>
-                <a:cs typeface="Aptos"/>
-              </a:rPr>
-              <a:t>COURSE INTRODUCTION</a:t>
-            </a:r>
-          </a:p>
-        </p:txBody>
-      </p:sp>
-      <p:sp>
-        <p:nvSpPr>
-          <p:cNvPr id="2" name="course-name">
-            <a:extLst>
-              <a:ext uri="{FF2B5EF4-FFF2-40B4-BE49-F238E27FC236}">
-                <a16:creationId xmlns:a16="http://schemas.microsoft.com/office/drawing/2014/main" id="{3003EB14-C4EF-4881-B70C-EE8FF8DB13CA}"/>
-              </a:ext>
-            </a:extLst>
-          </p:cNvPr>
-          <p:cNvSpPr>
-            <a:spLocks noGrp="1"/>
-          </p:cNvSpPr>
-          <p:nvPr/>
-        </p:nvSpPr>
-        <p:spPr>
-          <a:xfrm>
-            <a:off x="723900" y="1085850"/>
-            <a:ext cx="5810250" cy="704850"/>
-          </a:xfrm>
-          <a:prstGeom prst="rect">
-            <a:avLst/>
-          </a:prstGeom>
-          <a:noFill/>
-          <a:ln w="0">
-            <a:noFill/>
-            <a:prstDash val="solid"/>
-          </a:ln>
-        </p:spPr>
-        <p:txBody>
-          <a:bodyPr lIns="0" tIns="0" rIns="0" bIns="0" anchor="t"/>
-          <a:lstStyle/>
-          <a:p>
-            <a:pPr algn="l">
-              <a:lnSpc>
-                <a:spcPct val="102000"/>
-              </a:lnSpc>
-              <a:buNone/>
-              <a:defRPr sz="2400" b="1">
-                <a:solidFill>
-                  <a:srgbClr val="17202A"/>
-                </a:solidFill>
-                <a:latin typeface="PingFang TC"/>
-                <a:ea typeface="PingFang TC"/>
-                <a:cs typeface="PingFang TC"/>
-              </a:defRPr>
-            </a:pPr>
-            <a:r>
-              <a:rPr sz="2400" b="1" dirty="0" err="1">
-                <a:solidFill>
-                  <a:srgbClr val="17202A"/>
-                </a:solidFill>
-                <a:latin typeface="PingFang TC"/>
-                <a:ea typeface="PingFang TC"/>
-                <a:cs typeface="PingFang TC"/>
-              </a:rPr>
-              <a:t>醫療大數據：生醫資料庫與人工智慧應用</a:t>
-            </a:r>
-            <a:endParaRPr sz="2400" b="1" dirty="0">
-              <a:solidFill>
-                <a:srgbClr val="17202A"/>
-              </a:solidFill>
-              <a:latin typeface="PingFang TC"/>
-              <a:ea typeface="PingFang TC"/>
-              <a:cs typeface="PingFang TC"/>
-            </a:endParaRPr>
-          </a:p>
-        </p:txBody>
-      </p:sp>
-      <p:sp>
-        <p:nvSpPr>
-          <p:cNvPr id="3" name="subtitle">
-            <a:extLst>
-              <a:ext uri="{FF2B5EF4-FFF2-40B4-BE49-F238E27FC236}">
-                <a16:creationId xmlns:a16="http://schemas.microsoft.com/office/drawing/2014/main" id="{97A6B0CB-286E-4605-9F34-3D80DBF43A75}"/>
-              </a:ext>
-            </a:extLst>
-          </p:cNvPr>
-          <p:cNvSpPr>
-            <a:spLocks noGrp="1"/>
-          </p:cNvSpPr>
-          <p:nvPr/>
-        </p:nvSpPr>
-        <p:spPr>
-          <a:xfrm>
-            <a:off x="723900" y="1943100"/>
-            <a:ext cx="5429250" cy="457200"/>
-          </a:xfrm>
-          <a:prstGeom prst="rect">
-            <a:avLst/>
-          </a:prstGeom>
-          <a:noFill/>
-          <a:ln w="0">
-            <a:noFill/>
-            <a:prstDash val="solid"/>
-          </a:ln>
-        </p:spPr>
-        <p:txBody>
-          <a:bodyPr lIns="0" tIns="0" rIns="0" bIns="0" anchor="t"/>
-          <a:lstStyle/>
-          <a:p>
-            <a:pPr algn="l">
-              <a:lnSpc>
-                <a:spcPct val="108000"/>
-              </a:lnSpc>
-              <a:buNone/>
-              <a:defRPr sz="1800" b="1">
-                <a:solidFill>
-                  <a:srgbClr val="3446A8"/>
-                </a:solidFill>
-                <a:latin typeface="Aptos"/>
-                <a:ea typeface="Aptos"/>
-                <a:cs typeface="Aptos"/>
-              </a:defRPr>
-            </a:pPr>
-            <a:r>
-              <a:rPr sz="1800" b="1">
-                <a:solidFill>
-                  <a:srgbClr val="3446A8"/>
-                </a:solidFill>
-                <a:latin typeface="Aptos"/>
-                <a:ea typeface="Aptos"/>
-                <a:cs typeface="Aptos"/>
-              </a:rPr>
-              <a:t>AI agents for biomedical research workflows</a:t>
-            </a:r>
-          </a:p>
-        </p:txBody>
-      </p:sp>
-      <p:sp>
-        <p:nvSpPr>
-          <p:cNvPr id="4" name="opening-bullets">
-            <a:extLst>
-              <a:ext uri="{FF2B5EF4-FFF2-40B4-BE49-F238E27FC236}">
-                <a16:creationId xmlns:a16="http://schemas.microsoft.com/office/drawing/2014/main" id="{57C16B68-B9D6-4A44-A9C7-F401AD793A38}"/>
-              </a:ext>
-            </a:extLst>
-          </p:cNvPr>
-          <p:cNvSpPr>
-            <a:spLocks noGrp="1"/>
-          </p:cNvSpPr>
-          <p:nvPr/>
-        </p:nvSpPr>
-        <p:spPr>
-          <a:xfrm>
-            <a:off x="723900" y="2895600"/>
-            <a:ext cx="5429250" cy="1619250"/>
-          </a:xfrm>
-          <a:prstGeom prst="rect">
-            <a:avLst/>
-          </a:prstGeom>
-          <a:noFill/>
-          <a:ln w="0">
-            <a:noFill/>
-            <a:prstDash val="solid"/>
-          </a:ln>
-        </p:spPr>
-        <p:txBody>
-          <a:bodyPr lIns="0" tIns="0" rIns="0" bIns="0"/>
-          <a:lstStyle/>
-          <a:p>
-            <a:pPr marL="24" indent="-12">
-              <a:lnSpc>
-                <a:spcPct val="108000"/>
-              </a:lnSpc>
-              <a:spcAft>
-                <a:spcPts val="14"/>
-              </a:spcAft>
-              <a:buNone/>
-              <a:defRPr sz="1800">
-                <a:solidFill>
-                  <a:srgbClr val="17202A"/>
-                </a:solidFill>
-                <a:latin typeface="PingFang TC"/>
-                <a:ea typeface="PingFang TC"/>
-                <a:cs typeface="PingFang TC"/>
-              </a:defRPr>
-            </a:pPr>
-            <a:r>
-              <a:rPr sz="1800">
-                <a:solidFill>
-                  <a:srgbClr val="17202A"/>
-                </a:solidFill>
-                <a:latin typeface="PingFang TC"/>
-                <a:ea typeface="PingFang TC"/>
-                <a:cs typeface="PingFang TC"/>
-              </a:rPr>
-              <a:t>我們關心的不只是得到答案</a:t>
-            </a:r>
-          </a:p>
-          <a:p>
-            <a:pPr marL="24" indent="-12">
-              <a:lnSpc>
-                <a:spcPct val="108000"/>
-              </a:lnSpc>
-              <a:spcAft>
-                <a:spcPts val="14"/>
-              </a:spcAft>
-              <a:buNone/>
-              <a:defRPr sz="1800">
-                <a:solidFill>
-                  <a:srgbClr val="17202A"/>
-                </a:solidFill>
-                <a:latin typeface="PingFang TC"/>
-                <a:ea typeface="PingFang TC"/>
-                <a:cs typeface="PingFang TC"/>
-              </a:defRPr>
-            </a:pPr>
-            <a:r>
-              <a:rPr sz="1800">
-                <a:solidFill>
-                  <a:srgbClr val="17202A"/>
-                </a:solidFill>
-                <a:latin typeface="PingFang TC"/>
-                <a:ea typeface="PingFang TC"/>
-                <a:cs typeface="PingFang TC"/>
-              </a:rPr>
-              <a:t>而是答案如何被產生、檢查、重跑</a:t>
-            </a:r>
-          </a:p>
-          <a:p>
-            <a:pPr marL="24" indent="-12">
-              <a:lnSpc>
-                <a:spcPct val="108000"/>
-              </a:lnSpc>
-              <a:spcAft>
-                <a:spcPts val="14"/>
-              </a:spcAft>
-              <a:buNone/>
-              <a:defRPr sz="1800">
-                <a:solidFill>
-                  <a:srgbClr val="17202A"/>
-                </a:solidFill>
-                <a:latin typeface="PingFang TC"/>
-                <a:ea typeface="PingFang TC"/>
-                <a:cs typeface="PingFang TC"/>
-              </a:defRPr>
-            </a:pPr>
-            <a:r>
-              <a:rPr sz="1800">
-                <a:solidFill>
-                  <a:srgbClr val="17202A"/>
-                </a:solidFill>
-                <a:latin typeface="PingFang TC"/>
-                <a:ea typeface="PingFang TC"/>
-                <a:cs typeface="PingFang TC"/>
-              </a:rPr>
-              <a:t>三天後，你要能設計一個可信的 biomedical AI agent workflow</a:t>
-            </a:r>
-          </a:p>
-        </p:txBody>
-      </p:sp>
-      <p:sp>
-        <p:nvSpPr>
-          <p:cNvPr id="5" name="node-question">
-            <a:extLst>
-              <a:ext uri="{FF2B5EF4-FFF2-40B4-BE49-F238E27FC236}">
-                <a16:creationId xmlns:a16="http://schemas.microsoft.com/office/drawing/2014/main" id="{53367A2D-4FED-48D0-995A-FDE87EC6C00F}"/>
-              </a:ext>
-            </a:extLst>
-          </p:cNvPr>
-          <p:cNvSpPr>
-            <a:spLocks noGrp="1"/>
-          </p:cNvSpPr>
-          <p:nvPr/>
-        </p:nvSpPr>
-        <p:spPr>
-          <a:xfrm>
-            <a:off x="7010400" y="1466850"/>
-            <a:ext cx="1428750" cy="647700"/>
-          </a:xfrm>
-          <a:prstGeom prst="roundRect">
-            <a:avLst>
-              <a:gd name="adj" fmla="val 11765"/>
-            </a:avLst>
-          </a:prstGeom>
-          <a:solidFill>
-            <a:srgbClr val="FFFFFF"/>
-          </a:solidFill>
-          <a:ln w="13335">
-            <a:solidFill>
-              <a:srgbClr val="0B6E68"/>
-            </a:solidFill>
-            <a:prstDash val="solid"/>
-          </a:ln>
-        </p:spPr>
-        <p:txBody>
-          <a:bodyPr lIns="76200" tIns="57150" rIns="76200" bIns="57150" anchor="ctr"/>
-          <a:lstStyle/>
-          <a:p>
-            <a:pPr algn="ctr">
-              <a:defRPr sz="1275" b="1">
-                <a:solidFill>
-                  <a:srgbClr val="0B6E68"/>
-                </a:solidFill>
-                <a:latin typeface="PingFang TC"/>
-                <a:ea typeface="PingFang TC"/>
-                <a:cs typeface="PingFang TC"/>
-              </a:defRPr>
-            </a:pPr>
-            <a:r>
-              <a:rPr sz="1275" b="1">
-                <a:solidFill>
-                  <a:srgbClr val="0B6E68"/>
-                </a:solidFill>
-                <a:latin typeface="PingFang TC"/>
-                <a:ea typeface="PingFang TC"/>
-                <a:cs typeface="PingFang TC"/>
-              </a:rPr>
-              <a:t>Research</a:t>
-            </a:r>
-          </a:p>
-          <a:p>
-            <a:pPr algn="ctr">
-              <a:defRPr sz="1275" b="1">
-                <a:solidFill>
-                  <a:srgbClr val="0B6E68"/>
-                </a:solidFill>
-                <a:latin typeface="PingFang TC"/>
-                <a:ea typeface="PingFang TC"/>
-                <a:cs typeface="PingFang TC"/>
-              </a:defRPr>
-            </a:pPr>
-            <a:r>
-              <a:rPr sz="1275" b="1">
-                <a:solidFill>
-                  <a:srgbClr val="0B6E68"/>
-                </a:solidFill>
-                <a:latin typeface="PingFang TC"/>
-                <a:ea typeface="PingFang TC"/>
-                <a:cs typeface="PingFang TC"/>
-              </a:rPr>
-              <a:t>question</a:t>
-            </a:r>
-          </a:p>
-        </p:txBody>
-      </p:sp>
-      <p:sp>
-        <p:nvSpPr>
-          <p:cNvPr id="6" name="node-agent">
-            <a:extLst>
-              <a:ext uri="{FF2B5EF4-FFF2-40B4-BE49-F238E27FC236}">
-                <a16:creationId xmlns:a16="http://schemas.microsoft.com/office/drawing/2014/main" id="{BC81E8A5-103F-4937-9583-B8EFA485A2D1}"/>
-              </a:ext>
-            </a:extLst>
-          </p:cNvPr>
-          <p:cNvSpPr>
-            <a:spLocks noGrp="1"/>
-          </p:cNvSpPr>
-          <p:nvPr/>
-        </p:nvSpPr>
-        <p:spPr>
-          <a:xfrm>
-            <a:off x="9372600" y="1466850"/>
-            <a:ext cx="1619250" cy="647700"/>
-          </a:xfrm>
-          <a:prstGeom prst="roundRect">
-            <a:avLst>
-              <a:gd name="adj" fmla="val 11765"/>
-            </a:avLst>
-          </a:prstGeom>
-          <a:solidFill>
-            <a:srgbClr val="FFFFFF"/>
-          </a:solidFill>
-          <a:ln w="13335">
-            <a:solidFill>
-              <a:srgbClr val="3446A8"/>
-            </a:solidFill>
-            <a:prstDash val="solid"/>
-          </a:ln>
-        </p:spPr>
-        <p:txBody>
-          <a:bodyPr lIns="76200" tIns="57150" rIns="76200" bIns="57150" anchor="ctr"/>
-          <a:lstStyle/>
-          <a:p>
-            <a:pPr algn="ctr">
-              <a:defRPr sz="1275" b="1">
-                <a:solidFill>
-                  <a:srgbClr val="3446A8"/>
-                </a:solidFill>
-                <a:latin typeface="PingFang TC"/>
-                <a:ea typeface="PingFang TC"/>
-                <a:cs typeface="PingFang TC"/>
-              </a:defRPr>
-            </a:pPr>
-            <a:r>
-              <a:rPr sz="1275" b="1">
-                <a:solidFill>
-                  <a:srgbClr val="3446A8"/>
-                </a:solidFill>
-                <a:latin typeface="PingFang TC"/>
-                <a:ea typeface="PingFang TC"/>
-                <a:cs typeface="PingFang TC"/>
-              </a:rPr>
-              <a:t>AI agent</a:t>
-            </a:r>
-          </a:p>
-          <a:p>
-            <a:pPr algn="ctr">
-              <a:defRPr sz="1275" b="1">
-                <a:solidFill>
-                  <a:srgbClr val="3446A8"/>
-                </a:solidFill>
-                <a:latin typeface="PingFang TC"/>
-                <a:ea typeface="PingFang TC"/>
-                <a:cs typeface="PingFang TC"/>
-              </a:defRPr>
-            </a:pPr>
-            <a:r>
-              <a:rPr sz="1275" b="1">
-                <a:solidFill>
-                  <a:srgbClr val="3446A8"/>
-                </a:solidFill>
-                <a:latin typeface="PingFang TC"/>
-                <a:ea typeface="PingFang TC"/>
-                <a:cs typeface="PingFang TC"/>
-              </a:rPr>
-              <a:t>workflow</a:t>
-            </a:r>
-          </a:p>
-        </p:txBody>
-      </p:sp>
-      <p:sp>
-        <p:nvSpPr>
-          <p:cNvPr id="7" name="node-paper">
-            <a:extLst>
-              <a:ext uri="{FF2B5EF4-FFF2-40B4-BE49-F238E27FC236}">
-                <a16:creationId xmlns:a16="http://schemas.microsoft.com/office/drawing/2014/main" id="{44A3704A-C796-41E4-95AE-EE705F765121}"/>
-              </a:ext>
-            </a:extLst>
-          </p:cNvPr>
-          <p:cNvSpPr>
-            <a:spLocks noGrp="1"/>
-          </p:cNvSpPr>
-          <p:nvPr/>
-        </p:nvSpPr>
-        <p:spPr>
-          <a:xfrm>
-            <a:off x="7029450" y="3200400"/>
-            <a:ext cx="1104900" cy="476250"/>
-          </a:xfrm>
-          <a:prstGeom prst="roundRect">
-            <a:avLst>
-              <a:gd name="adj" fmla="val 16000"/>
-            </a:avLst>
-          </a:prstGeom>
-          <a:solidFill>
-            <a:srgbClr val="FFFFFF"/>
-          </a:solidFill>
-          <a:ln w="13335">
-            <a:solidFill>
-              <a:srgbClr val="5C6670"/>
-            </a:solidFill>
-            <a:prstDash val="solid"/>
-          </a:ln>
-        </p:spPr>
-        <p:txBody>
-          <a:bodyPr lIns="76200" tIns="57150" rIns="76200" bIns="57150" anchor="ctr"/>
-          <a:lstStyle/>
-          <a:p>
-            <a:pPr algn="ctr">
-              <a:defRPr sz="1200" b="1">
-                <a:solidFill>
-                  <a:srgbClr val="5C6670"/>
-                </a:solidFill>
-                <a:latin typeface="PingFang TC"/>
-                <a:ea typeface="PingFang TC"/>
-                <a:cs typeface="PingFang TC"/>
-              </a:defRPr>
-            </a:pPr>
-            <a:r>
-              <a:rPr sz="1200" b="1">
-                <a:solidFill>
-                  <a:srgbClr val="5C6670"/>
-                </a:solidFill>
-                <a:latin typeface="PingFang TC"/>
-                <a:ea typeface="PingFang TC"/>
-                <a:cs typeface="PingFang TC"/>
-              </a:rPr>
-              <a:t>Paper</a:t>
-            </a:r>
-          </a:p>
-        </p:txBody>
-      </p:sp>
-      <p:sp>
-        <p:nvSpPr>
-          <p:cNvPr id="8" name="node-data">
-            <a:extLst>
-              <a:ext uri="{FF2B5EF4-FFF2-40B4-BE49-F238E27FC236}">
-                <a16:creationId xmlns:a16="http://schemas.microsoft.com/office/drawing/2014/main" id="{B3FF219D-1BCF-48DB-82F2-940CDF773C1E}"/>
-              </a:ext>
-            </a:extLst>
-          </p:cNvPr>
-          <p:cNvSpPr>
-            <a:spLocks noGrp="1"/>
-          </p:cNvSpPr>
-          <p:nvPr/>
-        </p:nvSpPr>
-        <p:spPr>
-          <a:xfrm>
-            <a:off x="8572500" y="3200400"/>
-            <a:ext cx="1257300" cy="476250"/>
-          </a:xfrm>
-          <a:prstGeom prst="roundRect">
-            <a:avLst>
-              <a:gd name="adj" fmla="val 16000"/>
-            </a:avLst>
-          </a:prstGeom>
-          <a:solidFill>
-            <a:srgbClr val="FFFFFF"/>
-          </a:solidFill>
-          <a:ln w="13335">
-            <a:solidFill>
-              <a:srgbClr val="5C6670"/>
-            </a:solidFill>
-            <a:prstDash val="solid"/>
-          </a:ln>
-        </p:spPr>
-        <p:txBody>
-          <a:bodyPr lIns="76200" tIns="57150" rIns="76200" bIns="57150" anchor="ctr"/>
-          <a:lstStyle/>
-          <a:p>
-            <a:pPr algn="ctr">
-              <a:defRPr sz="1200" b="1">
-                <a:solidFill>
-                  <a:srgbClr val="5C6670"/>
-                </a:solidFill>
-                <a:latin typeface="PingFang TC"/>
-                <a:ea typeface="PingFang TC"/>
-                <a:cs typeface="PingFang TC"/>
-              </a:defRPr>
-            </a:pPr>
-            <a:r>
-              <a:rPr sz="1200" b="1">
-                <a:solidFill>
-                  <a:srgbClr val="5C6670"/>
-                </a:solidFill>
-                <a:latin typeface="PingFang TC"/>
-                <a:ea typeface="PingFang TC"/>
-                <a:cs typeface="PingFang TC"/>
-              </a:rPr>
-              <a:t>Dataset</a:t>
-            </a:r>
-          </a:p>
-        </p:txBody>
-      </p:sp>
-      <p:sp>
-        <p:nvSpPr>
-          <p:cNvPr id="9" name="node-code">
-            <a:extLst>
-              <a:ext uri="{FF2B5EF4-FFF2-40B4-BE49-F238E27FC236}">
-                <a16:creationId xmlns:a16="http://schemas.microsoft.com/office/drawing/2014/main" id="{01E0672E-5AF2-4D24-99B3-2D9C1663D501}"/>
-              </a:ext>
-            </a:extLst>
-          </p:cNvPr>
-          <p:cNvSpPr>
-            <a:spLocks noGrp="1"/>
-          </p:cNvSpPr>
-          <p:nvPr/>
-        </p:nvSpPr>
-        <p:spPr>
-          <a:xfrm>
-            <a:off x="10267950" y="3200400"/>
-            <a:ext cx="1066800" cy="476250"/>
-          </a:xfrm>
-          <a:prstGeom prst="roundRect">
-            <a:avLst>
-              <a:gd name="adj" fmla="val 16000"/>
-            </a:avLst>
-          </a:prstGeom>
-          <a:solidFill>
-            <a:srgbClr val="FFFFFF"/>
-          </a:solidFill>
-          <a:ln w="13335">
-            <a:solidFill>
-              <a:srgbClr val="5C6670"/>
-            </a:solidFill>
-            <a:prstDash val="solid"/>
-          </a:ln>
-        </p:spPr>
-        <p:txBody>
-          <a:bodyPr lIns="76200" tIns="57150" rIns="76200" bIns="57150" anchor="ctr"/>
-          <a:lstStyle/>
-          <a:p>
-            <a:pPr algn="ctr">
-              <a:defRPr sz="1200" b="1">
-                <a:solidFill>
-                  <a:srgbClr val="5C6670"/>
-                </a:solidFill>
-                <a:latin typeface="PingFang TC"/>
-                <a:ea typeface="PingFang TC"/>
-                <a:cs typeface="PingFang TC"/>
-              </a:defRPr>
-            </a:pPr>
-            <a:r>
-              <a:rPr sz="1200" b="1">
-                <a:solidFill>
-                  <a:srgbClr val="5C6670"/>
-                </a:solidFill>
-                <a:latin typeface="PingFang TC"/>
-                <a:ea typeface="PingFang TC"/>
-                <a:cs typeface="PingFang TC"/>
-              </a:rPr>
-              <a:t>Code</a:t>
-            </a:r>
-          </a:p>
-        </p:txBody>
-      </p:sp>
-      <p:sp>
-        <p:nvSpPr>
-          <p:cNvPr id="10" name="node-output">
-            <a:extLst>
-              <a:ext uri="{FF2B5EF4-FFF2-40B4-BE49-F238E27FC236}">
-                <a16:creationId xmlns:a16="http://schemas.microsoft.com/office/drawing/2014/main" id="{12FEA1D9-D3CD-4E9E-A68F-308C30B9A395}"/>
-              </a:ext>
-            </a:extLst>
-          </p:cNvPr>
-          <p:cNvSpPr>
-            <a:spLocks noGrp="1"/>
-          </p:cNvSpPr>
-          <p:nvPr/>
-        </p:nvSpPr>
-        <p:spPr>
-          <a:xfrm>
-            <a:off x="8334375" y="4648200"/>
-            <a:ext cx="2000250" cy="647700"/>
-          </a:xfrm>
-          <a:prstGeom prst="roundRect">
-            <a:avLst>
-              <a:gd name="adj" fmla="val 11765"/>
-            </a:avLst>
-          </a:prstGeom>
-          <a:solidFill>
-            <a:srgbClr val="FFFFFF"/>
-          </a:solidFill>
-          <a:ln w="13335">
-            <a:solidFill>
-              <a:srgbClr val="0B6E68"/>
-            </a:solidFill>
-            <a:prstDash val="solid"/>
-          </a:ln>
-        </p:spPr>
-        <p:txBody>
-          <a:bodyPr lIns="76200" tIns="57150" rIns="76200" bIns="57150" anchor="ctr"/>
-          <a:lstStyle/>
-          <a:p>
-            <a:pPr algn="ctr">
-              <a:defRPr sz="1200" b="1">
-                <a:solidFill>
-                  <a:srgbClr val="0B6E68"/>
-                </a:solidFill>
-                <a:latin typeface="PingFang TC"/>
-                <a:ea typeface="PingFang TC"/>
-                <a:cs typeface="PingFang TC"/>
-              </a:defRPr>
-            </a:pPr>
-            <a:r>
-              <a:rPr sz="1200" b="1">
-                <a:solidFill>
-                  <a:srgbClr val="0B6E68"/>
-                </a:solidFill>
-                <a:latin typeface="PingFang TC"/>
-                <a:ea typeface="PingFang TC"/>
-                <a:cs typeface="PingFang TC"/>
-              </a:rPr>
-              <a:t>Evidence-backed</a:t>
-            </a:r>
-          </a:p>
-          <a:p>
-            <a:pPr algn="ctr">
-              <a:defRPr sz="1200" b="1">
-                <a:solidFill>
-                  <a:srgbClr val="0B6E68"/>
-                </a:solidFill>
-                <a:latin typeface="PingFang TC"/>
-                <a:ea typeface="PingFang TC"/>
-                <a:cs typeface="PingFang TC"/>
-              </a:defRPr>
-            </a:pPr>
-            <a:r>
-              <a:rPr sz="1200" b="1">
-                <a:solidFill>
-                  <a:srgbClr val="0B6E68"/>
-                </a:solidFill>
-                <a:latin typeface="PingFang TC"/>
-                <a:ea typeface="PingFang TC"/>
-                <a:cs typeface="PingFang TC"/>
-              </a:rPr>
-              <a:t>output</a:t>
-            </a:r>
-          </a:p>
-        </p:txBody>
-      </p:sp>
-      <p:sp>
-        <p:nvSpPr>
-          <p:cNvPr id="11" name="line-question-agent">
-            <a:extLst>
-              <a:ext uri="{FF2B5EF4-FFF2-40B4-BE49-F238E27FC236}">
-                <a16:creationId xmlns:a16="http://schemas.microsoft.com/office/drawing/2014/main" id="{2EAC8E01-3312-4737-866F-6C84FC20720F}"/>
-              </a:ext>
-            </a:extLst>
-          </p:cNvPr>
-          <p:cNvSpPr>
-            <a:spLocks noGrp="1"/>
-          </p:cNvSpPr>
-          <p:nvPr/>
-        </p:nvSpPr>
-        <p:spPr>
-          <a:xfrm>
-            <a:off x="8439150" y="1790700"/>
-            <a:ext cx="933450" cy="0"/>
-          </a:xfrm>
-          <a:prstGeom prst="line">
-            <a:avLst/>
-          </a:prstGeom>
-          <a:noFill/>
-          <a:ln w="17145">
-            <a:solidFill>
-              <a:srgbClr val="3446A8"/>
-            </a:solidFill>
-            <a:prstDash val="solid"/>
-          </a:ln>
-        </p:spPr>
-        <p:txBody>
-          <a:bodyPr/>
-          <a:lstStyle/>
-          <a:p>
-            <a:endParaRPr lang="zh-TW" altLang="en-US"/>
-          </a:p>
-        </p:txBody>
-      </p:sp>
-      <p:sp>
-        <p:nvSpPr>
-          <p:cNvPr id="12" name="line-agent-down">
-            <a:extLst>
-              <a:ext uri="{FF2B5EF4-FFF2-40B4-BE49-F238E27FC236}">
-                <a16:creationId xmlns:a16="http://schemas.microsoft.com/office/drawing/2014/main" id="{DA755D8D-2F13-4836-8703-337FE8910FF4}"/>
-              </a:ext>
-            </a:extLst>
-          </p:cNvPr>
-          <p:cNvSpPr>
-            <a:spLocks noGrp="1"/>
-          </p:cNvSpPr>
-          <p:nvPr/>
-        </p:nvSpPr>
-        <p:spPr>
-          <a:xfrm>
-            <a:off x="10182225" y="2114550"/>
-            <a:ext cx="0" cy="742950"/>
-          </a:xfrm>
-          <a:prstGeom prst="line">
-            <a:avLst/>
-          </a:prstGeom>
-          <a:noFill/>
-          <a:ln w="14288">
-            <a:solidFill>
-              <a:srgbClr val="3446A8"/>
-            </a:solidFill>
-            <a:prstDash val="solid"/>
-          </a:ln>
-        </p:spPr>
-        <p:txBody>
-          <a:bodyPr/>
-          <a:lstStyle/>
-          <a:p>
-            <a:endParaRPr lang="zh-TW" altLang="en-US"/>
-          </a:p>
-        </p:txBody>
-      </p:sp>
-      <p:sp>
-        <p:nvSpPr>
-          <p:cNvPr id="13" name="line-agent-bus">
-            <a:extLst>
-              <a:ext uri="{FF2B5EF4-FFF2-40B4-BE49-F238E27FC236}">
-                <a16:creationId xmlns:a16="http://schemas.microsoft.com/office/drawing/2014/main" id="{66648085-D33A-46CA-84CD-A43ACAC482E2}"/>
-              </a:ext>
-            </a:extLst>
-          </p:cNvPr>
-          <p:cNvSpPr>
-            <a:spLocks noGrp="1"/>
-          </p:cNvSpPr>
-          <p:nvPr/>
-        </p:nvSpPr>
-        <p:spPr>
-          <a:xfrm>
-            <a:off x="7581900" y="2857500"/>
-            <a:ext cx="3219450" cy="0"/>
-          </a:xfrm>
-          <a:prstGeom prst="line">
-            <a:avLst/>
-          </a:prstGeom>
-          <a:noFill/>
-          <a:ln w="14288">
-            <a:solidFill>
-              <a:srgbClr val="3446A8"/>
-            </a:solidFill>
-            <a:prstDash val="solid"/>
-          </a:ln>
-        </p:spPr>
-        <p:txBody>
-          <a:bodyPr/>
-          <a:lstStyle/>
-          <a:p>
-            <a:endParaRPr lang="zh-TW" altLang="en-US"/>
-          </a:p>
-        </p:txBody>
-      </p:sp>
-      <p:sp>
-        <p:nvSpPr>
-          <p:cNvPr id="14" name="line-paper-in">
-            <a:extLst>
-              <a:ext uri="{FF2B5EF4-FFF2-40B4-BE49-F238E27FC236}">
-                <a16:creationId xmlns:a16="http://schemas.microsoft.com/office/drawing/2014/main" id="{EAF1B416-AAD8-45FF-AED1-AB516E01D907}"/>
-              </a:ext>
-            </a:extLst>
-          </p:cNvPr>
-          <p:cNvSpPr>
-            <a:spLocks noGrp="1"/>
-          </p:cNvSpPr>
-          <p:nvPr/>
-        </p:nvSpPr>
-        <p:spPr>
-          <a:xfrm>
-            <a:off x="7581900" y="2857500"/>
-            <a:ext cx="0" cy="342900"/>
-          </a:xfrm>
-          <a:prstGeom prst="line">
-            <a:avLst/>
-          </a:prstGeom>
-          <a:noFill/>
-          <a:ln w="14288">
-            <a:solidFill>
-              <a:srgbClr val="3446A8"/>
-            </a:solidFill>
-            <a:prstDash val="solid"/>
-          </a:ln>
-        </p:spPr>
-        <p:txBody>
-          <a:bodyPr/>
-          <a:lstStyle/>
-          <a:p>
-            <a:endParaRPr lang="zh-TW" altLang="en-US"/>
-          </a:p>
-        </p:txBody>
-      </p:sp>
-      <p:sp>
-        <p:nvSpPr>
-          <p:cNvPr id="15" name="line-data-in">
-            <a:extLst>
-              <a:ext uri="{FF2B5EF4-FFF2-40B4-BE49-F238E27FC236}">
-                <a16:creationId xmlns:a16="http://schemas.microsoft.com/office/drawing/2014/main" id="{FD7E2F3B-9CA5-4E42-81D3-3D8DBA58A815}"/>
-              </a:ext>
-            </a:extLst>
-          </p:cNvPr>
-          <p:cNvSpPr>
-            <a:spLocks noGrp="1"/>
-          </p:cNvSpPr>
-          <p:nvPr/>
-        </p:nvSpPr>
-        <p:spPr>
-          <a:xfrm>
-            <a:off x="9201150" y="2857500"/>
-            <a:ext cx="0" cy="342900"/>
-          </a:xfrm>
-          <a:prstGeom prst="line">
-            <a:avLst/>
-          </a:prstGeom>
-          <a:noFill/>
-          <a:ln w="14288">
-            <a:solidFill>
-              <a:srgbClr val="3446A8"/>
-            </a:solidFill>
-            <a:prstDash val="solid"/>
-          </a:ln>
-        </p:spPr>
-        <p:txBody>
-          <a:bodyPr/>
-          <a:lstStyle/>
-          <a:p>
-            <a:endParaRPr lang="zh-TW" altLang="en-US"/>
-          </a:p>
-        </p:txBody>
-      </p:sp>
-      <p:sp>
-        <p:nvSpPr>
-          <p:cNvPr id="16" name="line-code-in">
-            <a:extLst>
-              <a:ext uri="{FF2B5EF4-FFF2-40B4-BE49-F238E27FC236}">
-                <a16:creationId xmlns:a16="http://schemas.microsoft.com/office/drawing/2014/main" id="{52DAA266-E4F5-4E3B-8807-213EBBB4ADB2}"/>
-              </a:ext>
-            </a:extLst>
-          </p:cNvPr>
-          <p:cNvSpPr>
-            <a:spLocks noGrp="1"/>
-          </p:cNvSpPr>
-          <p:nvPr/>
-        </p:nvSpPr>
-        <p:spPr>
-          <a:xfrm>
-            <a:off x="10801350" y="2857500"/>
-            <a:ext cx="0" cy="342900"/>
-          </a:xfrm>
-          <a:prstGeom prst="line">
-            <a:avLst/>
-          </a:prstGeom>
-          <a:noFill/>
-          <a:ln w="14288">
-            <a:solidFill>
-              <a:srgbClr val="3446A8"/>
-            </a:solidFill>
-            <a:prstDash val="solid"/>
-          </a:ln>
-        </p:spPr>
-        <p:txBody>
-          <a:bodyPr/>
-          <a:lstStyle/>
-          <a:p>
-            <a:endParaRPr lang="zh-TW" altLang="en-US"/>
-          </a:p>
-        </p:txBody>
-      </p:sp>
-      <p:sp>
-        <p:nvSpPr>
-          <p:cNvPr id="17" name="line-paper-out">
-            <a:extLst>
-              <a:ext uri="{FF2B5EF4-FFF2-40B4-BE49-F238E27FC236}">
-                <a16:creationId xmlns:a16="http://schemas.microsoft.com/office/drawing/2014/main" id="{DDD157CC-971A-4F9D-849E-2347D42DDF77}"/>
-              </a:ext>
-            </a:extLst>
-          </p:cNvPr>
-          <p:cNvSpPr>
-            <a:spLocks noGrp="1"/>
-          </p:cNvSpPr>
-          <p:nvPr/>
-        </p:nvSpPr>
-        <p:spPr>
-          <a:xfrm>
-            <a:off x="7581900" y="3676650"/>
-            <a:ext cx="0" cy="495300"/>
-          </a:xfrm>
-          <a:prstGeom prst="line">
-            <a:avLst/>
-          </a:prstGeom>
-          <a:noFill/>
-          <a:ln w="14288">
-            <a:solidFill>
-              <a:srgbClr val="0B6E68"/>
-            </a:solidFill>
-            <a:prstDash val="solid"/>
-          </a:ln>
-        </p:spPr>
-        <p:txBody>
-          <a:bodyPr/>
-          <a:lstStyle/>
-          <a:p>
-            <a:endParaRPr lang="zh-TW" altLang="en-US"/>
-          </a:p>
-        </p:txBody>
-      </p:sp>
-      <p:sp>
-        <p:nvSpPr>
-          <p:cNvPr id="18" name="line-data-out">
-            <a:extLst>
-              <a:ext uri="{FF2B5EF4-FFF2-40B4-BE49-F238E27FC236}">
-                <a16:creationId xmlns:a16="http://schemas.microsoft.com/office/drawing/2014/main" id="{40969DD5-1CB0-46E1-A251-FC95BE72EECD}"/>
-              </a:ext>
-            </a:extLst>
-          </p:cNvPr>
-          <p:cNvSpPr>
-            <a:spLocks noGrp="1"/>
-          </p:cNvSpPr>
-          <p:nvPr/>
-        </p:nvSpPr>
-        <p:spPr>
-          <a:xfrm>
-            <a:off x="9201150" y="3676650"/>
-            <a:ext cx="0" cy="495300"/>
-          </a:xfrm>
-          <a:prstGeom prst="line">
-            <a:avLst/>
-          </a:prstGeom>
-          <a:noFill/>
-          <a:ln w="14288">
-            <a:solidFill>
-              <a:srgbClr val="0B6E68"/>
-            </a:solidFill>
-            <a:prstDash val="solid"/>
-          </a:ln>
-        </p:spPr>
-        <p:txBody>
-          <a:bodyPr/>
-          <a:lstStyle/>
-          <a:p>
-            <a:endParaRPr lang="zh-TW" altLang="en-US"/>
-          </a:p>
-        </p:txBody>
-      </p:sp>
-      <p:sp>
-        <p:nvSpPr>
-          <p:cNvPr id="19" name="line-code-out">
-            <a:extLst>
-              <a:ext uri="{FF2B5EF4-FFF2-40B4-BE49-F238E27FC236}">
-                <a16:creationId xmlns:a16="http://schemas.microsoft.com/office/drawing/2014/main" id="{C1F8740D-9AC2-4429-99EF-ACB92D1C6761}"/>
-              </a:ext>
-            </a:extLst>
-          </p:cNvPr>
-          <p:cNvSpPr>
-            <a:spLocks noGrp="1"/>
-          </p:cNvSpPr>
-          <p:nvPr/>
-        </p:nvSpPr>
-        <p:spPr>
-          <a:xfrm>
-            <a:off x="10801350" y="3676650"/>
-            <a:ext cx="0" cy="495300"/>
-          </a:xfrm>
-          <a:prstGeom prst="line">
-            <a:avLst/>
-          </a:prstGeom>
-          <a:noFill/>
-          <a:ln w="14288">
-            <a:solidFill>
-              <a:srgbClr val="0B6E68"/>
-            </a:solidFill>
-            <a:prstDash val="solid"/>
-          </a:ln>
-        </p:spPr>
-        <p:txBody>
-          <a:bodyPr/>
-          <a:lstStyle/>
-          <a:p>
-            <a:endParaRPr lang="zh-TW" altLang="en-US"/>
-          </a:p>
-        </p:txBody>
-      </p:sp>
-      <p:sp>
-        <p:nvSpPr>
-          <p:cNvPr id="20" name="line-output-bus">
-            <a:extLst>
-              <a:ext uri="{FF2B5EF4-FFF2-40B4-BE49-F238E27FC236}">
-                <a16:creationId xmlns:a16="http://schemas.microsoft.com/office/drawing/2014/main" id="{60BCB4C2-F2F3-4BA9-914A-AA3B354C7DE2}"/>
-              </a:ext>
-            </a:extLst>
-          </p:cNvPr>
-          <p:cNvSpPr>
-            <a:spLocks noGrp="1"/>
-          </p:cNvSpPr>
-          <p:nvPr/>
-        </p:nvSpPr>
-        <p:spPr>
-          <a:xfrm>
-            <a:off x="7581900" y="4171950"/>
-            <a:ext cx="3219450" cy="0"/>
-          </a:xfrm>
-          <a:prstGeom prst="line">
-            <a:avLst/>
-          </a:prstGeom>
-          <a:noFill/>
-          <a:ln w="14288">
-            <a:solidFill>
-              <a:srgbClr val="0B6E68"/>
-            </a:solidFill>
-            <a:prstDash val="solid"/>
-          </a:ln>
-        </p:spPr>
-        <p:txBody>
-          <a:bodyPr/>
-          <a:lstStyle/>
-          <a:p>
-            <a:endParaRPr lang="zh-TW" altLang="en-US"/>
-          </a:p>
-        </p:txBody>
-      </p:sp>
-      <p:sp>
-        <p:nvSpPr>
-          <p:cNvPr id="21" name="line-output-down">
-            <a:extLst>
-              <a:ext uri="{FF2B5EF4-FFF2-40B4-BE49-F238E27FC236}">
-                <a16:creationId xmlns:a16="http://schemas.microsoft.com/office/drawing/2014/main" id="{BD82C53D-2059-4B8D-AAF2-8FEC721B9FAE}"/>
-              </a:ext>
-            </a:extLst>
-          </p:cNvPr>
-          <p:cNvSpPr>
-            <a:spLocks noGrp="1"/>
-          </p:cNvSpPr>
-          <p:nvPr/>
-        </p:nvSpPr>
-        <p:spPr>
-          <a:xfrm>
-            <a:off x="9334500" y="4171950"/>
-            <a:ext cx="0" cy="476250"/>
-          </a:xfrm>
-          <a:prstGeom prst="line">
-            <a:avLst/>
-          </a:prstGeom>
-          <a:noFill/>
-          <a:ln w="17145">
-            <a:solidFill>
-              <a:srgbClr val="0B6E68"/>
-            </a:solidFill>
-            <a:prstDash val="solid"/>
-          </a:ln>
-        </p:spPr>
-        <p:txBody>
-          <a:bodyPr/>
-          <a:lstStyle/>
-          <a:p>
-            <a:endParaRPr lang="zh-TW" altLang="en-US"/>
-          </a:p>
-        </p:txBody>
-      </p:sp>
-      <p:sp>
-        <p:nvSpPr>
-          <p:cNvPr id="22" name="footer">
-            <a:extLst>
-              <a:ext uri="{FF2B5EF4-FFF2-40B4-BE49-F238E27FC236}">
-                <a16:creationId xmlns:a16="http://schemas.microsoft.com/office/drawing/2014/main" id="{5609B696-87E4-4AEC-A762-1CF129D7FC69}"/>
-              </a:ext>
-            </a:extLst>
-          </p:cNvPr>
-          <p:cNvSpPr>
-            <a:spLocks noGrp="1"/>
-          </p:cNvSpPr>
-          <p:nvPr/>
-        </p:nvSpPr>
-        <p:spPr>
-          <a:xfrm>
-            <a:off x="723900" y="6362700"/>
-            <a:ext cx="3429000" cy="209550"/>
-          </a:xfrm>
-          <a:prstGeom prst="rect">
-            <a:avLst/>
-          </a:prstGeom>
-          <a:noFill/>
-          <a:ln w="0">
-            <a:noFill/>
-            <a:prstDash val="solid"/>
-          </a:ln>
-        </p:spPr>
-        <p:txBody>
-          <a:bodyPr lIns="0" tIns="0" rIns="0" bIns="0" anchor="t"/>
-          <a:lstStyle/>
-          <a:p>
-            <a:pPr algn="l">
-              <a:lnSpc>
-                <a:spcPct val="108000"/>
-              </a:lnSpc>
-              <a:buNone/>
-              <a:defRPr sz="900" b="0">
-                <a:solidFill>
-                  <a:srgbClr val="5C6670"/>
-                </a:solidFill>
-                <a:latin typeface="Aptos"/>
-                <a:ea typeface="Aptos"/>
-                <a:cs typeface="Aptos"/>
-              </a:defRPr>
-            </a:pPr>
-            <a:r>
-              <a:rPr sz="900" b="0">
-                <a:solidFill>
-                  <a:srgbClr val="5C6670"/>
-                </a:solidFill>
-                <a:latin typeface="Aptos"/>
-                <a:ea typeface="Aptos"/>
-                <a:cs typeface="Aptos"/>
-              </a:rPr>
-              <a:t>Course introduction  |  1/7</a:t>
-            </a:r>
-          </a:p>
-        </p:txBody>
-      </p:sp>
-      <p:sp>
-        <p:nvSpPr>
-          <p:cNvPr id="101" name="session-a-head"/>
-          <p:cNvSpPr>
-            <a:spLocks noGrp="1"/>
-          </p:cNvSpPr>
-          <p:nvPr/>
-        </p:nvSpPr>
-        <p:spPr>
-          <a:xfrm>
-            <a:off x="723900" y="4648200"/>
-            <a:ext cx="2781300" cy="558800"/>
-          </a:xfrm>
-          <a:prstGeom prst="rect">
-            <a:avLst/>
-          </a:prstGeom>
-          <a:noFill/>
-          <a:ln w="0">
-            <a:noFill/>
-            <a:prstDash val="solid"/>
-          </a:ln>
-        </p:spPr>
-        <p:txBody>
-          <a:bodyPr lIns="0" tIns="0" rIns="0" bIns="0" anchor="t"/>
-          <a:lstStyle/>
-          <a:p>
-            <a:pPr marL="20" indent="-10">
-              <a:lnSpc>
-                <a:spcPct val="108000"/>
-              </a:lnSpc>
-              <a:spcAft>
-                <a:spcPts val="20"/>
-              </a:spcAft>
-              <a:buNone/>
-              <a:defRPr sz="1000" b="1">
-                <a:solidFill>
-                  <a:srgbClr val="0B6E68"/>
-                </a:solidFill>
-                <a:latin typeface="PingFang TC"/>
-                <a:ea typeface="PingFang TC"/>
-                <a:cs typeface="PingFang TC"/>
-              </a:defRPr>
-            </a:pPr>
-            <a:r>
-              <a:rPr lang="en-US" altLang="zh-TW" sz="1000" b="1" dirty="0">
-                <a:solidFill>
-                  <a:srgbClr val="0B6E68"/>
-                </a:solidFill>
-                <a:latin typeface="PingFang TC"/>
-                <a:ea typeface="PingFang TC"/>
-                <a:cs typeface="PingFang TC"/>
-              </a:rPr>
-              <a:t>----------------------</a:t>
-            </a:r>
-          </a:p>
-          <a:p>
-            <a:pPr marL="20" indent="-10">
-              <a:lnSpc>
-                <a:spcPct val="108000"/>
-              </a:lnSpc>
-              <a:spcAft>
-                <a:spcPts val="0"/>
-              </a:spcAft>
-              <a:buNone/>
-              <a:defRPr sz="1600" b="1">
-                <a:solidFill>
-                  <a:srgbClr val="0B6E68"/>
-                </a:solidFill>
-                <a:latin typeface="PingFang TC"/>
-                <a:ea typeface="PingFang TC"/>
-                <a:cs typeface="PingFang TC"/>
-              </a:defRPr>
-            </a:pPr>
-            <a:r>
-              <a:rPr sz="1600" b="1" dirty="0" err="1">
-                <a:solidFill>
-                  <a:srgbClr val="0B6E68"/>
-                </a:solidFill>
-                <a:latin typeface="PingFang TC"/>
-                <a:ea typeface="PingFang TC"/>
-                <a:cs typeface="PingFang TC"/>
-              </a:rPr>
-              <a:t>課程介紹</a:t>
-            </a:r>
-            <a:endParaRPr sz="1600" b="1" dirty="0">
-              <a:solidFill>
-                <a:srgbClr val="0B6E68"/>
-              </a:solidFill>
-              <a:latin typeface="PingFang TC"/>
-              <a:ea typeface="PingFang TC"/>
-              <a:cs typeface="PingFang TC"/>
-            </a:endParaRPr>
-          </a:p>
-        </p:txBody>
-      </p:sp>
-      <p:sp>
-        <p:nvSpPr>
-          <p:cNvPr id="102" name="session-a-bar"/>
-          <p:cNvSpPr>
-            <a:spLocks noGrp="1"/>
-          </p:cNvSpPr>
-          <p:nvPr/>
-        </p:nvSpPr>
-        <p:spPr>
-          <a:xfrm>
-            <a:off x="723900" y="5232400"/>
-            <a:ext cx="2781300" cy="38100"/>
-          </a:xfrm>
-          <a:prstGeom prst="rect">
-            <a:avLst/>
-          </a:prstGeom>
-          <a:solidFill>
-            <a:srgbClr val="0B6E68"/>
-          </a:solidFill>
-          <a:ln w="0">
-            <a:solidFill>
-              <a:srgbClr val="0B6E68"/>
-            </a:solidFill>
-            <a:prstDash val="solid"/>
-          </a:ln>
-        </p:spPr>
-        <p:txBody>
-          <a:bodyPr/>
-          <a:lstStyle/>
-          <a:p>
-            <a:endParaRPr lang="zh-TW" altLang="en-US">
-              <a:solidFill>
-                <a:srgbClr val="0B6E68"/>
-              </a:solidFill>
-            </a:endParaRPr>
-          </a:p>
-        </p:txBody>
-      </p:sp>
-      <p:sp>
-        <p:nvSpPr>
-          <p:cNvPr id="103" name="session-a-list"/>
-          <p:cNvSpPr>
-            <a:spLocks noGrp="1"/>
-          </p:cNvSpPr>
-          <p:nvPr/>
-        </p:nvSpPr>
-        <p:spPr>
-          <a:xfrm>
-            <a:off x="723900" y="5372100"/>
-            <a:ext cx="2781300" cy="863600"/>
-          </a:xfrm>
-          <a:prstGeom prst="rect">
-            <a:avLst/>
-          </a:prstGeom>
-          <a:noFill/>
-          <a:ln w="0">
-            <a:noFill/>
-            <a:prstDash val="solid"/>
-          </a:ln>
-        </p:spPr>
-        <p:txBody>
-          <a:bodyPr lIns="0" tIns="0" rIns="0" bIns="0" anchor="t"/>
-          <a:lstStyle/>
-          <a:p>
-            <a:pPr marL="20" indent="-10">
-              <a:lnSpc>
-                <a:spcPct val="108000"/>
-              </a:lnSpc>
-              <a:spcAft>
-                <a:spcPts val="40"/>
-              </a:spcAft>
-              <a:buNone/>
-              <a:defRPr sz="1200">
-                <a:solidFill>
-                  <a:srgbClr val="17202A"/>
-                </a:solidFill>
-                <a:latin typeface="PingFang TC"/>
-                <a:ea typeface="PingFang TC"/>
-                <a:cs typeface="PingFang TC"/>
-              </a:defRPr>
-            </a:pPr>
-            <a:r>
-              <a:rPr sz="1200">
-                <a:solidFill>
-                  <a:srgbClr val="17202A"/>
-                </a:solidFill>
-                <a:latin typeface="PingFang TC"/>
-                <a:ea typeface="PingFang TC"/>
-                <a:cs typeface="PingFang TC"/>
-              </a:rPr>
-              <a:t>課程目標與三天架構</a:t>
-            </a:r>
-          </a:p>
-          <a:p>
-            <a:pPr marL="20" indent="-10">
-              <a:lnSpc>
-                <a:spcPct val="108000"/>
-              </a:lnSpc>
-              <a:spcAft>
-                <a:spcPts val="40"/>
-              </a:spcAft>
-              <a:buNone/>
-              <a:defRPr sz="1200">
-                <a:solidFill>
-                  <a:srgbClr val="17202A"/>
-                </a:solidFill>
-                <a:latin typeface="PingFang TC"/>
-                <a:ea typeface="PingFang TC"/>
-                <a:cs typeface="PingFang TC"/>
-              </a:defRPr>
-            </a:pPr>
-            <a:r>
-              <a:rPr sz="1200">
-                <a:solidFill>
-                  <a:srgbClr val="17202A"/>
-                </a:solidFill>
-                <a:latin typeface="PingFang TC"/>
-                <a:ea typeface="PingFang TC"/>
-                <a:cs typeface="PingFang TC"/>
-              </a:rPr>
-              <a:t>評分方式與分組原則</a:t>
-            </a:r>
-          </a:p>
-          <a:p>
-            <a:pPr marL="20" indent="-10">
-              <a:lnSpc>
-                <a:spcPct val="108000"/>
-              </a:lnSpc>
-              <a:spcAft>
-                <a:spcPts val="0"/>
-              </a:spcAft>
-              <a:buNone/>
-              <a:defRPr sz="1200">
-                <a:solidFill>
-                  <a:srgbClr val="17202A"/>
-                </a:solidFill>
-                <a:latin typeface="PingFang TC"/>
-                <a:ea typeface="PingFang TC"/>
-                <a:cs typeface="PingFang TC"/>
-              </a:defRPr>
-            </a:pPr>
-            <a:r>
-              <a:rPr sz="1200">
-                <a:solidFill>
-                  <a:srgbClr val="17202A"/>
-                </a:solidFill>
-                <a:latin typeface="PingFang TC"/>
-                <a:ea typeface="PingFang TC"/>
-                <a:cs typeface="PingFang TC"/>
-              </a:rPr>
-              <a:t>Hackathon 與工具規範</a:t>
-            </a:r>
-          </a:p>
-        </p:txBody>
-      </p:sp>
-      <p:sp>
-        <p:nvSpPr>
-          <p:cNvPr id="104" name="session-b-head"/>
-          <p:cNvSpPr>
-            <a:spLocks noGrp="1"/>
-          </p:cNvSpPr>
-          <p:nvPr/>
-        </p:nvSpPr>
-        <p:spPr>
-          <a:xfrm>
-            <a:off x="3759200" y="4648200"/>
-            <a:ext cx="2781300" cy="558800"/>
-          </a:xfrm>
-          <a:prstGeom prst="rect">
-            <a:avLst/>
-          </a:prstGeom>
-          <a:noFill/>
-          <a:ln w="0">
-            <a:noFill/>
-            <a:prstDash val="solid"/>
-          </a:ln>
-        </p:spPr>
-        <p:txBody>
-          <a:bodyPr lIns="0" tIns="0" rIns="0" bIns="0" anchor="t"/>
-          <a:lstStyle/>
-          <a:p>
-            <a:pPr marL="20" indent="-10">
-              <a:lnSpc>
-                <a:spcPct val="108000"/>
-              </a:lnSpc>
-              <a:spcAft>
-                <a:spcPts val="20"/>
-              </a:spcAft>
-              <a:buNone/>
-              <a:defRPr sz="1000" b="1">
-                <a:solidFill>
-                  <a:srgbClr val="3446A8"/>
-                </a:solidFill>
-                <a:latin typeface="PingFang TC"/>
-                <a:ea typeface="PingFang TC"/>
-                <a:cs typeface="PingFang TC"/>
-              </a:defRPr>
-            </a:pPr>
-            <a:r>
-              <a:rPr lang="en-US" sz="1000" b="1" dirty="0">
-                <a:solidFill>
-                  <a:srgbClr val="3446A8"/>
-                </a:solidFill>
-                <a:latin typeface="PingFang TC"/>
-                <a:ea typeface="PingFang TC"/>
-                <a:cs typeface="PingFang TC"/>
-              </a:rPr>
-              <a:t>--------------------------------</a:t>
-            </a:r>
-            <a:endParaRPr sz="1000" b="1" dirty="0">
-              <a:solidFill>
-                <a:srgbClr val="3446A8"/>
-              </a:solidFill>
-              <a:latin typeface="PingFang TC"/>
-              <a:ea typeface="PingFang TC"/>
-              <a:cs typeface="PingFang TC"/>
-            </a:endParaRPr>
-          </a:p>
-          <a:p>
-            <a:pPr marL="20" indent="-10">
-              <a:lnSpc>
-                <a:spcPct val="108000"/>
-              </a:lnSpc>
-              <a:spcAft>
-                <a:spcPts val="0"/>
-              </a:spcAft>
-              <a:buNone/>
-              <a:defRPr sz="1600" b="1">
-                <a:solidFill>
-                  <a:srgbClr val="3446A8"/>
-                </a:solidFill>
-                <a:latin typeface="PingFang TC"/>
-                <a:ea typeface="PingFang TC"/>
-                <a:cs typeface="PingFang TC"/>
-              </a:defRPr>
-            </a:pPr>
-            <a:r>
-              <a:rPr sz="1600" b="1" dirty="0">
-                <a:solidFill>
-                  <a:srgbClr val="3446A8"/>
-                </a:solidFill>
-                <a:latin typeface="PingFang TC"/>
-                <a:ea typeface="PingFang TC"/>
-                <a:cs typeface="PingFang TC"/>
-              </a:rPr>
-              <a:t>AI Agent </a:t>
-            </a:r>
-            <a:r>
-              <a:rPr sz="1600" b="1" dirty="0" err="1">
-                <a:solidFill>
-                  <a:srgbClr val="3446A8"/>
-                </a:solidFill>
-                <a:latin typeface="PingFang TC"/>
-                <a:ea typeface="PingFang TC"/>
-                <a:cs typeface="PingFang TC"/>
-              </a:rPr>
-              <a:t>入門</a:t>
-            </a:r>
-            <a:endParaRPr sz="1600" b="1" dirty="0">
-              <a:solidFill>
-                <a:srgbClr val="3446A8"/>
-              </a:solidFill>
-              <a:latin typeface="PingFang TC"/>
-              <a:ea typeface="PingFang TC"/>
-              <a:cs typeface="PingFang TC"/>
-            </a:endParaRPr>
-          </a:p>
-        </p:txBody>
-      </p:sp>
-      <p:sp>
-        <p:nvSpPr>
-          <p:cNvPr id="105" name="session-b-bar"/>
-          <p:cNvSpPr>
-            <a:spLocks noGrp="1"/>
-          </p:cNvSpPr>
-          <p:nvPr/>
-        </p:nvSpPr>
-        <p:spPr>
-          <a:xfrm>
-            <a:off x="3759200" y="5232400"/>
-            <a:ext cx="2781300" cy="38100"/>
-          </a:xfrm>
-          <a:prstGeom prst="rect">
-            <a:avLst/>
-          </a:prstGeom>
-          <a:solidFill>
-            <a:srgbClr val="3446A8"/>
-          </a:solidFill>
-          <a:ln w="0">
-            <a:solidFill>
-              <a:srgbClr val="3446A8"/>
-            </a:solidFill>
-            <a:prstDash val="solid"/>
-          </a:ln>
-        </p:spPr>
-        <p:txBody>
-          <a:bodyPr/>
-          <a:lstStyle/>
-          <a:p>
-            <a:endParaRPr lang="zh-TW" altLang="en-US">
-              <a:solidFill>
-                <a:srgbClr val="3446A8"/>
-              </a:solidFill>
-            </a:endParaRPr>
-          </a:p>
-        </p:txBody>
-      </p:sp>
-      <p:sp>
-        <p:nvSpPr>
-          <p:cNvPr id="106" name="session-b-list"/>
-          <p:cNvSpPr>
-            <a:spLocks noGrp="1"/>
-          </p:cNvSpPr>
-          <p:nvPr/>
-        </p:nvSpPr>
-        <p:spPr>
-          <a:xfrm>
-            <a:off x="3759200" y="5372100"/>
-            <a:ext cx="2781300" cy="863600"/>
-          </a:xfrm>
-          <a:prstGeom prst="rect">
-            <a:avLst/>
-          </a:prstGeom>
-          <a:noFill/>
-          <a:ln w="0">
-            <a:noFill/>
-            <a:prstDash val="solid"/>
-          </a:ln>
-        </p:spPr>
-        <p:txBody>
-          <a:bodyPr lIns="0" tIns="0" rIns="0" bIns="0" anchor="t"/>
-          <a:lstStyle/>
-          <a:p>
-            <a:pPr marL="20" indent="-10">
-              <a:lnSpc>
-                <a:spcPct val="108000"/>
-              </a:lnSpc>
-              <a:spcAft>
-                <a:spcPts val="40"/>
-              </a:spcAft>
-              <a:buNone/>
-              <a:defRPr sz="1200">
-                <a:solidFill>
-                  <a:srgbClr val="17202A"/>
-                </a:solidFill>
-                <a:latin typeface="PingFang TC"/>
-                <a:ea typeface="PingFang TC"/>
-                <a:cs typeface="PingFang TC"/>
-              </a:defRPr>
-            </a:pPr>
-            <a:r>
-              <a:rPr sz="1200">
-                <a:solidFill>
-                  <a:srgbClr val="17202A"/>
-                </a:solidFill>
-                <a:latin typeface="PingFang TC"/>
-                <a:ea typeface="PingFang TC"/>
-                <a:cs typeface="PingFang TC"/>
-              </a:rPr>
-              <a:t>LLM 與 agent 的差異</a:t>
-            </a:r>
-          </a:p>
-          <a:p>
-            <a:pPr marL="20" indent="-10">
-              <a:lnSpc>
-                <a:spcPct val="108000"/>
-              </a:lnSpc>
-              <a:spcAft>
-                <a:spcPts val="40"/>
-              </a:spcAft>
-              <a:buNone/>
-              <a:defRPr sz="1200">
-                <a:solidFill>
-                  <a:srgbClr val="17202A"/>
-                </a:solidFill>
-                <a:latin typeface="PingFang TC"/>
-                <a:ea typeface="PingFang TC"/>
-                <a:cs typeface="PingFang TC"/>
-              </a:defRPr>
-            </a:pPr>
-            <a:r>
-              <a:rPr sz="1200">
-                <a:solidFill>
-                  <a:srgbClr val="17202A"/>
-                </a:solidFill>
-                <a:latin typeface="PingFang TC"/>
-                <a:ea typeface="PingFang TC"/>
-                <a:cs typeface="PingFang TC"/>
-              </a:rPr>
-              <a:t>Vibe coding 的優點與風險</a:t>
-            </a:r>
-          </a:p>
-          <a:p>
-            <a:pPr marL="20" indent="-10">
-              <a:lnSpc>
-                <a:spcPct val="108000"/>
-              </a:lnSpc>
-              <a:spcAft>
-                <a:spcPts val="0"/>
-              </a:spcAft>
-              <a:buNone/>
-              <a:defRPr sz="1200">
-                <a:solidFill>
-                  <a:srgbClr val="17202A"/>
-                </a:solidFill>
-                <a:latin typeface="PingFang TC"/>
-                <a:ea typeface="PingFang TC"/>
-                <a:cs typeface="PingFang TC"/>
-              </a:defRPr>
-            </a:pPr>
-            <a:r>
-              <a:rPr sz="1200">
-                <a:solidFill>
-                  <a:srgbClr val="17202A"/>
-                </a:solidFill>
-                <a:latin typeface="PingFang TC"/>
-                <a:ea typeface="PingFang TC"/>
-                <a:cs typeface="PingFang TC"/>
-              </a:rPr>
-              <a:t>桌面／CLI 工具比較</a:t>
-            </a:r>
-          </a:p>
-        </p:txBody>
-      </p:sp>
-      <p:cxnSp>
-        <p:nvCxnSpPr>
-          <p:cNvPr id="107" name="session-divider"/>
-          <p:cNvCxnSpPr/>
-          <p:nvPr/>
-        </p:nvCxnSpPr>
-        <p:spPr>
-          <a:xfrm>
-            <a:off x="3632200" y="4699000"/>
-            <a:ext cx="0" cy="1473200"/>
-          </a:xfrm>
-          <a:prstGeom prst="line">
-            <a:avLst/>
-          </a:prstGeom>
-          <a:ln w="9525">
-            <a:solidFill>
-              <a:srgbClr val="E8E8E8"/>
-            </a:solidFill>
-          </a:ln>
-        </p:spPr>
-      </p:cxnSp>
-      <p:sp>
-        <p:nvSpPr>
-          <p:cNvPr id="108" name="diagram-caption"/>
-          <p:cNvSpPr>
-            <a:spLocks noGrp="1"/>
-          </p:cNvSpPr>
-          <p:nvPr/>
-        </p:nvSpPr>
-        <p:spPr>
-          <a:xfrm>
-            <a:off x="7010400" y="1117600"/>
-            <a:ext cx="4381500" cy="254000"/>
-          </a:xfrm>
-          <a:prstGeom prst="rect">
-            <a:avLst/>
-          </a:prstGeom>
-          <a:noFill/>
-          <a:ln w="0">
-            <a:noFill/>
-            <a:prstDash val="solid"/>
-          </a:ln>
-        </p:spPr>
-        <p:txBody>
-          <a:bodyPr lIns="0" tIns="0" rIns="0" bIns="0" anchor="ctr"/>
-          <a:lstStyle/>
-          <a:p>
-            <a:pPr algn="ctr">
-              <a:buNone/>
-              <a:defRPr sz="1100" b="1">
-                <a:solidFill>
-                  <a:srgbClr val="5C6670"/>
-                </a:solidFill>
-                <a:latin typeface="Aptos"/>
-                <a:ea typeface="Aptos"/>
-                <a:cs typeface="Aptos"/>
-              </a:defRPr>
-            </a:pPr>
-            <a:r>
-              <a:rPr sz="1100" b="1">
-                <a:solidFill>
-                  <a:srgbClr val="5C6670"/>
-                </a:solidFill>
-                <a:latin typeface="Aptos"/>
-                <a:ea typeface="Aptos"/>
-                <a:cs typeface="Aptos"/>
-              </a:rPr>
-              <a:t>AGENT WORKFLOW PREVIEW</a:t>
-            </a:r>
+        </p:spPr>
+        <p:txBody>
+          <a:bodyPr wrap="none" rtlCol="0">
+            <a:spAutoFit/>
+          </a:bodyPr>
+          <a:lstStyle/>
+          <a:p>
+            <a:r>
+              <a:rPr kumimoji="1" lang="en" altLang="zh-TW" sz="1200" dirty="0"/>
+              <a:t>https://data-</a:t>
+            </a:r>
+            <a:r>
+              <a:rPr kumimoji="1" lang="en" altLang="zh-TW" sz="1200" dirty="0" err="1"/>
+              <a:t>champions.renew</a:t>
+            </a:r>
+            <a:r>
+              <a:rPr kumimoji="1" lang="en" altLang="zh-TW" sz="1200" dirty="0"/>
+              <a:t>-</a:t>
+            </a:r>
+            <a:r>
+              <a:rPr kumimoji="1" lang="en" altLang="zh-TW" sz="1200" dirty="0" err="1"/>
+              <a:t>platforms.dk</a:t>
+            </a:r>
+            <a:r>
+              <a:rPr kumimoji="1" lang="en" altLang="zh-TW" sz="1200" dirty="0"/>
+              <a:t>/renew-data-champions/informational-guides/research-planning/</a:t>
+            </a:r>
+            <a:r>
+              <a:rPr kumimoji="1" lang="en" altLang="zh-TW" sz="1200" dirty="0" err="1"/>
+              <a:t>rdm</a:t>
+            </a:r>
+            <a:r>
+              <a:rPr kumimoji="1" lang="en" altLang="zh-TW" sz="1200" dirty="0"/>
+              <a:t>-guide/research-workflows</a:t>
+            </a:r>
+            <a:endParaRPr kumimoji="1" lang="zh-TW" altLang="en-US" sz="1200" dirty="0"/>
           </a:p>
         </p:txBody>
       </p:sp>
     </p:spTree>
     <p:extLst>
       <p:ext uri="{BB962C8B-B14F-4D97-AF65-F5344CB8AC3E}">
-        <p14:creationId xmlns:p14="http://schemas.microsoft.com/office/powerpoint/2010/main" val="99501835"/>
+        <p14:creationId xmlns:p14="http://schemas.microsoft.com/office/powerpoint/2010/main" val="2726028967"/>
       </p:ext>
     </p:extLst>
   </p:cSld>
@@ -44333,16 +42940,8 @@
 </file>
 
 <file path=ppt/slides/slide5.xml><?xml version="1.0" encoding="utf-8"?>
-<p:sld xmlns:a="http://schemas.openxmlformats.org/drawingml/2006/main" xmlns:r="http://schemas.openxmlformats.org/officeDocument/2006/relationships" xmlns:p="http://schemas.openxmlformats.org/presentationml/2006/main" showMasterSp="0">
+<p:sld xmlns:a="http://schemas.openxmlformats.org/drawingml/2006/main" xmlns:r="http://schemas.openxmlformats.org/officeDocument/2006/relationships" xmlns:p="http://schemas.openxmlformats.org/presentationml/2006/main">
   <p:cSld>
-    <p:bg>
-      <p:bgPr>
-        <a:solidFill>
-          <a:srgbClr val="FFFFFF"/>
-        </a:solidFill>
-        <a:effectLst/>
-      </p:bgPr>
-    </p:bg>
     <p:spTree>
       <p:nvGrpSpPr>
         <p:cNvPr id="1" name=""/>
@@ -44359,144 +42958,1362 @@
       </p:grpSpPr>
       <p:sp>
         <p:nvSpPr>
-          <p:cNvPr id="2" name="矩形 1">
-            <a:extLst>
-              <a:ext uri="{FF2B5EF4-FFF2-40B4-BE49-F238E27FC236}">
-                <a16:creationId xmlns:a16="http://schemas.microsoft.com/office/drawing/2014/main" id="{C93F0DFF-B702-1B25-822B-E41FF3504258}"/>
-              </a:ext>
-            </a:extLst>
-          </p:cNvPr>
-          <p:cNvSpPr/>
-          <p:nvPr>
-            <p:custDataLst>
-              <p:tags r:id="rId2"/>
-            </p:custDataLst>
-          </p:nvPr>
-        </p:nvSpPr>
-        <p:spPr>
-          <a:xfrm>
-            <a:off x="444693" y="1742703"/>
-            <a:ext cx="2371696" cy="2371696"/>
+          <p:cNvPr id="23" name="eyebrow">
+            <a:extLst>
+              <a:ext uri="{FF2B5EF4-FFF2-40B4-BE49-F238E27FC236}">
+                <a16:creationId xmlns:a16="http://schemas.microsoft.com/office/drawing/2014/main" id="{3471D4FA-4B1A-4E45-8016-35EFF96DF965}"/>
+              </a:ext>
+            </a:extLst>
+          </p:cNvPr>
+          <p:cNvSpPr>
+            <a:spLocks noGrp="1"/>
+          </p:cNvSpPr>
+          <p:nvPr/>
+        </p:nvSpPr>
+        <p:spPr>
+          <a:xfrm>
+            <a:off x="723900" y="552450"/>
+            <a:ext cx="4953000" cy="285750"/>
           </a:xfrm>
           <a:prstGeom prst="rect">
             <a:avLst/>
           </a:prstGeom>
-          <a:blipFill>
-            <a:blip>
-              <a:extLst>
-                <a:ext uri="{96DAC541-7B7A-43D3-8B79-37D633B846F1}">
-                  <asvg:svgBlip xmlns:asvg="http://schemas.microsoft.com/office/drawing/2016/SVG/main" r:embed="rId5"/>
-                </a:ext>
-              </a:extLst>
-            </a:blip>
-            <a:stretch>
-              <a:fillRect/>
-            </a:stretch>
-          </a:blipFill>
-          <a:ln>
+          <a:noFill/>
+          <a:ln w="0">
+            <a:noFill/>
+            <a:prstDash val="solid"/>
+          </a:ln>
+        </p:spPr>
+        <p:txBody>
+          <a:bodyPr lIns="0" tIns="0" rIns="0" bIns="0" anchor="t"/>
+          <a:lstStyle/>
+          <a:p>
+            <a:pPr algn="l">
+              <a:lnSpc>
+                <a:spcPct val="108000"/>
+              </a:lnSpc>
+              <a:buNone/>
+              <a:defRPr sz="1125" b="1">
+                <a:solidFill>
+                  <a:srgbClr val="3446A8"/>
+                </a:solidFill>
+                <a:latin typeface="Aptos"/>
+                <a:ea typeface="Aptos"/>
+                <a:cs typeface="Aptos"/>
+              </a:defRPr>
+            </a:pPr>
+            <a:r>
+              <a:rPr sz="1125" b="1">
+                <a:solidFill>
+                  <a:srgbClr val="3446A8"/>
+                </a:solidFill>
+                <a:latin typeface="Aptos"/>
+                <a:ea typeface="Aptos"/>
+                <a:cs typeface="Aptos"/>
+              </a:rPr>
+              <a:t>COURSE INTRODUCTION</a:t>
+            </a:r>
+          </a:p>
+        </p:txBody>
+      </p:sp>
+      <p:sp>
+        <p:nvSpPr>
+          <p:cNvPr id="2" name="course-name">
+            <a:extLst>
+              <a:ext uri="{FF2B5EF4-FFF2-40B4-BE49-F238E27FC236}">
+                <a16:creationId xmlns:a16="http://schemas.microsoft.com/office/drawing/2014/main" id="{3003EB14-C4EF-4881-B70C-EE8FF8DB13CA}"/>
+              </a:ext>
+            </a:extLst>
+          </p:cNvPr>
+          <p:cNvSpPr>
+            <a:spLocks noGrp="1"/>
+          </p:cNvSpPr>
+          <p:nvPr/>
+        </p:nvSpPr>
+        <p:spPr>
+          <a:xfrm>
+            <a:off x="723900" y="1085850"/>
+            <a:ext cx="5810250" cy="704850"/>
+          </a:xfrm>
+          <a:prstGeom prst="rect">
+            <a:avLst/>
+          </a:prstGeom>
+          <a:noFill/>
+          <a:ln w="0">
+            <a:noFill/>
+            <a:prstDash val="solid"/>
+          </a:ln>
+        </p:spPr>
+        <p:txBody>
+          <a:bodyPr lIns="0" tIns="0" rIns="0" bIns="0" anchor="t"/>
+          <a:lstStyle/>
+          <a:p>
+            <a:pPr algn="l">
+              <a:lnSpc>
+                <a:spcPct val="102000"/>
+              </a:lnSpc>
+              <a:buNone/>
+              <a:defRPr sz="2400" b="1">
+                <a:solidFill>
+                  <a:srgbClr val="17202A"/>
+                </a:solidFill>
+                <a:latin typeface="PingFang TC"/>
+                <a:ea typeface="PingFang TC"/>
+                <a:cs typeface="PingFang TC"/>
+              </a:defRPr>
+            </a:pPr>
+            <a:r>
+              <a:rPr sz="2400" b="1" dirty="0" err="1">
+                <a:solidFill>
+                  <a:srgbClr val="17202A"/>
+                </a:solidFill>
+                <a:latin typeface="PingFang TC"/>
+                <a:ea typeface="PingFang TC"/>
+                <a:cs typeface="PingFang TC"/>
+              </a:rPr>
+              <a:t>醫療大數據：生醫資料庫與人工智慧應用</a:t>
+            </a:r>
+            <a:endParaRPr sz="2400" b="1" dirty="0">
+              <a:solidFill>
+                <a:srgbClr val="17202A"/>
+              </a:solidFill>
+              <a:latin typeface="PingFang TC"/>
+              <a:ea typeface="PingFang TC"/>
+              <a:cs typeface="PingFang TC"/>
+            </a:endParaRPr>
+          </a:p>
+        </p:txBody>
+      </p:sp>
+      <p:sp>
+        <p:nvSpPr>
+          <p:cNvPr id="3" name="subtitle">
+            <a:extLst>
+              <a:ext uri="{FF2B5EF4-FFF2-40B4-BE49-F238E27FC236}">
+                <a16:creationId xmlns:a16="http://schemas.microsoft.com/office/drawing/2014/main" id="{97A6B0CB-286E-4605-9F34-3D80DBF43A75}"/>
+              </a:ext>
+            </a:extLst>
+          </p:cNvPr>
+          <p:cNvSpPr>
+            <a:spLocks noGrp="1"/>
+          </p:cNvSpPr>
+          <p:nvPr/>
+        </p:nvSpPr>
+        <p:spPr>
+          <a:xfrm>
+            <a:off x="723900" y="1943100"/>
+            <a:ext cx="5429250" cy="457200"/>
+          </a:xfrm>
+          <a:prstGeom prst="rect">
+            <a:avLst/>
+          </a:prstGeom>
+          <a:noFill/>
+          <a:ln w="0">
+            <a:noFill/>
+            <a:prstDash val="solid"/>
+          </a:ln>
+        </p:spPr>
+        <p:txBody>
+          <a:bodyPr lIns="0" tIns="0" rIns="0" bIns="0" anchor="t"/>
+          <a:lstStyle/>
+          <a:p>
+            <a:pPr algn="l">
+              <a:lnSpc>
+                <a:spcPct val="108000"/>
+              </a:lnSpc>
+              <a:buNone/>
+              <a:defRPr sz="1800" b="1">
+                <a:solidFill>
+                  <a:srgbClr val="3446A8"/>
+                </a:solidFill>
+                <a:latin typeface="Aptos"/>
+                <a:ea typeface="Aptos"/>
+                <a:cs typeface="Aptos"/>
+              </a:defRPr>
+            </a:pPr>
+            <a:r>
+              <a:rPr sz="1800" b="1">
+                <a:solidFill>
+                  <a:srgbClr val="3446A8"/>
+                </a:solidFill>
+                <a:latin typeface="Aptos"/>
+                <a:ea typeface="Aptos"/>
+                <a:cs typeface="Aptos"/>
+              </a:rPr>
+              <a:t>AI agents for biomedical research workflows</a:t>
+            </a:r>
+          </a:p>
+        </p:txBody>
+      </p:sp>
+      <p:sp>
+        <p:nvSpPr>
+          <p:cNvPr id="4" name="opening-bullets">
+            <a:extLst>
+              <a:ext uri="{FF2B5EF4-FFF2-40B4-BE49-F238E27FC236}">
+                <a16:creationId xmlns:a16="http://schemas.microsoft.com/office/drawing/2014/main" id="{57C16B68-B9D6-4A44-A9C7-F401AD793A38}"/>
+              </a:ext>
+            </a:extLst>
+          </p:cNvPr>
+          <p:cNvSpPr>
+            <a:spLocks noGrp="1"/>
+          </p:cNvSpPr>
+          <p:nvPr/>
+        </p:nvSpPr>
+        <p:spPr>
+          <a:xfrm>
+            <a:off x="723900" y="2895600"/>
+            <a:ext cx="5429250" cy="1619250"/>
+          </a:xfrm>
+          <a:prstGeom prst="rect">
+            <a:avLst/>
+          </a:prstGeom>
+          <a:noFill/>
+          <a:ln w="0">
+            <a:noFill/>
+            <a:prstDash val="solid"/>
+          </a:ln>
+        </p:spPr>
+        <p:txBody>
+          <a:bodyPr lIns="0" tIns="0" rIns="0" bIns="0"/>
+          <a:lstStyle/>
+          <a:p>
+            <a:pPr marL="24" indent="-12">
+              <a:lnSpc>
+                <a:spcPct val="108000"/>
+              </a:lnSpc>
+              <a:spcAft>
+                <a:spcPts val="14"/>
+              </a:spcAft>
+              <a:buNone/>
+              <a:defRPr sz="1800">
+                <a:solidFill>
+                  <a:srgbClr val="17202A"/>
+                </a:solidFill>
+                <a:latin typeface="PingFang TC"/>
+                <a:ea typeface="PingFang TC"/>
+                <a:cs typeface="PingFang TC"/>
+              </a:defRPr>
+            </a:pPr>
+            <a:r>
+              <a:rPr sz="1800">
+                <a:solidFill>
+                  <a:srgbClr val="17202A"/>
+                </a:solidFill>
+                <a:latin typeface="PingFang TC"/>
+                <a:ea typeface="PingFang TC"/>
+                <a:cs typeface="PingFang TC"/>
+              </a:rPr>
+              <a:t>我們關心的不只是得到答案</a:t>
+            </a:r>
+          </a:p>
+          <a:p>
+            <a:pPr marL="24" indent="-12">
+              <a:lnSpc>
+                <a:spcPct val="108000"/>
+              </a:lnSpc>
+              <a:spcAft>
+                <a:spcPts val="14"/>
+              </a:spcAft>
+              <a:buNone/>
+              <a:defRPr sz="1800">
+                <a:solidFill>
+                  <a:srgbClr val="17202A"/>
+                </a:solidFill>
+                <a:latin typeface="PingFang TC"/>
+                <a:ea typeface="PingFang TC"/>
+                <a:cs typeface="PingFang TC"/>
+              </a:defRPr>
+            </a:pPr>
+            <a:r>
+              <a:rPr sz="1800">
+                <a:solidFill>
+                  <a:srgbClr val="17202A"/>
+                </a:solidFill>
+                <a:latin typeface="PingFang TC"/>
+                <a:ea typeface="PingFang TC"/>
+                <a:cs typeface="PingFang TC"/>
+              </a:rPr>
+              <a:t>而是答案如何被產生、檢查、重跑</a:t>
+            </a:r>
+          </a:p>
+          <a:p>
+            <a:pPr marL="24" indent="-12">
+              <a:lnSpc>
+                <a:spcPct val="108000"/>
+              </a:lnSpc>
+              <a:spcAft>
+                <a:spcPts val="14"/>
+              </a:spcAft>
+              <a:buNone/>
+              <a:defRPr sz="1800">
+                <a:solidFill>
+                  <a:srgbClr val="17202A"/>
+                </a:solidFill>
+                <a:latin typeface="PingFang TC"/>
+                <a:ea typeface="PingFang TC"/>
+                <a:cs typeface="PingFang TC"/>
+              </a:defRPr>
+            </a:pPr>
+            <a:r>
+              <a:rPr sz="1800">
+                <a:solidFill>
+                  <a:srgbClr val="17202A"/>
+                </a:solidFill>
+                <a:latin typeface="PingFang TC"/>
+                <a:ea typeface="PingFang TC"/>
+                <a:cs typeface="PingFang TC"/>
+              </a:rPr>
+              <a:t>三天後，你要能設計一個可信的 biomedical AI agent workflow</a:t>
+            </a:r>
+          </a:p>
+        </p:txBody>
+      </p:sp>
+      <p:sp>
+        <p:nvSpPr>
+          <p:cNvPr id="5" name="node-question">
+            <a:extLst>
+              <a:ext uri="{FF2B5EF4-FFF2-40B4-BE49-F238E27FC236}">
+                <a16:creationId xmlns:a16="http://schemas.microsoft.com/office/drawing/2014/main" id="{53367A2D-4FED-48D0-995A-FDE87EC6C00F}"/>
+              </a:ext>
+            </a:extLst>
+          </p:cNvPr>
+          <p:cNvSpPr>
+            <a:spLocks noGrp="1"/>
+          </p:cNvSpPr>
+          <p:nvPr/>
+        </p:nvSpPr>
+        <p:spPr>
+          <a:xfrm>
+            <a:off x="7010400" y="1466850"/>
+            <a:ext cx="1428750" cy="647700"/>
+          </a:xfrm>
+          <a:prstGeom prst="roundRect">
+            <a:avLst>
+              <a:gd name="adj" fmla="val 11765"/>
+            </a:avLst>
+          </a:prstGeom>
+          <a:solidFill>
+            <a:srgbClr val="FFFFFF"/>
+          </a:solidFill>
+          <a:ln w="13335">
             <a:solidFill>
-              <a:srgbClr val="FFFFFF"/>
+              <a:srgbClr val="0B6E68"/>
             </a:solidFill>
-          </a:ln>
-        </p:spPr>
-        <p:style>
-          <a:lnRef idx="2">
-            <a:schemeClr val="accent1">
-              <a:shade val="15000"/>
-            </a:schemeClr>
-          </a:lnRef>
-          <a:fillRef idx="1">
-            <a:schemeClr val="accent1"/>
-          </a:fillRef>
-          <a:effectRef idx="0">
-            <a:schemeClr val="accent1"/>
-          </a:effectRef>
-          <a:fontRef idx="minor">
-            <a:schemeClr val="lt1"/>
-          </a:fontRef>
-        </p:style>
-        <p:txBody>
-          <a:bodyPr rtlCol="0" anchor="ctr"/>
-          <a:lstStyle/>
-          <a:p>
-            <a:pPr algn="ctr"/>
-            <a:endParaRPr kumimoji="1" lang="zh-TW" altLang="en-US"/>
-          </a:p>
-        </p:txBody>
-      </p:sp>
-      <p:sp>
-        <p:nvSpPr>
-          <p:cNvPr id="3" name="矩形 2">
-            <a:extLst>
-              <a:ext uri="{FF2B5EF4-FFF2-40B4-BE49-F238E27FC236}">
-                <a16:creationId xmlns:a16="http://schemas.microsoft.com/office/drawing/2014/main" id="{4B1685F8-7177-DD73-86A6-CB67862770C7}"/>
-              </a:ext>
-            </a:extLst>
-          </p:cNvPr>
-          <p:cNvSpPr/>
-          <p:nvPr>
-            <p:custDataLst>
-              <p:tags r:id="rId3"/>
-            </p:custDataLst>
-          </p:nvPr>
-        </p:nvSpPr>
-        <p:spPr>
-          <a:xfrm>
-            <a:off x="3112851" y="1000897"/>
-            <a:ext cx="8486226" cy="3855308"/>
+            <a:prstDash val="solid"/>
+          </a:ln>
+        </p:spPr>
+        <p:txBody>
+          <a:bodyPr lIns="76200" tIns="57150" rIns="76200" bIns="57150" anchor="ctr"/>
+          <a:lstStyle/>
+          <a:p>
+            <a:pPr algn="ctr">
+              <a:defRPr sz="1275" b="1">
+                <a:solidFill>
+                  <a:srgbClr val="0B6E68"/>
+                </a:solidFill>
+                <a:latin typeface="PingFang TC"/>
+                <a:ea typeface="PingFang TC"/>
+                <a:cs typeface="PingFang TC"/>
+              </a:defRPr>
+            </a:pPr>
+            <a:r>
+              <a:rPr sz="1275" b="1">
+                <a:solidFill>
+                  <a:srgbClr val="0B6E68"/>
+                </a:solidFill>
+                <a:latin typeface="PingFang TC"/>
+                <a:ea typeface="PingFang TC"/>
+                <a:cs typeface="PingFang TC"/>
+              </a:rPr>
+              <a:t>Research</a:t>
+            </a:r>
+          </a:p>
+          <a:p>
+            <a:pPr algn="ctr">
+              <a:defRPr sz="1275" b="1">
+                <a:solidFill>
+                  <a:srgbClr val="0B6E68"/>
+                </a:solidFill>
+                <a:latin typeface="PingFang TC"/>
+                <a:ea typeface="PingFang TC"/>
+                <a:cs typeface="PingFang TC"/>
+              </a:defRPr>
+            </a:pPr>
+            <a:r>
+              <a:rPr sz="1275" b="1">
+                <a:solidFill>
+                  <a:srgbClr val="0B6E68"/>
+                </a:solidFill>
+                <a:latin typeface="PingFang TC"/>
+                <a:ea typeface="PingFang TC"/>
+                <a:cs typeface="PingFang TC"/>
+              </a:rPr>
+              <a:t>question</a:t>
+            </a:r>
+          </a:p>
+        </p:txBody>
+      </p:sp>
+      <p:sp>
+        <p:nvSpPr>
+          <p:cNvPr id="6" name="node-agent">
+            <a:extLst>
+              <a:ext uri="{FF2B5EF4-FFF2-40B4-BE49-F238E27FC236}">
+                <a16:creationId xmlns:a16="http://schemas.microsoft.com/office/drawing/2014/main" id="{BC81E8A5-103F-4937-9583-B8EFA485A2D1}"/>
+              </a:ext>
+            </a:extLst>
+          </p:cNvPr>
+          <p:cNvSpPr>
+            <a:spLocks noGrp="1"/>
+          </p:cNvSpPr>
+          <p:nvPr/>
+        </p:nvSpPr>
+        <p:spPr>
+          <a:xfrm>
+            <a:off x="9372600" y="1466850"/>
+            <a:ext cx="1619250" cy="647700"/>
+          </a:xfrm>
+          <a:prstGeom prst="roundRect">
+            <a:avLst>
+              <a:gd name="adj" fmla="val 11765"/>
+            </a:avLst>
+          </a:prstGeom>
+          <a:solidFill>
+            <a:srgbClr val="FFFFFF"/>
+          </a:solidFill>
+          <a:ln w="13335">
+            <a:solidFill>
+              <a:srgbClr val="3446A8"/>
+            </a:solidFill>
+            <a:prstDash val="solid"/>
+          </a:ln>
+        </p:spPr>
+        <p:txBody>
+          <a:bodyPr lIns="76200" tIns="57150" rIns="76200" bIns="57150" anchor="ctr"/>
+          <a:lstStyle/>
+          <a:p>
+            <a:pPr algn="ctr">
+              <a:defRPr sz="1275" b="1">
+                <a:solidFill>
+                  <a:srgbClr val="3446A8"/>
+                </a:solidFill>
+                <a:latin typeface="PingFang TC"/>
+                <a:ea typeface="PingFang TC"/>
+                <a:cs typeface="PingFang TC"/>
+              </a:defRPr>
+            </a:pPr>
+            <a:r>
+              <a:rPr sz="1275" b="1">
+                <a:solidFill>
+                  <a:srgbClr val="3446A8"/>
+                </a:solidFill>
+                <a:latin typeface="PingFang TC"/>
+                <a:ea typeface="PingFang TC"/>
+                <a:cs typeface="PingFang TC"/>
+              </a:rPr>
+              <a:t>AI agent</a:t>
+            </a:r>
+          </a:p>
+          <a:p>
+            <a:pPr algn="ctr">
+              <a:defRPr sz="1275" b="1">
+                <a:solidFill>
+                  <a:srgbClr val="3446A8"/>
+                </a:solidFill>
+                <a:latin typeface="PingFang TC"/>
+                <a:ea typeface="PingFang TC"/>
+                <a:cs typeface="PingFang TC"/>
+              </a:defRPr>
+            </a:pPr>
+            <a:r>
+              <a:rPr sz="1275" b="1">
+                <a:solidFill>
+                  <a:srgbClr val="3446A8"/>
+                </a:solidFill>
+                <a:latin typeface="PingFang TC"/>
+                <a:ea typeface="PingFang TC"/>
+                <a:cs typeface="PingFang TC"/>
+              </a:rPr>
+              <a:t>workflow</a:t>
+            </a:r>
+          </a:p>
+        </p:txBody>
+      </p:sp>
+      <p:sp>
+        <p:nvSpPr>
+          <p:cNvPr id="7" name="node-paper">
+            <a:extLst>
+              <a:ext uri="{FF2B5EF4-FFF2-40B4-BE49-F238E27FC236}">
+                <a16:creationId xmlns:a16="http://schemas.microsoft.com/office/drawing/2014/main" id="{44A3704A-C796-41E4-95AE-EE705F765121}"/>
+              </a:ext>
+            </a:extLst>
+          </p:cNvPr>
+          <p:cNvSpPr>
+            <a:spLocks noGrp="1"/>
+          </p:cNvSpPr>
+          <p:nvPr/>
+        </p:nvSpPr>
+        <p:spPr>
+          <a:xfrm>
+            <a:off x="7029450" y="3200400"/>
+            <a:ext cx="1104900" cy="476250"/>
+          </a:xfrm>
+          <a:prstGeom prst="roundRect">
+            <a:avLst>
+              <a:gd name="adj" fmla="val 16000"/>
+            </a:avLst>
+          </a:prstGeom>
+          <a:solidFill>
+            <a:srgbClr val="FFFFFF"/>
+          </a:solidFill>
+          <a:ln w="13335">
+            <a:solidFill>
+              <a:srgbClr val="5C6670"/>
+            </a:solidFill>
+            <a:prstDash val="solid"/>
+          </a:ln>
+        </p:spPr>
+        <p:txBody>
+          <a:bodyPr lIns="76200" tIns="57150" rIns="76200" bIns="57150" anchor="ctr"/>
+          <a:lstStyle/>
+          <a:p>
+            <a:pPr algn="ctr">
+              <a:defRPr sz="1200" b="1">
+                <a:solidFill>
+                  <a:srgbClr val="5C6670"/>
+                </a:solidFill>
+                <a:latin typeface="PingFang TC"/>
+                <a:ea typeface="PingFang TC"/>
+                <a:cs typeface="PingFang TC"/>
+              </a:defRPr>
+            </a:pPr>
+            <a:r>
+              <a:rPr sz="1200" b="1">
+                <a:solidFill>
+                  <a:srgbClr val="5C6670"/>
+                </a:solidFill>
+                <a:latin typeface="PingFang TC"/>
+                <a:ea typeface="PingFang TC"/>
+                <a:cs typeface="PingFang TC"/>
+              </a:rPr>
+              <a:t>Paper</a:t>
+            </a:r>
+          </a:p>
+        </p:txBody>
+      </p:sp>
+      <p:sp>
+        <p:nvSpPr>
+          <p:cNvPr id="8" name="node-data">
+            <a:extLst>
+              <a:ext uri="{FF2B5EF4-FFF2-40B4-BE49-F238E27FC236}">
+                <a16:creationId xmlns:a16="http://schemas.microsoft.com/office/drawing/2014/main" id="{B3FF219D-1BCF-48DB-82F2-940CDF773C1E}"/>
+              </a:ext>
+            </a:extLst>
+          </p:cNvPr>
+          <p:cNvSpPr>
+            <a:spLocks noGrp="1"/>
+          </p:cNvSpPr>
+          <p:nvPr/>
+        </p:nvSpPr>
+        <p:spPr>
+          <a:xfrm>
+            <a:off x="8572500" y="3200400"/>
+            <a:ext cx="1257300" cy="476250"/>
+          </a:xfrm>
+          <a:prstGeom prst="roundRect">
+            <a:avLst>
+              <a:gd name="adj" fmla="val 16000"/>
+            </a:avLst>
+          </a:prstGeom>
+          <a:solidFill>
+            <a:srgbClr val="FFFFFF"/>
+          </a:solidFill>
+          <a:ln w="13335">
+            <a:solidFill>
+              <a:srgbClr val="5C6670"/>
+            </a:solidFill>
+            <a:prstDash val="solid"/>
+          </a:ln>
+        </p:spPr>
+        <p:txBody>
+          <a:bodyPr lIns="76200" tIns="57150" rIns="76200" bIns="57150" anchor="ctr"/>
+          <a:lstStyle/>
+          <a:p>
+            <a:pPr algn="ctr">
+              <a:defRPr sz="1200" b="1">
+                <a:solidFill>
+                  <a:srgbClr val="5C6670"/>
+                </a:solidFill>
+                <a:latin typeface="PingFang TC"/>
+                <a:ea typeface="PingFang TC"/>
+                <a:cs typeface="PingFang TC"/>
+              </a:defRPr>
+            </a:pPr>
+            <a:r>
+              <a:rPr sz="1200" b="1">
+                <a:solidFill>
+                  <a:srgbClr val="5C6670"/>
+                </a:solidFill>
+                <a:latin typeface="PingFang TC"/>
+                <a:ea typeface="PingFang TC"/>
+                <a:cs typeface="PingFang TC"/>
+              </a:rPr>
+              <a:t>Dataset</a:t>
+            </a:r>
+          </a:p>
+        </p:txBody>
+      </p:sp>
+      <p:sp>
+        <p:nvSpPr>
+          <p:cNvPr id="9" name="node-code">
+            <a:extLst>
+              <a:ext uri="{FF2B5EF4-FFF2-40B4-BE49-F238E27FC236}">
+                <a16:creationId xmlns:a16="http://schemas.microsoft.com/office/drawing/2014/main" id="{01E0672E-5AF2-4D24-99B3-2D9C1663D501}"/>
+              </a:ext>
+            </a:extLst>
+          </p:cNvPr>
+          <p:cNvSpPr>
+            <a:spLocks noGrp="1"/>
+          </p:cNvSpPr>
+          <p:nvPr/>
+        </p:nvSpPr>
+        <p:spPr>
+          <a:xfrm>
+            <a:off x="10267950" y="3200400"/>
+            <a:ext cx="1066800" cy="476250"/>
+          </a:xfrm>
+          <a:prstGeom prst="roundRect">
+            <a:avLst>
+              <a:gd name="adj" fmla="val 16000"/>
+            </a:avLst>
+          </a:prstGeom>
+          <a:solidFill>
+            <a:srgbClr val="FFFFFF"/>
+          </a:solidFill>
+          <a:ln w="13335">
+            <a:solidFill>
+              <a:srgbClr val="5C6670"/>
+            </a:solidFill>
+            <a:prstDash val="solid"/>
+          </a:ln>
+        </p:spPr>
+        <p:txBody>
+          <a:bodyPr lIns="76200" tIns="57150" rIns="76200" bIns="57150" anchor="ctr"/>
+          <a:lstStyle/>
+          <a:p>
+            <a:pPr algn="ctr">
+              <a:defRPr sz="1200" b="1">
+                <a:solidFill>
+                  <a:srgbClr val="5C6670"/>
+                </a:solidFill>
+                <a:latin typeface="PingFang TC"/>
+                <a:ea typeface="PingFang TC"/>
+                <a:cs typeface="PingFang TC"/>
+              </a:defRPr>
+            </a:pPr>
+            <a:r>
+              <a:rPr sz="1200" b="1">
+                <a:solidFill>
+                  <a:srgbClr val="5C6670"/>
+                </a:solidFill>
+                <a:latin typeface="PingFang TC"/>
+                <a:ea typeface="PingFang TC"/>
+                <a:cs typeface="PingFang TC"/>
+              </a:rPr>
+              <a:t>Code</a:t>
+            </a:r>
+          </a:p>
+        </p:txBody>
+      </p:sp>
+      <p:sp>
+        <p:nvSpPr>
+          <p:cNvPr id="10" name="node-output">
+            <a:extLst>
+              <a:ext uri="{FF2B5EF4-FFF2-40B4-BE49-F238E27FC236}">
+                <a16:creationId xmlns:a16="http://schemas.microsoft.com/office/drawing/2014/main" id="{12FEA1D9-D3CD-4E9E-A68F-308C30B9A395}"/>
+              </a:ext>
+            </a:extLst>
+          </p:cNvPr>
+          <p:cNvSpPr>
+            <a:spLocks noGrp="1"/>
+          </p:cNvSpPr>
+          <p:nvPr/>
+        </p:nvSpPr>
+        <p:spPr>
+          <a:xfrm>
+            <a:off x="8334375" y="4648200"/>
+            <a:ext cx="2000250" cy="647700"/>
+          </a:xfrm>
+          <a:prstGeom prst="roundRect">
+            <a:avLst>
+              <a:gd name="adj" fmla="val 11765"/>
+            </a:avLst>
+          </a:prstGeom>
+          <a:solidFill>
+            <a:srgbClr val="FFFFFF"/>
+          </a:solidFill>
+          <a:ln w="13335">
+            <a:solidFill>
+              <a:srgbClr val="0B6E68"/>
+            </a:solidFill>
+            <a:prstDash val="solid"/>
+          </a:ln>
+        </p:spPr>
+        <p:txBody>
+          <a:bodyPr lIns="76200" tIns="57150" rIns="76200" bIns="57150" anchor="ctr"/>
+          <a:lstStyle/>
+          <a:p>
+            <a:pPr algn="ctr">
+              <a:defRPr sz="1200" b="1">
+                <a:solidFill>
+                  <a:srgbClr val="0B6E68"/>
+                </a:solidFill>
+                <a:latin typeface="PingFang TC"/>
+                <a:ea typeface="PingFang TC"/>
+                <a:cs typeface="PingFang TC"/>
+              </a:defRPr>
+            </a:pPr>
+            <a:r>
+              <a:rPr sz="1200" b="1">
+                <a:solidFill>
+                  <a:srgbClr val="0B6E68"/>
+                </a:solidFill>
+                <a:latin typeface="PingFang TC"/>
+                <a:ea typeface="PingFang TC"/>
+                <a:cs typeface="PingFang TC"/>
+              </a:rPr>
+              <a:t>Evidence-backed</a:t>
+            </a:r>
+          </a:p>
+          <a:p>
+            <a:pPr algn="ctr">
+              <a:defRPr sz="1200" b="1">
+                <a:solidFill>
+                  <a:srgbClr val="0B6E68"/>
+                </a:solidFill>
+                <a:latin typeface="PingFang TC"/>
+                <a:ea typeface="PingFang TC"/>
+                <a:cs typeface="PingFang TC"/>
+              </a:defRPr>
+            </a:pPr>
+            <a:r>
+              <a:rPr sz="1200" b="1">
+                <a:solidFill>
+                  <a:srgbClr val="0B6E68"/>
+                </a:solidFill>
+                <a:latin typeface="PingFang TC"/>
+                <a:ea typeface="PingFang TC"/>
+                <a:cs typeface="PingFang TC"/>
+              </a:rPr>
+              <a:t>output</a:t>
+            </a:r>
+          </a:p>
+        </p:txBody>
+      </p:sp>
+      <p:sp>
+        <p:nvSpPr>
+          <p:cNvPr id="11" name="line-question-agent">
+            <a:extLst>
+              <a:ext uri="{FF2B5EF4-FFF2-40B4-BE49-F238E27FC236}">
+                <a16:creationId xmlns:a16="http://schemas.microsoft.com/office/drawing/2014/main" id="{2EAC8E01-3312-4737-866F-6C84FC20720F}"/>
+              </a:ext>
+            </a:extLst>
+          </p:cNvPr>
+          <p:cNvSpPr>
+            <a:spLocks noGrp="1"/>
+          </p:cNvSpPr>
+          <p:nvPr/>
+        </p:nvSpPr>
+        <p:spPr>
+          <a:xfrm>
+            <a:off x="8439150" y="1790700"/>
+            <a:ext cx="933450" cy="0"/>
+          </a:xfrm>
+          <a:prstGeom prst="line">
+            <a:avLst/>
+          </a:prstGeom>
+          <a:noFill/>
+          <a:ln w="17145">
+            <a:solidFill>
+              <a:srgbClr val="3446A8"/>
+            </a:solidFill>
+            <a:prstDash val="solid"/>
+          </a:ln>
+        </p:spPr>
+        <p:txBody>
+          <a:bodyPr/>
+          <a:lstStyle/>
+          <a:p>
+            <a:endParaRPr lang="zh-TW" altLang="en-US"/>
+          </a:p>
+        </p:txBody>
+      </p:sp>
+      <p:sp>
+        <p:nvSpPr>
+          <p:cNvPr id="12" name="line-agent-down">
+            <a:extLst>
+              <a:ext uri="{FF2B5EF4-FFF2-40B4-BE49-F238E27FC236}">
+                <a16:creationId xmlns:a16="http://schemas.microsoft.com/office/drawing/2014/main" id="{DA755D8D-2F13-4836-8703-337FE8910FF4}"/>
+              </a:ext>
+            </a:extLst>
+          </p:cNvPr>
+          <p:cNvSpPr>
+            <a:spLocks noGrp="1"/>
+          </p:cNvSpPr>
+          <p:nvPr/>
+        </p:nvSpPr>
+        <p:spPr>
+          <a:xfrm>
+            <a:off x="10182225" y="2114550"/>
+            <a:ext cx="0" cy="742950"/>
+          </a:xfrm>
+          <a:prstGeom prst="line">
+            <a:avLst/>
+          </a:prstGeom>
+          <a:noFill/>
+          <a:ln w="14288">
+            <a:solidFill>
+              <a:srgbClr val="3446A8"/>
+            </a:solidFill>
+            <a:prstDash val="solid"/>
+          </a:ln>
+        </p:spPr>
+        <p:txBody>
+          <a:bodyPr/>
+          <a:lstStyle/>
+          <a:p>
+            <a:endParaRPr lang="zh-TW" altLang="en-US"/>
+          </a:p>
+        </p:txBody>
+      </p:sp>
+      <p:sp>
+        <p:nvSpPr>
+          <p:cNvPr id="13" name="line-agent-bus">
+            <a:extLst>
+              <a:ext uri="{FF2B5EF4-FFF2-40B4-BE49-F238E27FC236}">
+                <a16:creationId xmlns:a16="http://schemas.microsoft.com/office/drawing/2014/main" id="{66648085-D33A-46CA-84CD-A43ACAC482E2}"/>
+              </a:ext>
+            </a:extLst>
+          </p:cNvPr>
+          <p:cNvSpPr>
+            <a:spLocks noGrp="1"/>
+          </p:cNvSpPr>
+          <p:nvPr/>
+        </p:nvSpPr>
+        <p:spPr>
+          <a:xfrm>
+            <a:off x="7581900" y="2857500"/>
+            <a:ext cx="3219450" cy="0"/>
+          </a:xfrm>
+          <a:prstGeom prst="line">
+            <a:avLst/>
+          </a:prstGeom>
+          <a:noFill/>
+          <a:ln w="14288">
+            <a:solidFill>
+              <a:srgbClr val="3446A8"/>
+            </a:solidFill>
+            <a:prstDash val="solid"/>
+          </a:ln>
+        </p:spPr>
+        <p:txBody>
+          <a:bodyPr/>
+          <a:lstStyle/>
+          <a:p>
+            <a:endParaRPr lang="zh-TW" altLang="en-US"/>
+          </a:p>
+        </p:txBody>
+      </p:sp>
+      <p:sp>
+        <p:nvSpPr>
+          <p:cNvPr id="14" name="line-paper-in">
+            <a:extLst>
+              <a:ext uri="{FF2B5EF4-FFF2-40B4-BE49-F238E27FC236}">
+                <a16:creationId xmlns:a16="http://schemas.microsoft.com/office/drawing/2014/main" id="{EAF1B416-AAD8-45FF-AED1-AB516E01D907}"/>
+              </a:ext>
+            </a:extLst>
+          </p:cNvPr>
+          <p:cNvSpPr>
+            <a:spLocks noGrp="1"/>
+          </p:cNvSpPr>
+          <p:nvPr/>
+        </p:nvSpPr>
+        <p:spPr>
+          <a:xfrm>
+            <a:off x="7581900" y="2857500"/>
+            <a:ext cx="0" cy="342900"/>
+          </a:xfrm>
+          <a:prstGeom prst="line">
+            <a:avLst/>
+          </a:prstGeom>
+          <a:noFill/>
+          <a:ln w="14288">
+            <a:solidFill>
+              <a:srgbClr val="3446A8"/>
+            </a:solidFill>
+            <a:prstDash val="solid"/>
+          </a:ln>
+        </p:spPr>
+        <p:txBody>
+          <a:bodyPr/>
+          <a:lstStyle/>
+          <a:p>
+            <a:endParaRPr lang="zh-TW" altLang="en-US"/>
+          </a:p>
+        </p:txBody>
+      </p:sp>
+      <p:sp>
+        <p:nvSpPr>
+          <p:cNvPr id="15" name="line-data-in">
+            <a:extLst>
+              <a:ext uri="{FF2B5EF4-FFF2-40B4-BE49-F238E27FC236}">
+                <a16:creationId xmlns:a16="http://schemas.microsoft.com/office/drawing/2014/main" id="{FD7E2F3B-9CA5-4E42-81D3-3D8DBA58A815}"/>
+              </a:ext>
+            </a:extLst>
+          </p:cNvPr>
+          <p:cNvSpPr>
+            <a:spLocks noGrp="1"/>
+          </p:cNvSpPr>
+          <p:nvPr/>
+        </p:nvSpPr>
+        <p:spPr>
+          <a:xfrm>
+            <a:off x="9201150" y="2857500"/>
+            <a:ext cx="0" cy="342900"/>
+          </a:xfrm>
+          <a:prstGeom prst="line">
+            <a:avLst/>
+          </a:prstGeom>
+          <a:noFill/>
+          <a:ln w="14288">
+            <a:solidFill>
+              <a:srgbClr val="3446A8"/>
+            </a:solidFill>
+            <a:prstDash val="solid"/>
+          </a:ln>
+        </p:spPr>
+        <p:txBody>
+          <a:bodyPr/>
+          <a:lstStyle/>
+          <a:p>
+            <a:endParaRPr lang="zh-TW" altLang="en-US"/>
+          </a:p>
+        </p:txBody>
+      </p:sp>
+      <p:sp>
+        <p:nvSpPr>
+          <p:cNvPr id="16" name="line-code-in">
+            <a:extLst>
+              <a:ext uri="{FF2B5EF4-FFF2-40B4-BE49-F238E27FC236}">
+                <a16:creationId xmlns:a16="http://schemas.microsoft.com/office/drawing/2014/main" id="{52DAA266-E4F5-4E3B-8807-213EBBB4ADB2}"/>
+              </a:ext>
+            </a:extLst>
+          </p:cNvPr>
+          <p:cNvSpPr>
+            <a:spLocks noGrp="1"/>
+          </p:cNvSpPr>
+          <p:nvPr/>
+        </p:nvSpPr>
+        <p:spPr>
+          <a:xfrm>
+            <a:off x="10801350" y="2857500"/>
+            <a:ext cx="0" cy="342900"/>
+          </a:xfrm>
+          <a:prstGeom prst="line">
+            <a:avLst/>
+          </a:prstGeom>
+          <a:noFill/>
+          <a:ln w="14288">
+            <a:solidFill>
+              <a:srgbClr val="3446A8"/>
+            </a:solidFill>
+            <a:prstDash val="solid"/>
+          </a:ln>
+        </p:spPr>
+        <p:txBody>
+          <a:bodyPr/>
+          <a:lstStyle/>
+          <a:p>
+            <a:endParaRPr lang="zh-TW" altLang="en-US"/>
+          </a:p>
+        </p:txBody>
+      </p:sp>
+      <p:sp>
+        <p:nvSpPr>
+          <p:cNvPr id="17" name="line-paper-out">
+            <a:extLst>
+              <a:ext uri="{FF2B5EF4-FFF2-40B4-BE49-F238E27FC236}">
+                <a16:creationId xmlns:a16="http://schemas.microsoft.com/office/drawing/2014/main" id="{DDD157CC-971A-4F9D-849E-2347D42DDF77}"/>
+              </a:ext>
+            </a:extLst>
+          </p:cNvPr>
+          <p:cNvSpPr>
+            <a:spLocks noGrp="1"/>
+          </p:cNvSpPr>
+          <p:nvPr/>
+        </p:nvSpPr>
+        <p:spPr>
+          <a:xfrm>
+            <a:off x="7581900" y="3676650"/>
+            <a:ext cx="0" cy="495300"/>
+          </a:xfrm>
+          <a:prstGeom prst="line">
+            <a:avLst/>
+          </a:prstGeom>
+          <a:noFill/>
+          <a:ln w="14288">
+            <a:solidFill>
+              <a:srgbClr val="0B6E68"/>
+            </a:solidFill>
+            <a:prstDash val="solid"/>
+          </a:ln>
+        </p:spPr>
+        <p:txBody>
+          <a:bodyPr/>
+          <a:lstStyle/>
+          <a:p>
+            <a:endParaRPr lang="zh-TW" altLang="en-US"/>
+          </a:p>
+        </p:txBody>
+      </p:sp>
+      <p:sp>
+        <p:nvSpPr>
+          <p:cNvPr id="18" name="line-data-out">
+            <a:extLst>
+              <a:ext uri="{FF2B5EF4-FFF2-40B4-BE49-F238E27FC236}">
+                <a16:creationId xmlns:a16="http://schemas.microsoft.com/office/drawing/2014/main" id="{40969DD5-1CB0-46E1-A251-FC95BE72EECD}"/>
+              </a:ext>
+            </a:extLst>
+          </p:cNvPr>
+          <p:cNvSpPr>
+            <a:spLocks noGrp="1"/>
+          </p:cNvSpPr>
+          <p:nvPr/>
+        </p:nvSpPr>
+        <p:spPr>
+          <a:xfrm>
+            <a:off x="9201150" y="3676650"/>
+            <a:ext cx="0" cy="495300"/>
+          </a:xfrm>
+          <a:prstGeom prst="line">
+            <a:avLst/>
+          </a:prstGeom>
+          <a:noFill/>
+          <a:ln w="14288">
+            <a:solidFill>
+              <a:srgbClr val="0B6E68"/>
+            </a:solidFill>
+            <a:prstDash val="solid"/>
+          </a:ln>
+        </p:spPr>
+        <p:txBody>
+          <a:bodyPr/>
+          <a:lstStyle/>
+          <a:p>
+            <a:endParaRPr lang="zh-TW" altLang="en-US"/>
+          </a:p>
+        </p:txBody>
+      </p:sp>
+      <p:sp>
+        <p:nvSpPr>
+          <p:cNvPr id="19" name="line-code-out">
+            <a:extLst>
+              <a:ext uri="{FF2B5EF4-FFF2-40B4-BE49-F238E27FC236}">
+                <a16:creationId xmlns:a16="http://schemas.microsoft.com/office/drawing/2014/main" id="{C1F8740D-9AC2-4429-99EF-ACB92D1C6761}"/>
+              </a:ext>
+            </a:extLst>
+          </p:cNvPr>
+          <p:cNvSpPr>
+            <a:spLocks noGrp="1"/>
+          </p:cNvSpPr>
+          <p:nvPr/>
+        </p:nvSpPr>
+        <p:spPr>
+          <a:xfrm>
+            <a:off x="10801350" y="3676650"/>
+            <a:ext cx="0" cy="495300"/>
+          </a:xfrm>
+          <a:prstGeom prst="line">
+            <a:avLst/>
+          </a:prstGeom>
+          <a:noFill/>
+          <a:ln w="14288">
+            <a:solidFill>
+              <a:srgbClr val="0B6E68"/>
+            </a:solidFill>
+            <a:prstDash val="solid"/>
+          </a:ln>
+        </p:spPr>
+        <p:txBody>
+          <a:bodyPr/>
+          <a:lstStyle/>
+          <a:p>
+            <a:endParaRPr lang="zh-TW" altLang="en-US"/>
+          </a:p>
+        </p:txBody>
+      </p:sp>
+      <p:sp>
+        <p:nvSpPr>
+          <p:cNvPr id="20" name="line-output-bus">
+            <a:extLst>
+              <a:ext uri="{FF2B5EF4-FFF2-40B4-BE49-F238E27FC236}">
+                <a16:creationId xmlns:a16="http://schemas.microsoft.com/office/drawing/2014/main" id="{60BCB4C2-F2F3-4BA9-914A-AA3B354C7DE2}"/>
+              </a:ext>
+            </a:extLst>
+          </p:cNvPr>
+          <p:cNvSpPr>
+            <a:spLocks noGrp="1"/>
+          </p:cNvSpPr>
+          <p:nvPr/>
+        </p:nvSpPr>
+        <p:spPr>
+          <a:xfrm>
+            <a:off x="7581900" y="4171950"/>
+            <a:ext cx="3219450" cy="0"/>
+          </a:xfrm>
+          <a:prstGeom prst="line">
+            <a:avLst/>
+          </a:prstGeom>
+          <a:noFill/>
+          <a:ln w="14288">
+            <a:solidFill>
+              <a:srgbClr val="0B6E68"/>
+            </a:solidFill>
+            <a:prstDash val="solid"/>
+          </a:ln>
+        </p:spPr>
+        <p:txBody>
+          <a:bodyPr/>
+          <a:lstStyle/>
+          <a:p>
+            <a:endParaRPr lang="zh-TW" altLang="en-US"/>
+          </a:p>
+        </p:txBody>
+      </p:sp>
+      <p:sp>
+        <p:nvSpPr>
+          <p:cNvPr id="21" name="line-output-down">
+            <a:extLst>
+              <a:ext uri="{FF2B5EF4-FFF2-40B4-BE49-F238E27FC236}">
+                <a16:creationId xmlns:a16="http://schemas.microsoft.com/office/drawing/2014/main" id="{BD82C53D-2059-4B8D-AAF2-8FEC721B9FAE}"/>
+              </a:ext>
+            </a:extLst>
+          </p:cNvPr>
+          <p:cNvSpPr>
+            <a:spLocks noGrp="1"/>
+          </p:cNvSpPr>
+          <p:nvPr/>
+        </p:nvSpPr>
+        <p:spPr>
+          <a:xfrm>
+            <a:off x="9334500" y="4171950"/>
+            <a:ext cx="0" cy="476250"/>
+          </a:xfrm>
+          <a:prstGeom prst="line">
+            <a:avLst/>
+          </a:prstGeom>
+          <a:noFill/>
+          <a:ln w="17145">
+            <a:solidFill>
+              <a:srgbClr val="0B6E68"/>
+            </a:solidFill>
+            <a:prstDash val="solid"/>
+          </a:ln>
+        </p:spPr>
+        <p:txBody>
+          <a:bodyPr/>
+          <a:lstStyle/>
+          <a:p>
+            <a:endParaRPr lang="zh-TW" altLang="en-US"/>
+          </a:p>
+        </p:txBody>
+      </p:sp>
+      <p:sp>
+        <p:nvSpPr>
+          <p:cNvPr id="22" name="footer">
+            <a:extLst>
+              <a:ext uri="{FF2B5EF4-FFF2-40B4-BE49-F238E27FC236}">
+                <a16:creationId xmlns:a16="http://schemas.microsoft.com/office/drawing/2014/main" id="{5609B696-87E4-4AEC-A762-1CF129D7FC69}"/>
+              </a:ext>
+            </a:extLst>
+          </p:cNvPr>
+          <p:cNvSpPr>
+            <a:spLocks noGrp="1"/>
+          </p:cNvSpPr>
+          <p:nvPr/>
+        </p:nvSpPr>
+        <p:spPr>
+          <a:xfrm>
+            <a:off x="723900" y="6362700"/>
+            <a:ext cx="3429000" cy="209550"/>
           </a:xfrm>
           <a:prstGeom prst="rect">
             <a:avLst/>
           </a:prstGeom>
           <a:noFill/>
-          <a:ln w="19050">
+          <a:ln w="0">
+            <a:noFill/>
+            <a:prstDash val="solid"/>
+          </a:ln>
+        </p:spPr>
+        <p:txBody>
+          <a:bodyPr lIns="0" tIns="0" rIns="0" bIns="0" anchor="t"/>
+          <a:lstStyle/>
+          <a:p>
+            <a:pPr algn="l">
+              <a:lnSpc>
+                <a:spcPct val="108000"/>
+              </a:lnSpc>
+              <a:buNone/>
+              <a:defRPr sz="900" b="0">
+                <a:solidFill>
+                  <a:srgbClr val="5C6670"/>
+                </a:solidFill>
+                <a:latin typeface="Aptos"/>
+                <a:ea typeface="Aptos"/>
+                <a:cs typeface="Aptos"/>
+              </a:defRPr>
+            </a:pPr>
+            <a:r>
+              <a:rPr sz="900" b="0">
+                <a:solidFill>
+                  <a:srgbClr val="5C6670"/>
+                </a:solidFill>
+                <a:latin typeface="Aptos"/>
+                <a:ea typeface="Aptos"/>
+                <a:cs typeface="Aptos"/>
+              </a:rPr>
+              <a:t>Course introduction  |  1/7</a:t>
+            </a:r>
+          </a:p>
+        </p:txBody>
+      </p:sp>
+      <p:sp>
+        <p:nvSpPr>
+          <p:cNvPr id="101" name="session-a-head"/>
+          <p:cNvSpPr>
+            <a:spLocks noGrp="1"/>
+          </p:cNvSpPr>
+          <p:nvPr/>
+        </p:nvSpPr>
+        <p:spPr>
+          <a:xfrm>
+            <a:off x="723900" y="4648200"/>
+            <a:ext cx="2781300" cy="558800"/>
+          </a:xfrm>
+          <a:prstGeom prst="rect">
+            <a:avLst/>
+          </a:prstGeom>
+          <a:noFill/>
+          <a:ln w="0">
+            <a:noFill/>
+            <a:prstDash val="solid"/>
+          </a:ln>
+        </p:spPr>
+        <p:txBody>
+          <a:bodyPr lIns="0" tIns="0" rIns="0" bIns="0" anchor="t"/>
+          <a:lstStyle/>
+          <a:p>
+            <a:pPr marL="20" indent="-10">
+              <a:lnSpc>
+                <a:spcPct val="108000"/>
+              </a:lnSpc>
+              <a:spcAft>
+                <a:spcPts val="20"/>
+              </a:spcAft>
+              <a:buNone/>
+              <a:defRPr sz="1000" b="1">
+                <a:solidFill>
+                  <a:srgbClr val="0B6E68"/>
+                </a:solidFill>
+                <a:latin typeface="PingFang TC"/>
+                <a:ea typeface="PingFang TC"/>
+                <a:cs typeface="PingFang TC"/>
+              </a:defRPr>
+            </a:pPr>
+            <a:r>
+              <a:rPr lang="en-US" altLang="zh-TW" sz="1000" b="1" dirty="0">
+                <a:solidFill>
+                  <a:srgbClr val="0B6E68"/>
+                </a:solidFill>
+                <a:latin typeface="PingFang TC"/>
+                <a:ea typeface="PingFang TC"/>
+                <a:cs typeface="PingFang TC"/>
+              </a:rPr>
+              <a:t>----------------------</a:t>
+            </a:r>
+          </a:p>
+          <a:p>
+            <a:pPr marL="20" indent="-10">
+              <a:lnSpc>
+                <a:spcPct val="108000"/>
+              </a:lnSpc>
+              <a:spcAft>
+                <a:spcPts val="0"/>
+              </a:spcAft>
+              <a:buNone/>
+              <a:defRPr sz="1600" b="1">
+                <a:solidFill>
+                  <a:srgbClr val="0B6E68"/>
+                </a:solidFill>
+                <a:latin typeface="PingFang TC"/>
+                <a:ea typeface="PingFang TC"/>
+                <a:cs typeface="PingFang TC"/>
+              </a:defRPr>
+            </a:pPr>
+            <a:r>
+              <a:rPr sz="1600" b="1" dirty="0" err="1">
+                <a:solidFill>
+                  <a:srgbClr val="0B6E68"/>
+                </a:solidFill>
+                <a:latin typeface="PingFang TC"/>
+                <a:ea typeface="PingFang TC"/>
+                <a:cs typeface="PingFang TC"/>
+              </a:rPr>
+              <a:t>課程介紹</a:t>
+            </a:r>
+            <a:endParaRPr sz="1600" b="1" dirty="0">
+              <a:solidFill>
+                <a:srgbClr val="0B6E68"/>
+              </a:solidFill>
+              <a:latin typeface="PingFang TC"/>
+              <a:ea typeface="PingFang TC"/>
+              <a:cs typeface="PingFang TC"/>
+            </a:endParaRPr>
+          </a:p>
+        </p:txBody>
+      </p:sp>
+      <p:sp>
+        <p:nvSpPr>
+          <p:cNvPr id="102" name="session-a-bar"/>
+          <p:cNvSpPr>
+            <a:spLocks noGrp="1"/>
+          </p:cNvSpPr>
+          <p:nvPr/>
+        </p:nvSpPr>
+        <p:spPr>
+          <a:xfrm>
+            <a:off x="723900" y="5232400"/>
+            <a:ext cx="2781300" cy="38100"/>
+          </a:xfrm>
+          <a:prstGeom prst="rect">
+            <a:avLst/>
+          </a:prstGeom>
+          <a:solidFill>
+            <a:srgbClr val="0B6E68"/>
+          </a:solidFill>
+          <a:ln w="0">
             <a:solidFill>
-              <a:srgbClr val="FFFFFF"/>
+              <a:srgbClr val="0B6E68"/>
             </a:solidFill>
             <a:prstDash val="solid"/>
           </a:ln>
-          <a:effectLst/>
-          <a:extLst>
-            <a:ext uri="{909E8E84-426E-40DD-AFC4-6F175D3DCCD1}">
-              <a14:hiddenFill xmlns:a14="http://schemas.microsoft.com/office/drawing/2010/main">
-                <a:solidFill>
-                  <a:schemeClr val="accent1"/>
-                </a:solidFill>
-              </a14:hiddenFill>
-            </a:ext>
-          </a:extLst>
-        </p:spPr>
-        <p:style>
-          <a:lnRef idx="2">
-            <a:schemeClr val="accent1">
-              <a:shade val="15000"/>
-            </a:schemeClr>
-          </a:lnRef>
-          <a:fillRef idx="1">
-            <a:schemeClr val="accent1"/>
-          </a:fillRef>
-          <a:effectRef idx="0">
-            <a:schemeClr val="accent1"/>
-          </a:effectRef>
-          <a:fontRef idx="minor">
-            <a:schemeClr val="lt1"/>
-          </a:fontRef>
-        </p:style>
-        <p:txBody>
-          <a:bodyPr rtlCol="0" anchor="ctr"/>
-          <a:lstStyle/>
-          <a:p>
-            <a:r>
-              <a:rPr kumimoji="1" lang="en" altLang="zh-TW" sz="4000" b="1">
-                <a:solidFill>
-                  <a:srgbClr val="000000"/>
-                </a:solidFill>
-              </a:rPr>
-              <a:t>Audience Q&amp;A</a:t>
-            </a:r>
-            <a:endParaRPr kumimoji="1" lang="zh-TW" altLang="en-US" sz="4000" b="1">
+        </p:spPr>
+        <p:txBody>
+          <a:bodyPr/>
+          <a:lstStyle/>
+          <a:p>
+            <a:endParaRPr lang="zh-TW" altLang="en-US">
               <a:solidFill>
-                <a:srgbClr val="000000"/>
+                <a:srgbClr val="0B6E68"/>
               </a:solidFill>
             </a:endParaRPr>
           </a:p>
@@ -44504,283 +44321,466 @@
       </p:sp>
       <p:sp>
         <p:nvSpPr>
-          <p:cNvPr id="4" name="矩形 3">
-            <a:extLst>
-              <a:ext uri="{FF2B5EF4-FFF2-40B4-BE49-F238E27FC236}">
-                <a16:creationId xmlns:a16="http://schemas.microsoft.com/office/drawing/2014/main" id="{2CF0DB62-5741-D8A1-D505-3B2AB328F599}"/>
-              </a:ext>
-            </a:extLst>
-          </p:cNvPr>
-          <p:cNvSpPr/>
-          <p:nvPr/>
-        </p:nvSpPr>
-        <p:spPr>
-          <a:xfrm>
-            <a:off x="0" y="5820032"/>
-            <a:ext cx="12192001" cy="1037968"/>
+          <p:cNvPr id="103" name="session-a-list"/>
+          <p:cNvSpPr>
+            <a:spLocks noGrp="1"/>
+          </p:cNvSpPr>
+          <p:nvPr/>
+        </p:nvSpPr>
+        <p:spPr>
+          <a:xfrm>
+            <a:off x="723900" y="5372100"/>
+            <a:ext cx="2781300" cy="863600"/>
           </a:xfrm>
           <a:prstGeom prst="rect">
             <a:avLst/>
           </a:prstGeom>
+          <a:noFill/>
+          <a:ln w="0">
+            <a:noFill/>
+            <a:prstDash val="solid"/>
+          </a:ln>
+        </p:spPr>
+        <p:txBody>
+          <a:bodyPr lIns="0" tIns="0" rIns="0" bIns="0" anchor="t"/>
+          <a:lstStyle/>
+          <a:p>
+            <a:pPr marL="20" indent="-10">
+              <a:lnSpc>
+                <a:spcPct val="108000"/>
+              </a:lnSpc>
+              <a:spcAft>
+                <a:spcPts val="40"/>
+              </a:spcAft>
+              <a:buNone/>
+              <a:defRPr sz="1200">
+                <a:solidFill>
+                  <a:srgbClr val="17202A"/>
+                </a:solidFill>
+                <a:latin typeface="PingFang TC"/>
+                <a:ea typeface="PingFang TC"/>
+                <a:cs typeface="PingFang TC"/>
+              </a:defRPr>
+            </a:pPr>
+            <a:r>
+              <a:rPr sz="1200">
+                <a:solidFill>
+                  <a:srgbClr val="17202A"/>
+                </a:solidFill>
+                <a:latin typeface="PingFang TC"/>
+                <a:ea typeface="PingFang TC"/>
+                <a:cs typeface="PingFang TC"/>
+              </a:rPr>
+              <a:t>課程目標與三天架構</a:t>
+            </a:r>
+          </a:p>
+          <a:p>
+            <a:pPr marL="20" indent="-10">
+              <a:lnSpc>
+                <a:spcPct val="108000"/>
+              </a:lnSpc>
+              <a:spcAft>
+                <a:spcPts val="40"/>
+              </a:spcAft>
+              <a:buNone/>
+              <a:defRPr sz="1200">
+                <a:solidFill>
+                  <a:srgbClr val="17202A"/>
+                </a:solidFill>
+                <a:latin typeface="PingFang TC"/>
+                <a:ea typeface="PingFang TC"/>
+                <a:cs typeface="PingFang TC"/>
+              </a:defRPr>
+            </a:pPr>
+            <a:r>
+              <a:rPr sz="1200">
+                <a:solidFill>
+                  <a:srgbClr val="17202A"/>
+                </a:solidFill>
+                <a:latin typeface="PingFang TC"/>
+                <a:ea typeface="PingFang TC"/>
+                <a:cs typeface="PingFang TC"/>
+              </a:rPr>
+              <a:t>評分方式與分組原則</a:t>
+            </a:r>
+          </a:p>
+          <a:p>
+            <a:pPr marL="20" indent="-10">
+              <a:lnSpc>
+                <a:spcPct val="108000"/>
+              </a:lnSpc>
+              <a:spcAft>
+                <a:spcPts val="0"/>
+              </a:spcAft>
+              <a:buNone/>
+              <a:defRPr sz="1200">
+                <a:solidFill>
+                  <a:srgbClr val="17202A"/>
+                </a:solidFill>
+                <a:latin typeface="PingFang TC"/>
+                <a:ea typeface="PingFang TC"/>
+                <a:cs typeface="PingFang TC"/>
+              </a:defRPr>
+            </a:pPr>
+            <a:r>
+              <a:rPr sz="1200">
+                <a:solidFill>
+                  <a:srgbClr val="17202A"/>
+                </a:solidFill>
+                <a:latin typeface="PingFang TC"/>
+                <a:ea typeface="PingFang TC"/>
+                <a:cs typeface="PingFang TC"/>
+              </a:rPr>
+              <a:t>Hackathon 與工具規範</a:t>
+            </a:r>
+          </a:p>
+        </p:txBody>
+      </p:sp>
+      <p:sp>
+        <p:nvSpPr>
+          <p:cNvPr id="104" name="session-b-head"/>
+          <p:cNvSpPr>
+            <a:spLocks noGrp="1"/>
+          </p:cNvSpPr>
+          <p:nvPr/>
+        </p:nvSpPr>
+        <p:spPr>
+          <a:xfrm>
+            <a:off x="3759200" y="4648200"/>
+            <a:ext cx="2781300" cy="558800"/>
+          </a:xfrm>
+          <a:prstGeom prst="rect">
+            <a:avLst/>
+          </a:prstGeom>
+          <a:noFill/>
+          <a:ln w="0">
+            <a:noFill/>
+            <a:prstDash val="solid"/>
+          </a:ln>
+        </p:spPr>
+        <p:txBody>
+          <a:bodyPr lIns="0" tIns="0" rIns="0" bIns="0" anchor="t"/>
+          <a:lstStyle/>
+          <a:p>
+            <a:pPr marL="20" indent="-10">
+              <a:lnSpc>
+                <a:spcPct val="108000"/>
+              </a:lnSpc>
+              <a:spcAft>
+                <a:spcPts val="20"/>
+              </a:spcAft>
+              <a:buNone/>
+              <a:defRPr sz="1000" b="1">
+                <a:solidFill>
+                  <a:srgbClr val="3446A8"/>
+                </a:solidFill>
+                <a:latin typeface="PingFang TC"/>
+                <a:ea typeface="PingFang TC"/>
+                <a:cs typeface="PingFang TC"/>
+              </a:defRPr>
+            </a:pPr>
+            <a:r>
+              <a:rPr lang="en-US" sz="1000" b="1" dirty="0">
+                <a:solidFill>
+                  <a:srgbClr val="3446A8"/>
+                </a:solidFill>
+                <a:latin typeface="PingFang TC"/>
+                <a:ea typeface="PingFang TC"/>
+                <a:cs typeface="PingFang TC"/>
+              </a:rPr>
+              <a:t>--------------------------------</a:t>
+            </a:r>
+            <a:endParaRPr sz="1000" b="1" dirty="0">
+              <a:solidFill>
+                <a:srgbClr val="3446A8"/>
+              </a:solidFill>
+              <a:latin typeface="PingFang TC"/>
+              <a:ea typeface="PingFang TC"/>
+              <a:cs typeface="PingFang TC"/>
+            </a:endParaRPr>
+          </a:p>
+          <a:p>
+            <a:pPr marL="20" indent="-10">
+              <a:lnSpc>
+                <a:spcPct val="108000"/>
+              </a:lnSpc>
+              <a:spcAft>
+                <a:spcPts val="0"/>
+              </a:spcAft>
+              <a:buNone/>
+              <a:defRPr sz="1600" b="1">
+                <a:solidFill>
+                  <a:srgbClr val="3446A8"/>
+                </a:solidFill>
+                <a:latin typeface="PingFang TC"/>
+                <a:ea typeface="PingFang TC"/>
+                <a:cs typeface="PingFang TC"/>
+              </a:defRPr>
+            </a:pPr>
+            <a:r>
+              <a:rPr sz="1600" b="1" dirty="0">
+                <a:solidFill>
+                  <a:srgbClr val="3446A8"/>
+                </a:solidFill>
+                <a:latin typeface="PingFang TC"/>
+                <a:ea typeface="PingFang TC"/>
+                <a:cs typeface="PingFang TC"/>
+              </a:rPr>
+              <a:t>AI Agent </a:t>
+            </a:r>
+            <a:r>
+              <a:rPr sz="1600" b="1" dirty="0" err="1">
+                <a:solidFill>
+                  <a:srgbClr val="3446A8"/>
+                </a:solidFill>
+                <a:latin typeface="PingFang TC"/>
+                <a:ea typeface="PingFang TC"/>
+                <a:cs typeface="PingFang TC"/>
+              </a:rPr>
+              <a:t>入門</a:t>
+            </a:r>
+            <a:endParaRPr sz="1600" b="1" dirty="0">
+              <a:solidFill>
+                <a:srgbClr val="3446A8"/>
+              </a:solidFill>
+              <a:latin typeface="PingFang TC"/>
+              <a:ea typeface="PingFang TC"/>
+              <a:cs typeface="PingFang TC"/>
+            </a:endParaRPr>
+          </a:p>
+        </p:txBody>
+      </p:sp>
+      <p:sp>
+        <p:nvSpPr>
+          <p:cNvPr id="105" name="session-b-bar"/>
+          <p:cNvSpPr>
+            <a:spLocks noGrp="1"/>
+          </p:cNvSpPr>
+          <p:nvPr/>
+        </p:nvSpPr>
+        <p:spPr>
+          <a:xfrm>
+            <a:off x="3759200" y="5232400"/>
+            <a:ext cx="2781300" cy="38100"/>
+          </a:xfrm>
+          <a:prstGeom prst="rect">
+            <a:avLst/>
+          </a:prstGeom>
           <a:solidFill>
-            <a:srgbClr val="198038"/>
+            <a:srgbClr val="3446A8"/>
           </a:solidFill>
-          <a:ln w="19050">
-            <a:noFill/>
-            <a:prstDash val="solid"/>
-          </a:ln>
-          <a:effectLst/>
-          <a:extLst>
-            <a:ext uri="{91240B29-F687-4F45-9708-019B960494DF}">
-              <a14:hiddenLine xmlns:a14="http://schemas.microsoft.com/office/drawing/2010/main" w="19050">
-                <a:solidFill>
-                  <a:schemeClr val="accent1">
-                    <a:shade val="15000"/>
-                  </a:schemeClr>
-                </a:solidFill>
-                <a:prstDash val="solid"/>
-              </a14:hiddenLine>
-            </a:ext>
-          </a:extLst>
-        </p:spPr>
-        <p:style>
-          <a:lnRef idx="2">
-            <a:schemeClr val="accent1">
-              <a:shade val="15000"/>
-            </a:schemeClr>
-          </a:lnRef>
-          <a:fillRef idx="1">
-            <a:schemeClr val="accent1"/>
-          </a:fillRef>
-          <a:effectRef idx="0">
-            <a:schemeClr val="accent1"/>
-          </a:effectRef>
-          <a:fontRef idx="minor">
-            <a:schemeClr val="lt1"/>
-          </a:fontRef>
-        </p:style>
-        <p:txBody>
-          <a:bodyPr lIns="741155" tIns="259492" rIns="1852888" bIns="203886" rtlCol="0" anchor="ctr">
-            <a:normAutofit fontScale="92500"/>
-          </a:bodyPr>
-          <a:lstStyle/>
-          <a:p>
-            <a:r>
-              <a:rPr kumimoji="1" lang="en" altLang="zh-TW" sz="2600">
-                <a:solidFill>
-                  <a:srgbClr val="FFFFFF"/>
-                </a:solidFill>
-              </a:rPr>
-              <a:t>The </a:t>
-            </a:r>
-            <a:r>
-              <a:rPr kumimoji="1" lang="en" altLang="zh-TW" sz="2600">
-                <a:solidFill>
-                  <a:srgbClr val="FFFFFF"/>
-                </a:solidFill>
-                <a:hlinkClick r:id="rId6">
-                  <a:extLst>
-                    <a:ext uri="{A12FA001-AC4F-418D-AE19-62706E023703}">
-                      <ahyp:hlinkClr xmlns:ahyp="http://schemas.microsoft.com/office/drawing/2018/hyperlinkcolor" val="tx"/>
-                    </a:ext>
-                  </a:extLst>
-                </a:hlinkClick>
-              </a:rPr>
-              <a:t>Slido app</a:t>
-            </a:r>
-            <a:r>
-              <a:rPr kumimoji="1" lang="en" altLang="zh-TW" sz="2600">
-                <a:solidFill>
-                  <a:srgbClr val="FFFFFF"/>
-                </a:solidFill>
-              </a:rPr>
-              <a:t> must be installed on every computer you’re presenting from</a:t>
-            </a:r>
-            <a:endParaRPr kumimoji="1" lang="zh-TW" altLang="en-US" sz="2600">
+          <a:ln w="0">
+            <a:solidFill>
+              <a:srgbClr val="3446A8"/>
+            </a:solidFill>
+            <a:prstDash val="solid"/>
+          </a:ln>
+        </p:spPr>
+        <p:txBody>
+          <a:bodyPr/>
+          <a:lstStyle/>
+          <a:p>
+            <a:endParaRPr lang="zh-TW" altLang="en-US">
               <a:solidFill>
-                <a:srgbClr val="FFFFFF"/>
+                <a:srgbClr val="3446A8"/>
               </a:solidFill>
             </a:endParaRPr>
           </a:p>
         </p:txBody>
       </p:sp>
-      <p:pic>
-        <p:nvPicPr>
-          <p:cNvPr id="6" name="圖形 5">
-            <a:extLst>
-              <a:ext uri="{FF2B5EF4-FFF2-40B4-BE49-F238E27FC236}">
-                <a16:creationId xmlns:a16="http://schemas.microsoft.com/office/drawing/2014/main" id="{288E9B44-5AC6-2208-BF53-8A01DB8E5675}"/>
-              </a:ext>
-            </a:extLst>
-          </p:cNvPr>
-          <p:cNvPicPr>
-            <a:picLocks/>
-          </p:cNvPicPr>
-          <p:nvPr/>
-        </p:nvPicPr>
-        <p:blipFill>
-          <a:blip>
-            <a:extLst>
-              <a:ext uri="{96DAC541-7B7A-43D3-8B79-37D633B846F1}">
-                <asvg:svgBlip xmlns:asvg="http://schemas.microsoft.com/office/drawing/2016/SVG/main" r:embed="rId7"/>
-              </a:ext>
-            </a:extLst>
-          </a:blip>
-          <a:stretch>
-            <a:fillRect/>
-          </a:stretch>
-        </p:blipFill>
-        <p:spPr>
-          <a:xfrm>
-            <a:off x="296462" y="6190785"/>
-            <a:ext cx="296462" cy="296462"/>
+      <p:sp>
+        <p:nvSpPr>
+          <p:cNvPr id="106" name="session-b-list"/>
+          <p:cNvSpPr>
+            <a:spLocks noGrp="1"/>
+          </p:cNvSpPr>
+          <p:nvPr/>
+        </p:nvSpPr>
+        <p:spPr>
+          <a:xfrm>
+            <a:off x="3759200" y="5372100"/>
+            <a:ext cx="2781300" cy="863600"/>
           </a:xfrm>
           <a:prstGeom prst="rect">
             <a:avLst/>
           </a:prstGeom>
-        </p:spPr>
-      </p:pic>
-      <p:sp>
-        <p:nvSpPr>
-          <p:cNvPr id="7" name="不規則四邊形 6">
-            <a:extLst>
-              <a:ext uri="{FF2B5EF4-FFF2-40B4-BE49-F238E27FC236}">
-                <a16:creationId xmlns:a16="http://schemas.microsoft.com/office/drawing/2014/main" id="{B0F0C53E-7FE6-D0A8-9EC1-5181AAA3078F}"/>
-              </a:ext>
-            </a:extLst>
-          </p:cNvPr>
-          <p:cNvSpPr/>
-          <p:nvPr/>
-        </p:nvSpPr>
-        <p:spPr>
-          <a:xfrm rot="2700000">
-            <a:off x="9620371" y="514924"/>
-            <a:ext cx="3335198" cy="778213"/>
-          </a:xfrm>
-          <a:prstGeom prst="trapezoid">
-            <a:avLst>
-              <a:gd name="adj" fmla="val 100000"/>
-            </a:avLst>
-          </a:prstGeom>
-          <a:solidFill>
-            <a:srgbClr val="EDFAF2"/>
-          </a:solidFill>
-          <a:ln w="19050">
+          <a:noFill/>
+          <a:ln w="0">
             <a:noFill/>
             <a:prstDash val="solid"/>
           </a:ln>
-          <a:effectLst/>
-          <a:extLst>
-            <a:ext uri="{91240B29-F687-4F45-9708-019B960494DF}">
-              <a14:hiddenLine xmlns:a14="http://schemas.microsoft.com/office/drawing/2010/main" w="19050">
-                <a:solidFill>
-                  <a:schemeClr val="accent1">
-                    <a:shade val="15000"/>
-                  </a:schemeClr>
-                </a:solidFill>
-                <a:prstDash val="solid"/>
-              </a14:hiddenLine>
-            </a:ext>
-          </a:extLst>
-        </p:spPr>
-        <p:style>
-          <a:lnRef idx="2">
-            <a:schemeClr val="accent1">
-              <a:shade val="15000"/>
-            </a:schemeClr>
-          </a:lnRef>
-          <a:fillRef idx="1">
-            <a:schemeClr val="accent1"/>
-          </a:fillRef>
-          <a:effectRef idx="0">
-            <a:schemeClr val="accent1"/>
-          </a:effectRef>
-          <a:fontRef idx="minor">
-            <a:schemeClr val="lt1"/>
-          </a:fontRef>
-        </p:style>
-        <p:txBody>
-          <a:bodyPr tIns="0" bIns="0" rtlCol="0" anchor="t">
-            <a:normAutofit fontScale="70000" lnSpcReduction="20000"/>
-          </a:bodyPr>
-          <a:lstStyle/>
-          <a:p>
-            <a:pPr algn="ctr"/>
-            <a:r>
-              <a:rPr kumimoji="1" lang="en" altLang="zh-TW" sz="2600" b="1">
-                <a:solidFill>
-                  <a:srgbClr val="198038"/>
-                </a:solidFill>
-              </a:rPr>
-              <a:t>Do not edit
-</a:t>
-            </a:r>
-            <a:r>
-              <a:rPr kumimoji="1" lang="en" altLang="zh-TW" sz="2200">
-                <a:solidFill>
-                  <a:srgbClr val="198038"/>
-                </a:solidFill>
-                <a:hlinkClick r:id="rId8">
-                  <a:extLst>
-                    <a:ext uri="{A12FA001-AC4F-418D-AE19-62706E023703}">
-                      <ahyp:hlinkClr xmlns:ahyp="http://schemas.microsoft.com/office/drawing/2018/hyperlinkcolor" val="tx"/>
-                    </a:ext>
-                  </a:extLst>
-                </a:hlinkClick>
-              </a:rPr>
-              <a:t>How to change the design</a:t>
-            </a:r>
-            <a:endParaRPr kumimoji="1" lang="zh-TW" altLang="en-US" sz="2200">
-              <a:solidFill>
-                <a:srgbClr val="198038"/>
-              </a:solidFill>
-            </a:endParaRPr>
-          </a:p>
-        </p:txBody>
-      </p:sp>
-      <p:pic>
-        <p:nvPicPr>
-          <p:cNvPr id="9" name="圖形 8">
-            <a:extLst>
-              <a:ext uri="{FF2B5EF4-FFF2-40B4-BE49-F238E27FC236}">
-                <a16:creationId xmlns:a16="http://schemas.microsoft.com/office/drawing/2014/main" id="{7976CD8A-E8BC-14AD-089A-0CBB9AB0C9C6}"/>
-              </a:ext>
-            </a:extLst>
-          </p:cNvPr>
-          <p:cNvPicPr>
-            <a:picLocks/>
-          </p:cNvPicPr>
-          <p:nvPr/>
-        </p:nvPicPr>
-        <p:blipFill>
-          <a:blip>
-            <a:extLst>
-              <a:ext uri="{96DAC541-7B7A-43D3-8B79-37D633B846F1}">
-                <asvg:svgBlip xmlns:asvg="http://schemas.microsoft.com/office/drawing/2016/SVG/main" r:embed="rId9"/>
-              </a:ext>
-            </a:extLst>
-          </a:blip>
-          <a:stretch>
-            <a:fillRect/>
-          </a:stretch>
-        </p:blipFill>
-        <p:spPr>
-          <a:xfrm>
-            <a:off x="10746748" y="6153727"/>
-            <a:ext cx="1111733" cy="370578"/>
+        </p:spPr>
+        <p:txBody>
+          <a:bodyPr lIns="0" tIns="0" rIns="0" bIns="0" anchor="t"/>
+          <a:lstStyle/>
+          <a:p>
+            <a:pPr marL="20" indent="-10">
+              <a:lnSpc>
+                <a:spcPct val="108000"/>
+              </a:lnSpc>
+              <a:spcAft>
+                <a:spcPts val="40"/>
+              </a:spcAft>
+              <a:buNone/>
+              <a:defRPr sz="1200">
+                <a:solidFill>
+                  <a:srgbClr val="17202A"/>
+                </a:solidFill>
+                <a:latin typeface="PingFang TC"/>
+                <a:ea typeface="PingFang TC"/>
+                <a:cs typeface="PingFang TC"/>
+              </a:defRPr>
+            </a:pPr>
+            <a:r>
+              <a:rPr sz="1200">
+                <a:solidFill>
+                  <a:srgbClr val="17202A"/>
+                </a:solidFill>
+                <a:latin typeface="PingFang TC"/>
+                <a:ea typeface="PingFang TC"/>
+                <a:cs typeface="PingFang TC"/>
+              </a:rPr>
+              <a:t>LLM 與 agent 的差異</a:t>
+            </a:r>
+          </a:p>
+          <a:p>
+            <a:pPr marL="20" indent="-10">
+              <a:lnSpc>
+                <a:spcPct val="108000"/>
+              </a:lnSpc>
+              <a:spcAft>
+                <a:spcPts val="40"/>
+              </a:spcAft>
+              <a:buNone/>
+              <a:defRPr sz="1200">
+                <a:solidFill>
+                  <a:srgbClr val="17202A"/>
+                </a:solidFill>
+                <a:latin typeface="PingFang TC"/>
+                <a:ea typeface="PingFang TC"/>
+                <a:cs typeface="PingFang TC"/>
+              </a:defRPr>
+            </a:pPr>
+            <a:r>
+              <a:rPr sz="1200">
+                <a:solidFill>
+                  <a:srgbClr val="17202A"/>
+                </a:solidFill>
+                <a:latin typeface="PingFang TC"/>
+                <a:ea typeface="PingFang TC"/>
+                <a:cs typeface="PingFang TC"/>
+              </a:rPr>
+              <a:t>Vibe coding 的優點與風險</a:t>
+            </a:r>
+          </a:p>
+          <a:p>
+            <a:pPr marL="20" indent="-10">
+              <a:lnSpc>
+                <a:spcPct val="108000"/>
+              </a:lnSpc>
+              <a:spcAft>
+                <a:spcPts val="0"/>
+              </a:spcAft>
+              <a:buNone/>
+              <a:defRPr sz="1200">
+                <a:solidFill>
+                  <a:srgbClr val="17202A"/>
+                </a:solidFill>
+                <a:latin typeface="PingFang TC"/>
+                <a:ea typeface="PingFang TC"/>
+                <a:cs typeface="PingFang TC"/>
+              </a:defRPr>
+            </a:pPr>
+            <a:r>
+              <a:rPr sz="1200">
+                <a:solidFill>
+                  <a:srgbClr val="17202A"/>
+                </a:solidFill>
+                <a:latin typeface="PingFang TC"/>
+                <a:ea typeface="PingFang TC"/>
+                <a:cs typeface="PingFang TC"/>
+              </a:rPr>
+              <a:t>桌面／CLI 工具比較</a:t>
+            </a:r>
+          </a:p>
+        </p:txBody>
+      </p:sp>
+      <p:cxnSp>
+        <p:nvCxnSpPr>
+          <p:cNvPr id="107" name="session-divider"/>
+          <p:cNvCxnSpPr/>
+          <p:nvPr/>
+        </p:nvCxnSpPr>
+        <p:spPr>
+          <a:xfrm>
+            <a:off x="3632200" y="4699000"/>
+            <a:ext cx="0" cy="1473200"/>
+          </a:xfrm>
+          <a:prstGeom prst="line">
+            <a:avLst/>
+          </a:prstGeom>
+          <a:ln w="9525">
+            <a:solidFill>
+              <a:srgbClr val="E8E8E8"/>
+            </a:solidFill>
+          </a:ln>
+        </p:spPr>
+      </p:cxnSp>
+      <p:sp>
+        <p:nvSpPr>
+          <p:cNvPr id="108" name="diagram-caption"/>
+          <p:cNvSpPr>
+            <a:spLocks noGrp="1"/>
+          </p:cNvSpPr>
+          <p:nvPr/>
+        </p:nvSpPr>
+        <p:spPr>
+          <a:xfrm>
+            <a:off x="7010400" y="1117600"/>
+            <a:ext cx="4381500" cy="254000"/>
           </a:xfrm>
           <a:prstGeom prst="rect">
             <a:avLst/>
           </a:prstGeom>
-        </p:spPr>
-      </p:pic>
+          <a:noFill/>
+          <a:ln w="0">
+            <a:noFill/>
+            <a:prstDash val="solid"/>
+          </a:ln>
+        </p:spPr>
+        <p:txBody>
+          <a:bodyPr lIns="0" tIns="0" rIns="0" bIns="0" anchor="ctr"/>
+          <a:lstStyle/>
+          <a:p>
+            <a:pPr algn="ctr">
+              <a:buNone/>
+              <a:defRPr sz="1100" b="1">
+                <a:solidFill>
+                  <a:srgbClr val="5C6670"/>
+                </a:solidFill>
+                <a:latin typeface="Aptos"/>
+                <a:ea typeface="Aptos"/>
+                <a:cs typeface="Aptos"/>
+              </a:defRPr>
+            </a:pPr>
+            <a:r>
+              <a:rPr sz="1100" b="1">
+                <a:solidFill>
+                  <a:srgbClr val="5C6670"/>
+                </a:solidFill>
+                <a:latin typeface="Aptos"/>
+                <a:ea typeface="Aptos"/>
+                <a:cs typeface="Aptos"/>
+              </a:rPr>
+              <a:t>AGENT WORKFLOW PREVIEW</a:t>
+            </a:r>
+          </a:p>
+        </p:txBody>
+      </p:sp>
     </p:spTree>
-    <p:custDataLst>
-      <p:tags r:id="rId1"/>
-    </p:custDataLst>
     <p:extLst>
       <p:ext uri="{BB962C8B-B14F-4D97-AF65-F5344CB8AC3E}">
-        <p14:creationId xmlns:p14="http://schemas.microsoft.com/office/powerpoint/2010/main" val="1622157460"/>
+        <p14:creationId xmlns:p14="http://schemas.microsoft.com/office/powerpoint/2010/main" val="99501835"/>
       </p:ext>
     </p:extLst>
   </p:cSld>
@@ -49265,16 +49265,14 @@
 
 <file path=ppt/tags/tag2.xml><?xml version="1.0" encoding="utf-8"?>
 <p:tagLst xmlns:a="http://schemas.openxmlformats.org/drawingml/2006/main" xmlns:r="http://schemas.openxmlformats.org/officeDocument/2006/relationships" xmlns:p="http://schemas.openxmlformats.org/presentationml/2006/main">
-  <p:tag name="SLIDO_TYPE" val="SlidoPoll"/>
-  <p:tag name="SLIDO_POLL_UUID" val="b5c2c580-ec25-4264-82f2-77636f992476"/>
-  <p:tag name="SLIDO_TIMELINE" val="W3sicG9sbFF1ZXN0aW9uVXVpZCI6Ijk4MWU2MGE0LTJjNWEtNDUyYS1hMThhLThjZDdhNTFlNDU4ZiIsInNob3dSZXN1bHRzIjp0cnVlfV0="/>
+  <p:tag name="SLIDO_TYPE" val="SlidoQA"/>
 </p:tagLst>
 </file>
 
 <file path=ppt/tags/tag3.xml><?xml version="1.0" encoding="utf-8"?>
 <p:tagLst xmlns:a="http://schemas.openxmlformats.org/drawingml/2006/main" xmlns:r="http://schemas.openxmlformats.org/officeDocument/2006/relationships" xmlns:p="http://schemas.openxmlformats.org/presentationml/2006/main">
   <p:tag name="SLIDO_ELEMENT" val="interaction_image"/>
-  <p:tag name="INTERACTION_TYPE" val="MultipleChoice"/>
+  <p:tag name="INTERACTION_TYPE" val="QA"/>
 </p:tagLst>
 </file>
 
@@ -49286,14 +49284,16 @@
 
 <file path=ppt/tags/tag5.xml><?xml version="1.0" encoding="utf-8"?>
 <p:tagLst xmlns:a="http://schemas.openxmlformats.org/drawingml/2006/main" xmlns:r="http://schemas.openxmlformats.org/officeDocument/2006/relationships" xmlns:p="http://schemas.openxmlformats.org/presentationml/2006/main">
-  <p:tag name="SLIDO_TYPE" val="SlidoQA"/>
+  <p:tag name="SLIDO_TYPE" val="SlidoPoll"/>
+  <p:tag name="SLIDO_POLL_UUID" val="b5c2c580-ec25-4264-82f2-77636f992476"/>
+  <p:tag name="SLIDO_TIMELINE" val="W3sicG9sbFF1ZXN0aW9uVXVpZCI6Ijk4MWU2MGE0LTJjNWEtNDUyYS1hMThhLThjZDdhNTFlNDU4ZiIsInNob3dSZXN1bHRzIjp0cnVlfV0="/>
 </p:tagLst>
 </file>
 
 <file path=ppt/tags/tag6.xml><?xml version="1.0" encoding="utf-8"?>
 <p:tagLst xmlns:a="http://schemas.openxmlformats.org/drawingml/2006/main" xmlns:r="http://schemas.openxmlformats.org/officeDocument/2006/relationships" xmlns:p="http://schemas.openxmlformats.org/presentationml/2006/main">
   <p:tag name="SLIDO_ELEMENT" val="interaction_image"/>
-  <p:tag name="INTERACTION_TYPE" val="QA"/>
+  <p:tag name="INTERACTION_TYPE" val="MultipleChoice"/>
 </p:tagLst>
 </file>
 
